--- a/doc/prezentacija.pptx
+++ b/doc/prezentacija.pptx
@@ -5,7 +5,7 @@
     <p:sldMasterId id="2147483648" r:id="rId1"/>
   </p:sldMasterIdLst>
   <p:notesMasterIdLst>
-    <p:notesMasterId r:id="rId21"/>
+    <p:notesMasterId r:id="rId28"/>
   </p:notesMasterIdLst>
   <p:sldIdLst>
     <p:sldId id="256" r:id="rId4"/>
@@ -25,6 +25,13 @@
     <p:sldId id="270" r:id="rId18"/>
     <p:sldId id="271" r:id="rId19"/>
     <p:sldId id="272" r:id="rId20"/>
+    <p:sldId id="273" r:id="rId21"/>
+    <p:sldId id="274" r:id="rId22"/>
+    <p:sldId id="275" r:id="rId23"/>
+    <p:sldId id="276" r:id="rId24"/>
+    <p:sldId id="277" r:id="rId25"/>
+    <p:sldId id="278" r:id="rId26"/>
+    <p:sldId id="279" r:id="rId27"/>
   </p:sldIdLst>
   <p:sldSz cx="12192000" cy="6858000"/>
   <p:notesSz cx="6858000" cy="9144000"/>
@@ -150,7 +157,7 @@
       </p:grpSpPr>
       <p:sp>
         <p:nvSpPr>
-          <p:cNvPr id="1480871184" name="Header Placeholder 1"/>
+          <p:cNvPr id="2102620920" name="Header Placeholder 1"/>
           <p:cNvSpPr>
             <a:spLocks noGrp="1"/>
           </p:cNvSpPr>
@@ -184,7 +191,7 @@
       </p:sp>
       <p:sp>
         <p:nvSpPr>
-          <p:cNvPr id="451895615" name="Date Placeholder 2"/>
+          <p:cNvPr id="1406750037" name="Date Placeholder 2"/>
           <p:cNvSpPr>
             <a:spLocks noGrp="1"/>
           </p:cNvSpPr>
@@ -222,7 +229,7 @@
       </p:sp>
       <p:sp>
         <p:nvSpPr>
-          <p:cNvPr id="303733595" name="Slide Image Placeholder 3"/>
+          <p:cNvPr id="1029582395" name="Slide Image Placeholder 3"/>
           <p:cNvSpPr>
             <a:spLocks noChangeAspect="1" noGrp="1" noRot="1"/>
           </p:cNvSpPr>
@@ -258,7 +265,7 @@
       </p:sp>
       <p:sp>
         <p:nvSpPr>
-          <p:cNvPr id="1073497593" name="Notes Placeholder 4"/>
+          <p:cNvPr id="1646073498" name="Notes Placeholder 4"/>
           <p:cNvSpPr>
             <a:spLocks noGrp="1"/>
           </p:cNvSpPr>
@@ -332,7 +339,7 @@
       </p:sp>
       <p:sp>
         <p:nvSpPr>
-          <p:cNvPr id="41718082" name="Footer Placeholder 5"/>
+          <p:cNvPr id="1994829091" name="Footer Placeholder 5"/>
           <p:cNvSpPr>
             <a:spLocks noGrp="1"/>
           </p:cNvSpPr>
@@ -366,7 +373,7 @@
       </p:sp>
       <p:sp>
         <p:nvSpPr>
-          <p:cNvPr id="1480816121" name="Slide Number Placeholder 6"/>
+          <p:cNvPr id="1760315716" name="Slide Number Placeholder 6"/>
           <p:cNvSpPr>
             <a:spLocks noGrp="1"/>
           </p:cNvSpPr>
@@ -519,7 +526,7 @@
       </p:grpSpPr>
       <p:sp>
         <p:nvSpPr>
-          <p:cNvPr id="1160156686" name="Slide Image Placeholder 1"/>
+          <p:cNvPr id="572427112" name="Slide Image Placeholder 1"/>
           <p:cNvSpPr>
             <a:spLocks noChangeAspect="1" noGrp="1" noRot="1"/>
           </p:cNvSpPr>
@@ -536,7 +543,7 @@
       </p:sp>
       <p:sp>
         <p:nvSpPr>
-          <p:cNvPr id="434550912" name="Notes Placeholder 2"/>
+          <p:cNvPr id="529857813" name="Notes Placeholder 2"/>
           <p:cNvSpPr>
             <a:spLocks noGrp="1"/>
           </p:cNvSpPr>
@@ -558,7 +565,7 @@
       </p:sp>
       <p:sp>
         <p:nvSpPr>
-          <p:cNvPr id="273731424" name="Slide Number Placeholder 3"/>
+          <p:cNvPr id="707351118" name="Slide Number Placeholder 3"/>
           <p:cNvSpPr>
             <a:spLocks noGrp="1"/>
           </p:cNvSpPr>
@@ -609,7 +616,7 @@
       </p:grpSpPr>
       <p:sp>
         <p:nvSpPr>
-          <p:cNvPr id="2" name="Slide Image Placeholder 1"/>
+          <p:cNvPr id="864956103" name="Slide Image Placeholder 1"/>
           <p:cNvSpPr>
             <a:spLocks noChangeAspect="1" noGrp="1" noRot="1"/>
           </p:cNvSpPr>
@@ -621,7 +628,7 @@
       </p:sp>
       <p:sp>
         <p:nvSpPr>
-          <p:cNvPr id="3" name="Notes Placeholder 2"/>
+          <p:cNvPr id="1272016208" name="Notes Placeholder 2"/>
           <p:cNvSpPr>
             <a:spLocks noGrp="1"/>
           </p:cNvSpPr>
@@ -643,7 +650,7 @@
       </p:sp>
       <p:sp>
         <p:nvSpPr>
-          <p:cNvPr id="4" name="Slide Number Placeholder 3"/>
+          <p:cNvPr id="1344831443" name="Slide Number Placeholder 3"/>
           <p:cNvSpPr>
             <a:spLocks noGrp="1"/>
           </p:cNvSpPr>
@@ -744,7 +751,7 @@
             <a:pPr>
               <a:defRPr/>
             </a:pPr>
-            <a:fld id="{10E0D7E7-6722-5704-1268-8AFBBFCD8B79}" type="slidenum">
+            <a:fld id="{3367CFF6-A3D0-8F1A-9E26-C49672392E6C}" type="slidenum">
               <a:rPr/>
               <a:t/>
             </a:fld>
@@ -779,7 +786,7 @@
       </p:grpSpPr>
       <p:sp>
         <p:nvSpPr>
-          <p:cNvPr id="2" name="Slide Image Placeholder 1"/>
+          <p:cNvPr id="1754158772" name="Slide Image Placeholder 1"/>
           <p:cNvSpPr>
             <a:spLocks noChangeAspect="1" noGrp="1" noRot="1"/>
           </p:cNvSpPr>
@@ -791,7 +798,7 @@
       </p:sp>
       <p:sp>
         <p:nvSpPr>
-          <p:cNvPr id="3" name="Notes Placeholder 2"/>
+          <p:cNvPr id="400364458" name="Notes Placeholder 2"/>
           <p:cNvSpPr>
             <a:spLocks noGrp="1"/>
           </p:cNvSpPr>
@@ -813,7 +820,7 @@
       </p:sp>
       <p:sp>
         <p:nvSpPr>
-          <p:cNvPr id="4" name="Slide Number Placeholder 3"/>
+          <p:cNvPr id="1883188428" name="Slide Number Placeholder 3"/>
           <p:cNvSpPr>
             <a:spLocks noGrp="1"/>
           </p:cNvSpPr>
@@ -829,7 +836,7 @@
             <a:pPr>
               <a:defRPr/>
             </a:pPr>
-            <a:fld id="{032958D1-0C94-2FDE-DE77-9A57BBB6DF88}" type="slidenum">
+            <a:fld id="{10E0D7E7-6722-5704-1268-8AFBBFCD8B79}" type="slidenum">
               <a:rPr/>
               <a:t/>
             </a:fld>
@@ -864,7 +871,7 @@
       </p:grpSpPr>
       <p:sp>
         <p:nvSpPr>
-          <p:cNvPr id="2" name="Slide Image Placeholder 1"/>
+          <p:cNvPr id="1954897492" name="Slide Image Placeholder 1"/>
           <p:cNvSpPr>
             <a:spLocks noChangeAspect="1" noGrp="1" noRot="1"/>
           </p:cNvSpPr>
@@ -876,7 +883,7 @@
       </p:sp>
       <p:sp>
         <p:nvSpPr>
-          <p:cNvPr id="3" name="Notes Placeholder 2"/>
+          <p:cNvPr id="281041068" name="Notes Placeholder 2"/>
           <p:cNvSpPr>
             <a:spLocks noGrp="1"/>
           </p:cNvSpPr>
@@ -898,7 +905,7 @@
       </p:sp>
       <p:sp>
         <p:nvSpPr>
-          <p:cNvPr id="4" name="Slide Number Placeholder 3"/>
+          <p:cNvPr id="1566297231" name="Slide Number Placeholder 3"/>
           <p:cNvSpPr>
             <a:spLocks noGrp="1"/>
           </p:cNvSpPr>
@@ -914,7 +921,7 @@
             <a:pPr>
               <a:defRPr/>
             </a:pPr>
-            <a:fld id="{D829E5CD-C267-69FA-62D8-BAB8517435E2}" type="slidenum">
+            <a:fld id="{032958D1-0C94-2FDE-DE77-9A57BBB6DF88}" type="slidenum">
               <a:rPr/>
               <a:t/>
             </a:fld>
@@ -949,7 +956,7 @@
       </p:grpSpPr>
       <p:sp>
         <p:nvSpPr>
-          <p:cNvPr id="2" name="Slide Image Placeholder 1"/>
+          <p:cNvPr id="314637513" name="Slide Image Placeholder 1"/>
           <p:cNvSpPr>
             <a:spLocks noChangeAspect="1" noGrp="1" noRot="1"/>
           </p:cNvSpPr>
@@ -961,7 +968,7 @@
       </p:sp>
       <p:sp>
         <p:nvSpPr>
-          <p:cNvPr id="3" name="Notes Placeholder 2"/>
+          <p:cNvPr id="1713236523" name="Notes Placeholder 2"/>
           <p:cNvSpPr>
             <a:spLocks noGrp="1"/>
           </p:cNvSpPr>
@@ -983,7 +990,7 @@
       </p:sp>
       <p:sp>
         <p:nvSpPr>
-          <p:cNvPr id="4" name="Slide Number Placeholder 3"/>
+          <p:cNvPr id="434066305" name="Slide Number Placeholder 3"/>
           <p:cNvSpPr>
             <a:spLocks noGrp="1"/>
           </p:cNvSpPr>
@@ -999,7 +1006,7 @@
             <a:pPr>
               <a:defRPr/>
             </a:pPr>
-            <a:fld id="{54362278-674A-C743-B3F5-B6EFFB6932E7}" type="slidenum">
+            <a:fld id="{D829E5CD-C267-69FA-62D8-BAB8517435E2}" type="slidenum">
               <a:rPr/>
               <a:t/>
             </a:fld>
@@ -1034,7 +1041,7 @@
       </p:grpSpPr>
       <p:sp>
         <p:nvSpPr>
-          <p:cNvPr id="2" name="Slide Image Placeholder 1"/>
+          <p:cNvPr id="1258535794" name="Slide Image Placeholder 1"/>
           <p:cNvSpPr>
             <a:spLocks noChangeAspect="1" noGrp="1" noRot="1"/>
           </p:cNvSpPr>
@@ -1046,7 +1053,7 @@
       </p:sp>
       <p:sp>
         <p:nvSpPr>
-          <p:cNvPr id="3" name="Notes Placeholder 2"/>
+          <p:cNvPr id="473789892" name="Notes Placeholder 2"/>
           <p:cNvSpPr>
             <a:spLocks noGrp="1"/>
           </p:cNvSpPr>
@@ -1068,7 +1075,7 @@
       </p:sp>
       <p:sp>
         <p:nvSpPr>
-          <p:cNvPr id="4" name="Slide Number Placeholder 3"/>
+          <p:cNvPr id="111550126" name="Slide Number Placeholder 3"/>
           <p:cNvSpPr>
             <a:spLocks noGrp="1"/>
           </p:cNvSpPr>
@@ -1084,7 +1091,7 @@
             <a:pPr>
               <a:defRPr/>
             </a:pPr>
-            <a:fld id="{3868D433-DC14-B5CE-6480-504D564309B2}" type="slidenum">
+            <a:fld id="{54362278-674A-C743-B3F5-B6EFFB6932E7}" type="slidenum">
               <a:rPr/>
               <a:t/>
             </a:fld>
@@ -1119,7 +1126,7 @@
       </p:grpSpPr>
       <p:sp>
         <p:nvSpPr>
-          <p:cNvPr id="79300889" name="Slide Image Placeholder 1"/>
+          <p:cNvPr id="1653969402" name="Slide Image Placeholder 1"/>
           <p:cNvSpPr>
             <a:spLocks noChangeAspect="1" noGrp="1" noRot="1"/>
           </p:cNvSpPr>
@@ -1131,7 +1138,7 @@
       </p:sp>
       <p:sp>
         <p:nvSpPr>
-          <p:cNvPr id="734993990" name="Notes Placeholder 2"/>
+          <p:cNvPr id="1688354499" name="Notes Placeholder 2"/>
           <p:cNvSpPr>
             <a:spLocks noGrp="1"/>
           </p:cNvSpPr>
@@ -1153,7 +1160,7 @@
       </p:sp>
       <p:sp>
         <p:nvSpPr>
-          <p:cNvPr id="399741501" name="Slide Number Placeholder 3"/>
+          <p:cNvPr id="315725481" name="Slide Number Placeholder 3"/>
           <p:cNvSpPr>
             <a:spLocks noGrp="1"/>
           </p:cNvSpPr>
@@ -1169,7 +1176,7 @@
             <a:pPr>
               <a:defRPr/>
             </a:pPr>
-            <a:fld id="{32BA0B8B-EBE4-7004-90FD-32F817538A3E}" type="slidenum">
+            <a:fld id="{3868D433-DC14-B5CE-6480-504D564309B2}" type="slidenum">
               <a:rPr/>
               <a:t/>
             </a:fld>
@@ -1204,7 +1211,7 @@
       </p:grpSpPr>
       <p:sp>
         <p:nvSpPr>
-          <p:cNvPr id="1975903726" name="Slide Image Placeholder 1"/>
+          <p:cNvPr id="1092753963" name="Slide Image Placeholder 1"/>
           <p:cNvSpPr>
             <a:spLocks noChangeAspect="1" noGrp="1" noRot="1"/>
           </p:cNvSpPr>
@@ -1216,7 +1223,7 @@
       </p:sp>
       <p:sp>
         <p:nvSpPr>
-          <p:cNvPr id="703487598" name="Notes Placeholder 2"/>
+          <p:cNvPr id="812416420" name="Notes Placeholder 2"/>
           <p:cNvSpPr>
             <a:spLocks noGrp="1"/>
           </p:cNvSpPr>
@@ -1238,7 +1245,7 @@
       </p:sp>
       <p:sp>
         <p:nvSpPr>
-          <p:cNvPr id="511902815" name="Slide Number Placeholder 3"/>
+          <p:cNvPr id="1869162541" name="Slide Number Placeholder 3"/>
           <p:cNvSpPr>
             <a:spLocks noGrp="1"/>
           </p:cNvSpPr>
@@ -1254,7 +1261,177 @@
             <a:pPr>
               <a:defRPr/>
             </a:pPr>
-            <a:fld id="{8485414B-7970-FF37-DFE4-196570902E7E}" type="slidenum">
+            <a:fld id="{8571BA90-D936-38D9-F8AA-7E504C792144}" type="slidenum">
+              <a:rPr/>
+              <a:t/>
+            </a:fld>
+            <a:endParaRPr/>
+          </a:p>
+        </p:txBody>
+      </p:sp>
+    </p:spTree>
+  </p:cSld>
+  <p:clrMapOvr>
+    <a:masterClrMapping/>
+  </p:clrMapOvr>
+</p:notes>
+</file>
+
+<file path=ppt/notesSlides/notesSlide18.xml><?xml version="1.0" encoding="utf-8"?>
+<p:notes xmlns:a="http://schemas.openxmlformats.org/drawingml/2006/main" xmlns:r="http://schemas.openxmlformats.org/officeDocument/2006/relationships" xmlns:p="http://schemas.openxmlformats.org/presentationml/2006/main" xmlns:m="http://schemas.openxmlformats.org/officeDocument/2006/math" xmlns:w="http://schemas.openxmlformats.org/wordprocessingml/2006/main">
+  <p:cSld name="">
+    <p:spTree>
+      <p:nvGrpSpPr>
+        <p:cNvPr id="1" name=""/>
+        <p:cNvGrpSpPr/>
+        <p:nvPr/>
+      </p:nvGrpSpPr>
+      <p:grpSpPr bwMode="auto">
+        <a:xfrm>
+          <a:off x="0" y="0"/>
+          <a:ext cx="0" cy="0"/>
+          <a:chOff x="0" y="0"/>
+          <a:chExt cx="0" cy="0"/>
+        </a:xfrm>
+      </p:grpSpPr>
+      <p:sp>
+        <p:nvSpPr>
+          <p:cNvPr id="754227414" name="Slide Image Placeholder 1"/>
+          <p:cNvSpPr>
+            <a:spLocks noChangeAspect="1" noGrp="1" noRot="1"/>
+          </p:cNvSpPr>
+          <p:nvPr>
+            <p:ph type="sldImg"/>
+          </p:nvPr>
+        </p:nvSpPr>
+        <p:spPr bwMode="auto"/>
+      </p:sp>
+      <p:sp>
+        <p:nvSpPr>
+          <p:cNvPr id="1371941366" name="Notes Placeholder 2"/>
+          <p:cNvSpPr>
+            <a:spLocks noGrp="1"/>
+          </p:cNvSpPr>
+          <p:nvPr>
+            <p:ph type="body" idx="1"/>
+          </p:nvPr>
+        </p:nvSpPr>
+        <p:spPr bwMode="auto"/>
+        <p:txBody>
+          <a:bodyPr/>
+          <a:lstStyle/>
+          <a:p>
+            <a:pPr>
+              <a:defRPr/>
+            </a:pPr>
+            <a:endParaRPr/>
+          </a:p>
+        </p:txBody>
+      </p:sp>
+      <p:sp>
+        <p:nvSpPr>
+          <p:cNvPr id="1239218585" name="Slide Number Placeholder 3"/>
+          <p:cNvSpPr>
+            <a:spLocks noGrp="1"/>
+          </p:cNvSpPr>
+          <p:nvPr>
+            <p:ph type="sldNum" sz="quarter" idx="10"/>
+          </p:nvPr>
+        </p:nvSpPr>
+        <p:spPr bwMode="auto"/>
+        <p:txBody>
+          <a:bodyPr/>
+          <a:lstStyle/>
+          <a:p>
+            <a:pPr>
+              <a:defRPr/>
+            </a:pPr>
+            <a:fld id="{AFC71198-E5D1-4834-4042-D0597BEC896F}" type="slidenum">
+              <a:rPr/>
+              <a:t/>
+            </a:fld>
+            <a:endParaRPr/>
+          </a:p>
+        </p:txBody>
+      </p:sp>
+    </p:spTree>
+  </p:cSld>
+  <p:clrMapOvr>
+    <a:masterClrMapping/>
+  </p:clrMapOvr>
+</p:notes>
+</file>
+
+<file path=ppt/notesSlides/notesSlide19.xml><?xml version="1.0" encoding="utf-8"?>
+<p:notes xmlns:a="http://schemas.openxmlformats.org/drawingml/2006/main" xmlns:r="http://schemas.openxmlformats.org/officeDocument/2006/relationships" xmlns:p="http://schemas.openxmlformats.org/presentationml/2006/main" xmlns:m="http://schemas.openxmlformats.org/officeDocument/2006/math" xmlns:w="http://schemas.openxmlformats.org/wordprocessingml/2006/main">
+  <p:cSld name="">
+    <p:spTree>
+      <p:nvGrpSpPr>
+        <p:cNvPr id="1" name=""/>
+        <p:cNvGrpSpPr/>
+        <p:nvPr/>
+      </p:nvGrpSpPr>
+      <p:grpSpPr bwMode="auto">
+        <a:xfrm>
+          <a:off x="0" y="0"/>
+          <a:ext cx="0" cy="0"/>
+          <a:chOff x="0" y="0"/>
+          <a:chExt cx="0" cy="0"/>
+        </a:xfrm>
+      </p:grpSpPr>
+      <p:sp>
+        <p:nvSpPr>
+          <p:cNvPr id="2" name="Slide Image Placeholder 1"/>
+          <p:cNvSpPr>
+            <a:spLocks noChangeAspect="1" noGrp="1" noRot="1"/>
+          </p:cNvSpPr>
+          <p:nvPr>
+            <p:ph type="sldImg"/>
+          </p:nvPr>
+        </p:nvSpPr>
+        <p:spPr bwMode="auto"/>
+      </p:sp>
+      <p:sp>
+        <p:nvSpPr>
+          <p:cNvPr id="3" name="Notes Placeholder 2"/>
+          <p:cNvSpPr>
+            <a:spLocks noGrp="1"/>
+          </p:cNvSpPr>
+          <p:nvPr>
+            <p:ph type="body" idx="1"/>
+          </p:nvPr>
+        </p:nvSpPr>
+        <p:spPr bwMode="auto"/>
+        <p:txBody>
+          <a:bodyPr/>
+          <a:lstStyle/>
+          <a:p>
+            <a:pPr>
+              <a:defRPr/>
+            </a:pPr>
+            <a:endParaRPr/>
+          </a:p>
+        </p:txBody>
+      </p:sp>
+      <p:sp>
+        <p:nvSpPr>
+          <p:cNvPr id="4" name="Slide Number Placeholder 3"/>
+          <p:cNvSpPr>
+            <a:spLocks noGrp="1"/>
+          </p:cNvSpPr>
+          <p:nvPr>
+            <p:ph type="sldNum" sz="quarter" idx="10"/>
+          </p:nvPr>
+        </p:nvSpPr>
+        <p:spPr bwMode="auto"/>
+        <p:txBody>
+          <a:bodyPr/>
+          <a:lstStyle/>
+          <a:p>
+            <a:pPr>
+              <a:defRPr/>
+            </a:pPr>
+            <a:fld id="{2668AA01-8AF6-30D3-2C7F-57DF56D4963D}" type="slidenum">
               <a:rPr/>
               <a:t/>
             </a:fld>
@@ -1289,7 +1466,7 @@
       </p:grpSpPr>
       <p:sp>
         <p:nvSpPr>
-          <p:cNvPr id="464876781" name="Slide Image Placeholder 1"/>
+          <p:cNvPr id="942786807" name="Slide Image Placeholder 1"/>
           <p:cNvSpPr>
             <a:spLocks noChangeAspect="1" noGrp="1" noRot="1"/>
           </p:cNvSpPr>
@@ -1301,7 +1478,7 @@
       </p:sp>
       <p:sp>
         <p:nvSpPr>
-          <p:cNvPr id="20564174" name="Notes Placeholder 2"/>
+          <p:cNvPr id="659686187" name="Notes Placeholder 2"/>
           <p:cNvSpPr>
             <a:spLocks noGrp="1"/>
           </p:cNvSpPr>
@@ -1323,7 +1500,7 @@
       </p:sp>
       <p:sp>
         <p:nvSpPr>
-          <p:cNvPr id="1104483492" name="Slide Number Placeholder 3"/>
+          <p:cNvPr id="125826357" name="Slide Number Placeholder 3"/>
           <p:cNvSpPr>
             <a:spLocks noGrp="1"/>
           </p:cNvSpPr>
@@ -1340,6 +1517,431 @@
               <a:defRPr/>
             </a:pPr>
             <a:fld id="{0F758B36-CFC1-50BB-A968-2BD9BA901A0E}" type="slidenum">
+              <a:rPr/>
+              <a:t/>
+            </a:fld>
+            <a:endParaRPr/>
+          </a:p>
+        </p:txBody>
+      </p:sp>
+    </p:spTree>
+  </p:cSld>
+  <p:clrMapOvr>
+    <a:masterClrMapping/>
+  </p:clrMapOvr>
+</p:notes>
+</file>
+
+<file path=ppt/notesSlides/notesSlide20.xml><?xml version="1.0" encoding="utf-8"?>
+<p:notes xmlns:a="http://schemas.openxmlformats.org/drawingml/2006/main" xmlns:r="http://schemas.openxmlformats.org/officeDocument/2006/relationships" xmlns:p="http://schemas.openxmlformats.org/presentationml/2006/main" xmlns:m="http://schemas.openxmlformats.org/officeDocument/2006/math" xmlns:w="http://schemas.openxmlformats.org/wordprocessingml/2006/main">
+  <p:cSld name="">
+    <p:spTree>
+      <p:nvGrpSpPr>
+        <p:cNvPr id="1" name=""/>
+        <p:cNvGrpSpPr/>
+        <p:nvPr/>
+      </p:nvGrpSpPr>
+      <p:grpSpPr bwMode="auto">
+        <a:xfrm>
+          <a:off x="0" y="0"/>
+          <a:ext cx="0" cy="0"/>
+          <a:chOff x="0" y="0"/>
+          <a:chExt cx="0" cy="0"/>
+        </a:xfrm>
+      </p:grpSpPr>
+      <p:sp>
+        <p:nvSpPr>
+          <p:cNvPr id="133716128" name="Slide Image Placeholder 1"/>
+          <p:cNvSpPr>
+            <a:spLocks noChangeAspect="1" noGrp="1" noRot="1"/>
+          </p:cNvSpPr>
+          <p:nvPr>
+            <p:ph type="sldImg"/>
+          </p:nvPr>
+        </p:nvSpPr>
+        <p:spPr bwMode="auto"/>
+      </p:sp>
+      <p:sp>
+        <p:nvSpPr>
+          <p:cNvPr id="1628738614" name="Notes Placeholder 2"/>
+          <p:cNvSpPr>
+            <a:spLocks noGrp="1"/>
+          </p:cNvSpPr>
+          <p:nvPr>
+            <p:ph type="body" idx="1"/>
+          </p:nvPr>
+        </p:nvSpPr>
+        <p:spPr bwMode="auto"/>
+        <p:txBody>
+          <a:bodyPr/>
+          <a:lstStyle/>
+          <a:p>
+            <a:pPr>
+              <a:defRPr/>
+            </a:pPr>
+            <a:endParaRPr/>
+          </a:p>
+        </p:txBody>
+      </p:sp>
+      <p:sp>
+        <p:nvSpPr>
+          <p:cNvPr id="1004908885" name="Slide Number Placeholder 3"/>
+          <p:cNvSpPr>
+            <a:spLocks noGrp="1"/>
+          </p:cNvSpPr>
+          <p:nvPr>
+            <p:ph type="sldNum" sz="quarter" idx="10"/>
+          </p:nvPr>
+        </p:nvSpPr>
+        <p:spPr bwMode="auto"/>
+        <p:txBody>
+          <a:bodyPr/>
+          <a:lstStyle/>
+          <a:p>
+            <a:pPr>
+              <a:defRPr/>
+            </a:pPr>
+            <a:fld id="{2ECBC3AC-D350-0931-E5FF-7E581EF3C003}" type="slidenum">
+              <a:rPr/>
+              <a:t/>
+            </a:fld>
+            <a:endParaRPr/>
+          </a:p>
+        </p:txBody>
+      </p:sp>
+    </p:spTree>
+  </p:cSld>
+  <p:clrMapOvr>
+    <a:masterClrMapping/>
+  </p:clrMapOvr>
+</p:notes>
+</file>
+
+<file path=ppt/notesSlides/notesSlide21.xml><?xml version="1.0" encoding="utf-8"?>
+<p:notes xmlns:a="http://schemas.openxmlformats.org/drawingml/2006/main" xmlns:r="http://schemas.openxmlformats.org/officeDocument/2006/relationships" xmlns:p="http://schemas.openxmlformats.org/presentationml/2006/main" xmlns:m="http://schemas.openxmlformats.org/officeDocument/2006/math" xmlns:w="http://schemas.openxmlformats.org/wordprocessingml/2006/main">
+  <p:cSld name="">
+    <p:spTree>
+      <p:nvGrpSpPr>
+        <p:cNvPr id="1" name=""/>
+        <p:cNvGrpSpPr/>
+        <p:nvPr/>
+      </p:nvGrpSpPr>
+      <p:grpSpPr bwMode="auto">
+        <a:xfrm>
+          <a:off x="0" y="0"/>
+          <a:ext cx="0" cy="0"/>
+          <a:chOff x="0" y="0"/>
+          <a:chExt cx="0" cy="0"/>
+        </a:xfrm>
+      </p:grpSpPr>
+      <p:sp>
+        <p:nvSpPr>
+          <p:cNvPr id="2" name="Slide Image Placeholder 1"/>
+          <p:cNvSpPr>
+            <a:spLocks noChangeAspect="1" noGrp="1" noRot="1"/>
+          </p:cNvSpPr>
+          <p:nvPr>
+            <p:ph type="sldImg"/>
+          </p:nvPr>
+        </p:nvSpPr>
+        <p:spPr bwMode="auto"/>
+      </p:sp>
+      <p:sp>
+        <p:nvSpPr>
+          <p:cNvPr id="3" name="Notes Placeholder 2"/>
+          <p:cNvSpPr>
+            <a:spLocks noGrp="1"/>
+          </p:cNvSpPr>
+          <p:nvPr>
+            <p:ph type="body" idx="1"/>
+          </p:nvPr>
+        </p:nvSpPr>
+        <p:spPr bwMode="auto"/>
+        <p:txBody>
+          <a:bodyPr/>
+          <a:lstStyle/>
+          <a:p>
+            <a:pPr>
+              <a:defRPr/>
+            </a:pPr>
+            <a:endParaRPr/>
+          </a:p>
+        </p:txBody>
+      </p:sp>
+      <p:sp>
+        <p:nvSpPr>
+          <p:cNvPr id="4" name="Slide Number Placeholder 3"/>
+          <p:cNvSpPr>
+            <a:spLocks noGrp="1"/>
+          </p:cNvSpPr>
+          <p:nvPr>
+            <p:ph type="sldNum" sz="quarter" idx="10"/>
+          </p:nvPr>
+        </p:nvSpPr>
+        <p:spPr bwMode="auto"/>
+        <p:txBody>
+          <a:bodyPr/>
+          <a:lstStyle/>
+          <a:p>
+            <a:pPr>
+              <a:defRPr/>
+            </a:pPr>
+            <a:fld id="{09F9C868-ACA2-6E33-F046-BD1F80A6EC69}" type="slidenum">
+              <a:rPr/>
+              <a:t/>
+            </a:fld>
+            <a:endParaRPr/>
+          </a:p>
+        </p:txBody>
+      </p:sp>
+    </p:spTree>
+  </p:cSld>
+  <p:clrMapOvr>
+    <a:masterClrMapping/>
+  </p:clrMapOvr>
+</p:notes>
+</file>
+
+<file path=ppt/notesSlides/notesSlide22.xml><?xml version="1.0" encoding="utf-8"?>
+<p:notes xmlns:a="http://schemas.openxmlformats.org/drawingml/2006/main" xmlns:r="http://schemas.openxmlformats.org/officeDocument/2006/relationships" xmlns:p="http://schemas.openxmlformats.org/presentationml/2006/main" xmlns:m="http://schemas.openxmlformats.org/officeDocument/2006/math" xmlns:w="http://schemas.openxmlformats.org/wordprocessingml/2006/main">
+  <p:cSld name="">
+    <p:spTree>
+      <p:nvGrpSpPr>
+        <p:cNvPr id="1" name=""/>
+        <p:cNvGrpSpPr/>
+        <p:nvPr/>
+      </p:nvGrpSpPr>
+      <p:grpSpPr bwMode="auto">
+        <a:xfrm>
+          <a:off x="0" y="0"/>
+          <a:ext cx="0" cy="0"/>
+          <a:chOff x="0" y="0"/>
+          <a:chExt cx="0" cy="0"/>
+        </a:xfrm>
+      </p:grpSpPr>
+      <p:sp>
+        <p:nvSpPr>
+          <p:cNvPr id="33794469" name="Slide Image Placeholder 1"/>
+          <p:cNvSpPr>
+            <a:spLocks noChangeAspect="1" noGrp="1" noRot="1"/>
+          </p:cNvSpPr>
+          <p:nvPr>
+            <p:ph type="sldImg"/>
+          </p:nvPr>
+        </p:nvSpPr>
+        <p:spPr bwMode="auto"/>
+      </p:sp>
+      <p:sp>
+        <p:nvSpPr>
+          <p:cNvPr id="164214524" name="Notes Placeholder 2"/>
+          <p:cNvSpPr>
+            <a:spLocks noGrp="1"/>
+          </p:cNvSpPr>
+          <p:nvPr>
+            <p:ph type="body" idx="1"/>
+          </p:nvPr>
+        </p:nvSpPr>
+        <p:spPr bwMode="auto"/>
+        <p:txBody>
+          <a:bodyPr/>
+          <a:lstStyle/>
+          <a:p>
+            <a:pPr>
+              <a:defRPr/>
+            </a:pPr>
+            <a:endParaRPr/>
+          </a:p>
+        </p:txBody>
+      </p:sp>
+      <p:sp>
+        <p:nvSpPr>
+          <p:cNvPr id="76184468" name="Slide Number Placeholder 3"/>
+          <p:cNvSpPr>
+            <a:spLocks noGrp="1"/>
+          </p:cNvSpPr>
+          <p:nvPr>
+            <p:ph type="sldNum" sz="quarter" idx="10"/>
+          </p:nvPr>
+        </p:nvSpPr>
+        <p:spPr bwMode="auto"/>
+        <p:txBody>
+          <a:bodyPr/>
+          <a:lstStyle/>
+          <a:p>
+            <a:pPr>
+              <a:defRPr/>
+            </a:pPr>
+            <a:fld id="{E8F025E7-F78B-7C04-835D-646AAB1E0267}" type="slidenum">
+              <a:rPr/>
+              <a:t/>
+            </a:fld>
+            <a:endParaRPr/>
+          </a:p>
+        </p:txBody>
+      </p:sp>
+    </p:spTree>
+  </p:cSld>
+  <p:clrMapOvr>
+    <a:masterClrMapping/>
+  </p:clrMapOvr>
+</p:notes>
+</file>
+
+<file path=ppt/notesSlides/notesSlide23.xml><?xml version="1.0" encoding="utf-8"?>
+<p:notes xmlns:a="http://schemas.openxmlformats.org/drawingml/2006/main" xmlns:r="http://schemas.openxmlformats.org/officeDocument/2006/relationships" xmlns:p="http://schemas.openxmlformats.org/presentationml/2006/main" xmlns:m="http://schemas.openxmlformats.org/officeDocument/2006/math" xmlns:w="http://schemas.openxmlformats.org/wordprocessingml/2006/main">
+  <p:cSld name="">
+    <p:spTree>
+      <p:nvGrpSpPr>
+        <p:cNvPr id="1" name=""/>
+        <p:cNvGrpSpPr/>
+        <p:nvPr/>
+      </p:nvGrpSpPr>
+      <p:grpSpPr bwMode="auto">
+        <a:xfrm>
+          <a:off x="0" y="0"/>
+          <a:ext cx="0" cy="0"/>
+          <a:chOff x="0" y="0"/>
+          <a:chExt cx="0" cy="0"/>
+        </a:xfrm>
+      </p:grpSpPr>
+      <p:sp>
+        <p:nvSpPr>
+          <p:cNvPr id="2" name="Slide Image Placeholder 1"/>
+          <p:cNvSpPr>
+            <a:spLocks noChangeAspect="1" noGrp="1" noRot="1"/>
+          </p:cNvSpPr>
+          <p:nvPr>
+            <p:ph type="sldImg"/>
+          </p:nvPr>
+        </p:nvSpPr>
+        <p:spPr bwMode="auto"/>
+      </p:sp>
+      <p:sp>
+        <p:nvSpPr>
+          <p:cNvPr id="3" name="Notes Placeholder 2"/>
+          <p:cNvSpPr>
+            <a:spLocks noGrp="1"/>
+          </p:cNvSpPr>
+          <p:nvPr>
+            <p:ph type="body" idx="1"/>
+          </p:nvPr>
+        </p:nvSpPr>
+        <p:spPr bwMode="auto"/>
+        <p:txBody>
+          <a:bodyPr/>
+          <a:lstStyle/>
+          <a:p>
+            <a:pPr>
+              <a:defRPr/>
+            </a:pPr>
+            <a:endParaRPr/>
+          </a:p>
+        </p:txBody>
+      </p:sp>
+      <p:sp>
+        <p:nvSpPr>
+          <p:cNvPr id="4" name="Slide Number Placeholder 3"/>
+          <p:cNvSpPr>
+            <a:spLocks noGrp="1"/>
+          </p:cNvSpPr>
+          <p:nvPr>
+            <p:ph type="sldNum" sz="quarter" idx="10"/>
+          </p:nvPr>
+        </p:nvSpPr>
+        <p:spPr bwMode="auto"/>
+        <p:txBody>
+          <a:bodyPr/>
+          <a:lstStyle/>
+          <a:p>
+            <a:pPr>
+              <a:defRPr/>
+            </a:pPr>
+            <a:fld id="{EA00217A-4854-DB52-6DD2-356994EE8414}" type="slidenum">
+              <a:rPr/>
+              <a:t/>
+            </a:fld>
+            <a:endParaRPr/>
+          </a:p>
+        </p:txBody>
+      </p:sp>
+    </p:spTree>
+  </p:cSld>
+  <p:clrMapOvr>
+    <a:masterClrMapping/>
+  </p:clrMapOvr>
+</p:notes>
+</file>
+
+<file path=ppt/notesSlides/notesSlide24.xml><?xml version="1.0" encoding="utf-8"?>
+<p:notes xmlns:a="http://schemas.openxmlformats.org/drawingml/2006/main" xmlns:r="http://schemas.openxmlformats.org/officeDocument/2006/relationships" xmlns:p="http://schemas.openxmlformats.org/presentationml/2006/main" xmlns:m="http://schemas.openxmlformats.org/officeDocument/2006/math" xmlns:w="http://schemas.openxmlformats.org/wordprocessingml/2006/main">
+  <p:cSld name="">
+    <p:spTree>
+      <p:nvGrpSpPr>
+        <p:cNvPr id="1" name=""/>
+        <p:cNvGrpSpPr/>
+        <p:nvPr/>
+      </p:nvGrpSpPr>
+      <p:grpSpPr bwMode="auto">
+        <a:xfrm>
+          <a:off x="0" y="0"/>
+          <a:ext cx="0" cy="0"/>
+          <a:chOff x="0" y="0"/>
+          <a:chExt cx="0" cy="0"/>
+        </a:xfrm>
+      </p:grpSpPr>
+      <p:sp>
+        <p:nvSpPr>
+          <p:cNvPr id="1467868835" name="Slide Image Placeholder 1"/>
+          <p:cNvSpPr>
+            <a:spLocks noChangeAspect="1" noGrp="1" noRot="1"/>
+          </p:cNvSpPr>
+          <p:nvPr>
+            <p:ph type="sldImg"/>
+          </p:nvPr>
+        </p:nvSpPr>
+        <p:spPr bwMode="auto"/>
+      </p:sp>
+      <p:sp>
+        <p:nvSpPr>
+          <p:cNvPr id="15744817" name="Notes Placeholder 2"/>
+          <p:cNvSpPr>
+            <a:spLocks noGrp="1"/>
+          </p:cNvSpPr>
+          <p:nvPr>
+            <p:ph type="body" idx="1"/>
+          </p:nvPr>
+        </p:nvSpPr>
+        <p:spPr bwMode="auto"/>
+        <p:txBody>
+          <a:bodyPr/>
+          <a:lstStyle/>
+          <a:p>
+            <a:pPr>
+              <a:defRPr/>
+            </a:pPr>
+            <a:endParaRPr/>
+          </a:p>
+        </p:txBody>
+      </p:sp>
+      <p:sp>
+        <p:nvSpPr>
+          <p:cNvPr id="673149296" name="Slide Number Placeholder 3"/>
+          <p:cNvSpPr>
+            <a:spLocks noGrp="1"/>
+          </p:cNvSpPr>
+          <p:nvPr>
+            <p:ph type="sldNum" sz="quarter" idx="10"/>
+          </p:nvPr>
+        </p:nvSpPr>
+        <p:spPr bwMode="auto"/>
+        <p:txBody>
+          <a:bodyPr/>
+          <a:lstStyle/>
+          <a:p>
+            <a:pPr>
+              <a:defRPr/>
+            </a:pPr>
+            <a:fld id="{8485414B-7970-FF37-DFE4-196570902E7E}" type="slidenum">
               <a:rPr/>
               <a:t/>
             </a:fld>
@@ -1374,7 +1976,7 @@
       </p:grpSpPr>
       <p:sp>
         <p:nvSpPr>
-          <p:cNvPr id="409708053" name="Slide Image Placeholder 1"/>
+          <p:cNvPr id="1928191951" name="Slide Image Placeholder 1"/>
           <p:cNvSpPr>
             <a:spLocks noChangeAspect="1" noGrp="1" noRot="1"/>
           </p:cNvSpPr>
@@ -1386,7 +1988,7 @@
       </p:sp>
       <p:sp>
         <p:nvSpPr>
-          <p:cNvPr id="946268311" name="Notes Placeholder 2"/>
+          <p:cNvPr id="1207617864" name="Notes Placeholder 2"/>
           <p:cNvSpPr>
             <a:spLocks noGrp="1"/>
           </p:cNvSpPr>
@@ -1408,7 +2010,7 @@
       </p:sp>
       <p:sp>
         <p:nvSpPr>
-          <p:cNvPr id="1282979193" name="Slide Number Placeholder 3"/>
+          <p:cNvPr id="1240808182" name="Slide Number Placeholder 3"/>
           <p:cNvSpPr>
             <a:spLocks noGrp="1"/>
           </p:cNvSpPr>
@@ -1459,7 +2061,7 @@
       </p:grpSpPr>
       <p:sp>
         <p:nvSpPr>
-          <p:cNvPr id="1588004717" name="Slide Image Placeholder 1"/>
+          <p:cNvPr id="2134828858" name="Slide Image Placeholder 1"/>
           <p:cNvSpPr>
             <a:spLocks noChangeAspect="1" noGrp="1" noRot="1"/>
           </p:cNvSpPr>
@@ -1471,7 +2073,7 @@
       </p:sp>
       <p:sp>
         <p:nvSpPr>
-          <p:cNvPr id="1950407365" name="Notes Placeholder 2"/>
+          <p:cNvPr id="1891396323" name="Notes Placeholder 2"/>
           <p:cNvSpPr>
             <a:spLocks noGrp="1"/>
           </p:cNvSpPr>
@@ -1503,7 +2105,7 @@
       </p:sp>
       <p:sp>
         <p:nvSpPr>
-          <p:cNvPr id="1513344363" name="Slide Number Placeholder 3"/>
+          <p:cNvPr id="1650843162" name="Slide Number Placeholder 3"/>
           <p:cNvSpPr>
             <a:spLocks noGrp="1"/>
           </p:cNvSpPr>
@@ -1554,7 +2156,7 @@
       </p:grpSpPr>
       <p:sp>
         <p:nvSpPr>
-          <p:cNvPr id="1132463407" name="Slide Image Placeholder 1"/>
+          <p:cNvPr id="104146917" name="Slide Image Placeholder 1"/>
           <p:cNvSpPr>
             <a:spLocks noChangeAspect="1" noGrp="1" noRot="1"/>
           </p:cNvSpPr>
@@ -1566,7 +2168,7 @@
       </p:sp>
       <p:sp>
         <p:nvSpPr>
-          <p:cNvPr id="1819588341" name="Notes Placeholder 2"/>
+          <p:cNvPr id="731837253" name="Notes Placeholder 2"/>
           <p:cNvSpPr>
             <a:spLocks noGrp="1"/>
           </p:cNvSpPr>
@@ -1588,7 +2190,7 @@
       </p:sp>
       <p:sp>
         <p:nvSpPr>
-          <p:cNvPr id="628281205" name="Slide Number Placeholder 3"/>
+          <p:cNvPr id="818508819" name="Slide Number Placeholder 3"/>
           <p:cNvSpPr>
             <a:spLocks noGrp="1"/>
           </p:cNvSpPr>
@@ -1639,7 +2241,7 @@
       </p:grpSpPr>
       <p:sp>
         <p:nvSpPr>
-          <p:cNvPr id="609867083" name="Slide Image Placeholder 1"/>
+          <p:cNvPr id="1115554839" name="Slide Image Placeholder 1"/>
           <p:cNvSpPr>
             <a:spLocks noChangeAspect="1" noGrp="1" noRot="1"/>
           </p:cNvSpPr>
@@ -1651,7 +2253,7 @@
       </p:sp>
       <p:sp>
         <p:nvSpPr>
-          <p:cNvPr id="1007819500" name="Notes Placeholder 2"/>
+          <p:cNvPr id="1068722626" name="Notes Placeholder 2"/>
           <p:cNvSpPr>
             <a:spLocks noGrp="1"/>
           </p:cNvSpPr>
@@ -1673,7 +2275,7 @@
       </p:sp>
       <p:sp>
         <p:nvSpPr>
-          <p:cNvPr id="320435208" name="Slide Number Placeholder 3"/>
+          <p:cNvPr id="1297205966" name="Slide Number Placeholder 3"/>
           <p:cNvSpPr>
             <a:spLocks noGrp="1"/>
           </p:cNvSpPr>
@@ -1724,7 +2326,7 @@
       </p:grpSpPr>
       <p:sp>
         <p:nvSpPr>
-          <p:cNvPr id="1636078777" name="Slide Image Placeholder 1"/>
+          <p:cNvPr id="215324305" name="Slide Image Placeholder 1"/>
           <p:cNvSpPr>
             <a:spLocks noChangeAspect="1" noGrp="1" noRot="1"/>
           </p:cNvSpPr>
@@ -1736,7 +2338,7 @@
       </p:sp>
       <p:sp>
         <p:nvSpPr>
-          <p:cNvPr id="1248717646" name="Notes Placeholder 2"/>
+          <p:cNvPr id="84899668" name="Notes Placeholder 2"/>
           <p:cNvSpPr>
             <a:spLocks noGrp="1"/>
           </p:cNvSpPr>
@@ -1758,7 +2360,7 @@
       </p:sp>
       <p:sp>
         <p:nvSpPr>
-          <p:cNvPr id="371276900" name="Slide Number Placeholder 3"/>
+          <p:cNvPr id="1085656721" name="Slide Number Placeholder 3"/>
           <p:cNvSpPr>
             <a:spLocks noGrp="1"/>
           </p:cNvSpPr>
@@ -1809,7 +2411,7 @@
       </p:grpSpPr>
       <p:sp>
         <p:nvSpPr>
-          <p:cNvPr id="401296545" name="Slide Image Placeholder 1"/>
+          <p:cNvPr id="767493641" name="Slide Image Placeholder 1"/>
           <p:cNvSpPr>
             <a:spLocks noChangeAspect="1" noGrp="1" noRot="1"/>
           </p:cNvSpPr>
@@ -1821,7 +2423,7 @@
       </p:sp>
       <p:sp>
         <p:nvSpPr>
-          <p:cNvPr id="1323932433" name="Notes Placeholder 2"/>
+          <p:cNvPr id="1256687285" name="Notes Placeholder 2"/>
           <p:cNvSpPr>
             <a:spLocks noGrp="1"/>
           </p:cNvSpPr>
@@ -1843,7 +2445,7 @@
       </p:sp>
       <p:sp>
         <p:nvSpPr>
-          <p:cNvPr id="1436590023" name="Slide Number Placeholder 3"/>
+          <p:cNvPr id="1606622740" name="Slide Number Placeholder 3"/>
           <p:cNvSpPr>
             <a:spLocks noGrp="1"/>
           </p:cNvSpPr>
@@ -1894,7 +2496,7 @@
       </p:grpSpPr>
       <p:sp>
         <p:nvSpPr>
-          <p:cNvPr id="764907653" name="Slide Image Placeholder 1"/>
+          <p:cNvPr id="1672611759" name="Slide Image Placeholder 1"/>
           <p:cNvSpPr>
             <a:spLocks noChangeAspect="1" noGrp="1" noRot="1"/>
           </p:cNvSpPr>
@@ -1906,7 +2508,7 @@
       </p:sp>
       <p:sp>
         <p:nvSpPr>
-          <p:cNvPr id="1324196457" name="Notes Placeholder 2"/>
+          <p:cNvPr id="1754179872" name="Notes Placeholder 2"/>
           <p:cNvSpPr>
             <a:spLocks noGrp="1"/>
           </p:cNvSpPr>
@@ -1928,7 +2530,7 @@
       </p:sp>
       <p:sp>
         <p:nvSpPr>
-          <p:cNvPr id="169227573" name="Slide Number Placeholder 3"/>
+          <p:cNvPr id="2071571208" name="Slide Number Placeholder 3"/>
           <p:cNvSpPr>
             <a:spLocks noGrp="1"/>
           </p:cNvSpPr>
@@ -1979,7 +2581,7 @@
       </p:grpSpPr>
       <p:sp>
         <p:nvSpPr>
-          <p:cNvPr id="871783335" name="Title 1"/>
+          <p:cNvPr id="1442459406" name="Title 1"/>
           <p:cNvSpPr>
             <a:spLocks noGrp="1"/>
           </p:cNvSpPr>
@@ -2019,7 +2621,7 @@
       </p:sp>
       <p:sp>
         <p:nvSpPr>
-          <p:cNvPr id="97422522" name="Subtitle 2"/>
+          <p:cNvPr id="965001423" name="Subtitle 2"/>
           <p:cNvSpPr>
             <a:spLocks noGrp="1"/>
           </p:cNvSpPr>
@@ -2092,7 +2694,7 @@
       </p:sp>
       <p:sp>
         <p:nvSpPr>
-          <p:cNvPr id="1343557511" name="Rectangle 7"/>
+          <p:cNvPr id="2118380189" name="Rectangle 7"/>
           <p:cNvSpPr/>
           <p:nvPr userDrawn="1"/>
         </p:nvSpPr>
@@ -2134,7 +2736,7 @@
       </p:sp>
       <p:sp>
         <p:nvSpPr>
-          <p:cNvPr id="2128015221" name="Rectangle 10"/>
+          <p:cNvPr id="1560001750" name="Rectangle 10"/>
           <p:cNvSpPr/>
           <p:nvPr userDrawn="1"/>
         </p:nvSpPr>
@@ -2201,7 +2803,7 @@
       </p:grpSpPr>
       <p:sp>
         <p:nvSpPr>
-          <p:cNvPr id="1124958633" name="Title 1"/>
+          <p:cNvPr id="2122610233" name="Title 1"/>
           <p:cNvSpPr>
             <a:spLocks noGrp="1"/>
           </p:cNvSpPr>
@@ -2241,7 +2843,7 @@
       </p:sp>
       <p:sp>
         <p:nvSpPr>
-          <p:cNvPr id="440276505" name="Rectangle 7"/>
+          <p:cNvPr id="792748482" name="Rectangle 7"/>
           <p:cNvSpPr/>
           <p:nvPr userDrawn="1"/>
         </p:nvSpPr>
@@ -2283,7 +2885,7 @@
       </p:sp>
       <p:sp>
         <p:nvSpPr>
-          <p:cNvPr id="1641933329" name="Rectangle 10"/>
+          <p:cNvPr id="810325483" name="Rectangle 10"/>
           <p:cNvSpPr/>
           <p:nvPr userDrawn="1"/>
         </p:nvSpPr>
@@ -2350,7 +2952,7 @@
       </p:grpSpPr>
       <p:sp>
         <p:nvSpPr>
-          <p:cNvPr id="138343044" name="Content Placeholder 2"/>
+          <p:cNvPr id="1853471594" name="Content Placeholder 2"/>
           <p:cNvSpPr>
             <a:spLocks noGrp="1"/>
           </p:cNvSpPr>
@@ -2447,7 +3049,7 @@
       </p:sp>
       <p:sp>
         <p:nvSpPr>
-          <p:cNvPr id="1129470217" name="Content Placeholder 3"/>
+          <p:cNvPr id="1583687452" name="Content Placeholder 3"/>
           <p:cNvSpPr>
             <a:spLocks noGrp="1"/>
           </p:cNvSpPr>
@@ -2544,7 +3146,7 @@
       </p:sp>
       <p:sp>
         <p:nvSpPr>
-          <p:cNvPr id="1679425142" name="Slide Number Placeholder 6"/>
+          <p:cNvPr id="689715249" name="Slide Number Placeholder 6"/>
           <p:cNvSpPr>
             <a:spLocks noGrp="1"/>
           </p:cNvSpPr>
@@ -2575,7 +3177,7 @@
       </p:sp>
       <p:sp>
         <p:nvSpPr>
-          <p:cNvPr id="562578696" name="Footer Placeholder 5"/>
+          <p:cNvPr id="1277664289" name="Footer Placeholder 5"/>
           <p:cNvSpPr>
             <a:spLocks noGrp="1"/>
           </p:cNvSpPr>
@@ -2601,7 +3203,7 @@
       </p:sp>
       <p:sp>
         <p:nvSpPr>
-          <p:cNvPr id="1723254546" name="Title Placeholder 1"/>
+          <p:cNvPr id="1668804471" name="Title Placeholder 1"/>
           <p:cNvSpPr>
             <a:spLocks noGrp="1"/>
           </p:cNvSpPr>
@@ -2637,7 +3239,7 @@
       </p:sp>
       <p:cxnSp>
         <p:nvCxnSpPr>
-          <p:cNvPr id="1262331031" name="Straight Connector 9"/>
+          <p:cNvPr id="1764745174" name="Straight Connector 9"/>
           <p:cNvCxnSpPr/>
           <p:nvPr userDrawn="1"/>
         </p:nvCxnSpPr>
@@ -2700,7 +3302,7 @@
       </p:grpSpPr>
       <p:sp>
         <p:nvSpPr>
-          <p:cNvPr id="290724441" name="Title 1"/>
+          <p:cNvPr id="1696504307" name="Title 1"/>
           <p:cNvSpPr>
             <a:spLocks noGrp="1"/>
           </p:cNvSpPr>
@@ -2726,7 +3328,7 @@
       </p:sp>
       <p:sp>
         <p:nvSpPr>
-          <p:cNvPr id="1275286853" name="Footer Placeholder 2"/>
+          <p:cNvPr id="888357281" name="Footer Placeholder 2"/>
           <p:cNvSpPr>
             <a:spLocks noGrp="1"/>
           </p:cNvSpPr>
@@ -2752,7 +3354,7 @@
       </p:sp>
       <p:sp>
         <p:nvSpPr>
-          <p:cNvPr id="731696312" name="Slide Number Placeholder 3"/>
+          <p:cNvPr id="1695708406" name="Slide Number Placeholder 3"/>
           <p:cNvSpPr>
             <a:spLocks noGrp="1"/>
           </p:cNvSpPr>
@@ -2778,7 +3380,7 @@
       </p:sp>
       <p:sp>
         <p:nvSpPr>
-          <p:cNvPr id="1107412548" name="Text Placeholder 2"/>
+          <p:cNvPr id="1214998381" name="Text Placeholder 2"/>
           <p:cNvSpPr>
             <a:spLocks noGrp="1"/>
           </p:cNvSpPr>
@@ -2854,7 +3456,7 @@
       </p:sp>
       <p:cxnSp>
         <p:nvCxnSpPr>
-          <p:cNvPr id="570308344" name="Straight Connector 5"/>
+          <p:cNvPr id="329834795" name="Straight Connector 5"/>
           <p:cNvCxnSpPr/>
           <p:nvPr userDrawn="1"/>
         </p:nvCxnSpPr>
@@ -2917,7 +3519,7 @@
       </p:grpSpPr>
       <p:sp>
         <p:nvSpPr>
-          <p:cNvPr id="761190505" name="Title 1"/>
+          <p:cNvPr id="40386782" name="Title 1"/>
           <p:cNvSpPr>
             <a:spLocks noGrp="1"/>
           </p:cNvSpPr>
@@ -2949,7 +3551,7 @@
       </p:sp>
       <p:sp>
         <p:nvSpPr>
-          <p:cNvPr id="495372859" name="Footer Placeholder 2"/>
+          <p:cNvPr id="321603047" name="Footer Placeholder 2"/>
           <p:cNvSpPr>
             <a:spLocks noGrp="1"/>
           </p:cNvSpPr>
@@ -2975,7 +3577,7 @@
       </p:sp>
       <p:sp>
         <p:nvSpPr>
-          <p:cNvPr id="544381961" name="Slide Number Placeholder 3"/>
+          <p:cNvPr id="129171096" name="Slide Number Placeholder 3"/>
           <p:cNvSpPr>
             <a:spLocks noGrp="1"/>
           </p:cNvSpPr>
@@ -3001,7 +3603,7 @@
       </p:sp>
       <p:sp>
         <p:nvSpPr>
-          <p:cNvPr id="734951112" name="Text Placeholder 2"/>
+          <p:cNvPr id="1497837763" name="Text Placeholder 2"/>
           <p:cNvSpPr>
             <a:spLocks noGrp="1"/>
           </p:cNvSpPr>
@@ -3103,7 +3705,7 @@
       </p:sp>
       <p:cxnSp>
         <p:nvCxnSpPr>
-          <p:cNvPr id="1754666975" name="Straight Connector 5"/>
+          <p:cNvPr id="1005447090" name="Straight Connector 5"/>
           <p:cNvCxnSpPr/>
           <p:nvPr userDrawn="1"/>
         </p:nvCxnSpPr>
@@ -3141,7 +3743,7 @@
       </p:cxnSp>
       <p:pic>
         <p:nvPicPr>
-          <p:cNvPr id="2063809542" name="Graphic 6" descr="Bullseye"/>
+          <p:cNvPr id="1413656209" name="Graphic 6" descr="Bullseye"/>
           <p:cNvPicPr>
             <a:picLocks noChangeAspect="1"/>
           </p:cNvPicPr>
@@ -3194,7 +3796,7 @@
       </p:grpSpPr>
       <p:sp>
         <p:nvSpPr>
-          <p:cNvPr id="811214650" name="Title 1"/>
+          <p:cNvPr id="1719134285" name="Title 1"/>
           <p:cNvSpPr>
             <a:spLocks noGrp="1"/>
           </p:cNvSpPr>
@@ -3234,7 +3836,7 @@
       </p:sp>
       <p:sp>
         <p:nvSpPr>
-          <p:cNvPr id="1419102007" name="Content Placeholder 2"/>
+          <p:cNvPr id="1260410831" name="Content Placeholder 2"/>
           <p:cNvSpPr>
             <a:spLocks noGrp="1"/>
           </p:cNvSpPr>
@@ -3346,7 +3948,7 @@
       </p:sp>
       <p:sp>
         <p:nvSpPr>
-          <p:cNvPr id="487699796" name="Footer Placeholder 12"/>
+          <p:cNvPr id="1383787553" name="Footer Placeholder 12"/>
           <p:cNvSpPr>
             <a:spLocks noGrp="1"/>
           </p:cNvSpPr>
@@ -3372,7 +3974,7 @@
       </p:sp>
       <p:sp>
         <p:nvSpPr>
-          <p:cNvPr id="1362075095" name="Slide Number Placeholder 13"/>
+          <p:cNvPr id="2020714531" name="Slide Number Placeholder 13"/>
           <p:cNvSpPr>
             <a:spLocks noGrp="1"/>
           </p:cNvSpPr>
@@ -3398,7 +4000,7 @@
       </p:sp>
       <p:cxnSp>
         <p:nvCxnSpPr>
-          <p:cNvPr id="1087023224" name="Straight Connector 5"/>
+          <p:cNvPr id="1951323602" name="Straight Connector 5"/>
           <p:cNvCxnSpPr/>
           <p:nvPr userDrawn="1"/>
         </p:nvCxnSpPr>
@@ -3466,7 +4068,7 @@
       </p:grpSpPr>
       <p:sp>
         <p:nvSpPr>
-          <p:cNvPr id="1162122521" name="Title Placeholder 1"/>
+          <p:cNvPr id="261915799" name="Title Placeholder 1"/>
           <p:cNvSpPr>
             <a:spLocks noGrp="1"/>
           </p:cNvSpPr>
@@ -3502,7 +4104,7 @@
       </p:sp>
       <p:sp>
         <p:nvSpPr>
-          <p:cNvPr id="2068835765" name="Text Placeholder 2"/>
+          <p:cNvPr id="1377075475" name="Text Placeholder 2"/>
           <p:cNvSpPr>
             <a:spLocks noGrp="1"/>
           </p:cNvSpPr>
@@ -3578,7 +4180,7 @@
       </p:sp>
       <p:sp>
         <p:nvSpPr>
-          <p:cNvPr id="490545408" name="Footer Placeholder 4"/>
+          <p:cNvPr id="440952865" name="Footer Placeholder 4"/>
           <p:cNvSpPr>
             <a:spLocks noGrp="1"/>
           </p:cNvSpPr>
@@ -3621,7 +4223,7 @@
       </p:sp>
       <p:sp>
         <p:nvSpPr>
-          <p:cNvPr id="1331829384" name="Slide Number Placeholder 5"/>
+          <p:cNvPr id="709651010" name="Slide Number Placeholder 5"/>
           <p:cNvSpPr>
             <a:spLocks noGrp="1"/>
           </p:cNvSpPr>
@@ -3666,7 +4268,7 @@
       </p:sp>
       <p:pic>
         <p:nvPicPr>
-          <p:cNvPr id="268535268" name="Picture 6"/>
+          <p:cNvPr id="1649053174" name="Picture 6"/>
           <p:cNvPicPr>
             <a:picLocks noChangeAspect="1"/>
           </p:cNvPicPr>
@@ -3696,7 +4298,7 @@
       </p:pic>
       <p:pic>
         <p:nvPicPr>
-          <p:cNvPr id="279589644" name="Picture 7"/>
+          <p:cNvPr id="425443262" name="Picture 7"/>
           <p:cNvPicPr>
             <a:picLocks noChangeAspect="1"/>
           </p:cNvPicPr>
@@ -3726,7 +4328,7 @@
       </p:pic>
       <p:pic>
         <p:nvPicPr>
-          <p:cNvPr id="1911533121" name="Content Placeholder 3"/>
+          <p:cNvPr id="760925330" name="Content Placeholder 3"/>
           <p:cNvPicPr>
             <a:picLocks noChangeAspect="1"/>
           </p:cNvPicPr>
@@ -4092,7 +4694,7 @@
       </p:grpSpPr>
       <p:sp>
         <p:nvSpPr>
-          <p:cNvPr id="230785476" name="Title 1"/>
+          <p:cNvPr id="1702164269" name="Title 1"/>
           <p:cNvSpPr>
             <a:spLocks noGrp="1"/>
           </p:cNvSpPr>
@@ -4183,7 +4785,7 @@
       </p:grpSpPr>
       <p:sp>
         <p:nvSpPr>
-          <p:cNvPr id="1554663466" name="Title 1"/>
+          <p:cNvPr id="127732543" name="Title 1"/>
           <p:cNvSpPr>
             <a:spLocks noGrp="1"/>
           </p:cNvSpPr>
@@ -4209,7 +4811,7 @@
       </p:sp>
       <p:sp>
         <p:nvSpPr>
-          <p:cNvPr id="1214695210" name="Text Placeholder 2"/>
+          <p:cNvPr id="1639961870" name="Text Placeholder 2"/>
           <p:cNvSpPr>
             <a:spLocks noGrp="1"/>
           </p:cNvSpPr>
@@ -4219,7 +4821,7 @@
         </p:nvSpPr>
         <p:spPr bwMode="auto">
           <a:xfrm>
-            <a:off x="178025" y="1535542"/>
+            <a:off x="184769" y="1535541"/>
             <a:ext cx="11822461" cy="4638678"/>
           </a:xfrm>
           <a:prstGeom prst="rect">
@@ -4502,19 +5104,6 @@
             </mc:AlternateContent>
             <a:endParaRPr sz="2400" i="0"/>
           </a:p>
-          <a:p>
-            <a:pPr marL="457200" lvl="1" indent="0">
-              <a:buClr>
-                <a:schemeClr val="accent1">
-                  <a:lumMod val="50000"/>
-                </a:schemeClr>
-              </a:buClr>
-              <a:buFontTx/>
-              <a:buNone/>
-              <a:defRPr/>
-            </a:pPr>
-            <a:endParaRPr i="0"/>
-          </a:p>
         </p:txBody>
       </p:sp>
     </p:spTree>
@@ -4552,7 +5141,500 @@
       </p:grpSpPr>
       <p:sp>
         <p:nvSpPr>
-          <p:cNvPr id="1747512221" name="Title 1"/>
+          <p:cNvPr id="218034127" name="Title 1"/>
+          <p:cNvSpPr>
+            <a:spLocks noGrp="1"/>
+          </p:cNvSpPr>
+          <p:nvPr>
+            <p:ph type="title"/>
+          </p:nvPr>
+        </p:nvSpPr>
+        <p:spPr bwMode="auto"/>
+        <p:txBody>
+          <a:bodyPr/>
+          <a:lstStyle/>
+          <a:p>
+            <a:pPr>
+              <a:defRPr/>
+            </a:pPr>
+            <a:r>
+              <a:rPr/>
+              <a:t>Softmax aktivaciona funkcija</a:t>
+            </a:r>
+            <a:endParaRPr/>
+          </a:p>
+        </p:txBody>
+      </p:sp>
+      <p:sp>
+        <p:nvSpPr>
+          <p:cNvPr id="623642574" name="Text Placeholder 2"/>
+          <p:cNvSpPr>
+            <a:spLocks noGrp="1"/>
+          </p:cNvSpPr>
+          <p:nvPr>
+            <p:ph idx="1"/>
+          </p:nvPr>
+        </p:nvSpPr>
+        <p:spPr bwMode="auto">
+          <a:prstGeom prst="rect">
+            <a:avLst/>
+          </a:prstGeom>
+        </p:spPr>
+        <p:txBody>
+          <a:bodyPr/>
+          <a:lstStyle/>
+          <a:p>
+            <a:pPr>
+              <a:defRPr/>
+            </a:pPr>
+            <a:r>
+              <a:rPr/>
+              <a:t>Da bi se unakrsna entropija mogla upotrebiti, izlaz neuronske mreže mora da predstavlja raspodelu verovatnoća</a:t>
+            </a:r>
+            <a:endParaRPr/>
+          </a:p>
+          <a:p>
+            <a:pPr lvl="1">
+              <a:defRPr/>
+            </a:pPr>
+            <a:r>
+              <a:rPr/>
+              <a:t>Svi izlazi moraju biti u opsegu </a:t>
+            </a:r>
+            <mc:AlternateContent xmlns:mc="http://schemas.openxmlformats.org/markup-compatibility/2006" xmlns:m="http://schemas.openxmlformats.org/officeDocument/2006/math">
+              <mc:Choice xmlns:a14="http://schemas.microsoft.com/office/drawing/2010/main" Requires="a14">
+                <a14:m>
+                  <m:oMathPara>
+                    <m:oMathParaPr/>
+                    <m:oMath>
+                      <m:r>
+                        <m:rPr>
+                          <m:sty m:val="p"/>
+                        </m:rPr>
+                        <a:rPr lang="sr-Latn-RS" sz="2400" u="none" strike="noStrike" cap="none" spc="0">
+                          <a:solidFill>
+                            <a:schemeClr val="tx1"/>
+                          </a:solidFill>
+                          <a:latin typeface="Cambria Math"/>
+                          <a:ea typeface="Cambria Math"/>
+                          <a:cs typeface="Cambria Math"/>
+                        </a:rPr>
+                        <m:t>[0, 1]</m:t>
+                      </m:r>
+                    </m:oMath>
+                  </m:oMathPara>
+                </a14:m>
+              </mc:Choice>
+              <mc:Fallback/>
+            </mc:AlternateContent>
+            <a:endParaRPr/>
+          </a:p>
+          <a:p>
+            <a:pPr lvl="1">
+              <a:defRPr/>
+            </a:pPr>
+            <a:r>
+              <a:rPr/>
+              <a:t>Zbir svih izlaza mora biti jednak </a:t>
+            </a:r>
+            <mc:AlternateContent xmlns:mc="http://schemas.openxmlformats.org/markup-compatibility/2006" xmlns:m="http://schemas.openxmlformats.org/officeDocument/2006/math">
+              <mc:Choice xmlns:a14="http://schemas.microsoft.com/office/drawing/2010/main" Requires="a14">
+                <a14:m>
+                  <m:oMathPara>
+                    <m:oMathParaPr/>
+                    <m:oMath>
+                      <m:r>
+                        <m:rPr>
+                          <m:sty m:val="p"/>
+                        </m:rPr>
+                        <a:rPr lang="sr-Latn-RS" sz="2400" u="none" strike="noStrike" cap="none" spc="0">
+                          <a:solidFill>
+                            <a:schemeClr val="tx1"/>
+                          </a:solidFill>
+                          <a:latin typeface="Cambria Math"/>
+                          <a:ea typeface="Cambria Math"/>
+                          <a:cs typeface="Cambria Math"/>
+                        </a:rPr>
+                        <m:t>1</m:t>
+                      </m:r>
+                    </m:oMath>
+                  </m:oMathPara>
+                </a14:m>
+              </mc:Choice>
+              <mc:Fallback/>
+            </mc:AlternateContent>
+            <a:endParaRPr/>
+          </a:p>
+          <a:p>
+            <a:pPr>
+              <a:defRPr/>
+            </a:pPr>
+            <a:r>
+              <a:rPr/>
+              <a:t>To se ostvaruje primenom </a:t>
+            </a:r>
+            <a:r>
+              <a:rPr i="1"/>
+              <a:t>softmax</a:t>
+            </a:r>
+            <a:r>
+              <a:rPr i="0"/>
+              <a:t> aktivacione funkcije</a:t>
+            </a:r>
+            <a:r>
+              <a:rPr/>
+              <a:t> </a:t>
+            </a:r>
+            <a:endParaRPr i="0"/>
+          </a:p>
+          <a:p>
+            <a:pPr marL="0" indent="0">
+              <a:buClr>
+                <a:schemeClr val="accent1">
+                  <a:lumMod val="50000"/>
+                </a:schemeClr>
+              </a:buClr>
+              <a:buFontTx/>
+              <a:buNone/>
+              <a:defRPr/>
+            </a:pPr>
+            <mc:AlternateContent xmlns:mc="http://schemas.openxmlformats.org/markup-compatibility/2006" xmlns:m="http://schemas.openxmlformats.org/officeDocument/2006/math">
+              <mc:Choice xmlns:a14="http://schemas.microsoft.com/office/drawing/2010/main" Requires="a14">
+                <a14:m>
+                  <m:oMathPara>
+                    <m:oMathParaPr/>
+                    <m:oMath>
+                      <m:r>
+                        <m:rPr>
+                          <m:sty m:val="p"/>
+                        </m:rPr>
+                        <a:rPr lang="sr-Latn-RS" sz="2800" u="none" strike="noStrike" cap="none" spc="0">
+                          <a:solidFill>
+                            <a:schemeClr val="tx1"/>
+                          </a:solidFill>
+                          <a:latin typeface="Cambria Math"/>
+                          <a:ea typeface="Cambria Math"/>
+                          <a:cs typeface="Cambria Math"/>
+                        </a:rPr>
+                        <m:t>softmax(</m:t>
+                      </m:r>
+                      <m:sSub>
+                        <m:sSubPr>
+                          <m:ctrlPr>
+                            <a:rPr lang="sr-Latn-RS" sz="2800" b="0" i="1" u="none" strike="noStrike" cap="none" spc="0">
+                              <a:solidFill>
+                                <a:schemeClr val="tx1"/>
+                              </a:solidFill>
+                              <a:latin typeface="Cambria Math"/>
+                              <a:ea typeface="Cambria Math"/>
+                              <a:cs typeface="Cambria Math"/>
+                            </a:rPr>
+                          </m:ctrlPr>
+                        </m:sSubPr>
+                        <m:e>
+                          <m:r>
+                            <m:rPr>
+                              <m:sty m:val="i"/>
+                            </m:rPr>
+                            <a:rPr lang="sr-Latn-RS" sz="2800" u="none" strike="noStrike" cap="none" spc="0">
+                              <a:solidFill>
+                                <a:schemeClr val="tx1"/>
+                              </a:solidFill>
+                              <a:latin typeface="Cambria Math"/>
+                              <a:ea typeface="Cambria Math"/>
+                              <a:cs typeface="Cambria Math"/>
+                            </a:rPr>
+                            <m:t>z</m:t>
+                          </m:r>
+                        </m:e>
+                        <m:sub>
+                          <m:r>
+                            <m:rPr>
+                              <m:sty m:val="i"/>
+                            </m:rPr>
+                            <a:rPr lang="sr-Latn-RS" sz="2800" u="none" strike="noStrike" cap="none" spc="0">
+                              <a:solidFill>
+                                <a:schemeClr val="tx1"/>
+                              </a:solidFill>
+                              <a:latin typeface="Cambria Math"/>
+                              <a:ea typeface="Cambria Math"/>
+                              <a:cs typeface="Cambria Math"/>
+                            </a:rPr>
+                            <m:t>i</m:t>
+                          </m:r>
+                        </m:sub>
+                      </m:sSub>
+                      <m:r>
+                        <m:rPr>
+                          <m:sty m:val="p"/>
+                        </m:rPr>
+                        <a:rPr lang="sr-Latn-RS" sz="2800" u="none" strike="noStrike" cap="none" spc="0">
+                          <a:solidFill>
+                            <a:schemeClr val="tx1"/>
+                          </a:solidFill>
+                          <a:latin typeface="Cambria Math"/>
+                          <a:ea typeface="Cambria Math"/>
+                          <a:cs typeface="Cambria Math"/>
+                        </a:rPr>
+                        <m:t>)=</m:t>
+                      </m:r>
+                      <m:f>
+                        <m:fPr>
+                          <m:ctrlPr>
+                            <a:rPr lang="sr-Latn-RS" sz="2800" b="0" i="1" u="none" strike="noStrike" cap="none" spc="0">
+                              <a:solidFill>
+                                <a:schemeClr val="tx1"/>
+                              </a:solidFill>
+                              <a:latin typeface="Cambria Math"/>
+                              <a:ea typeface="Cambria Math"/>
+                              <a:cs typeface="Cambria Math"/>
+                            </a:rPr>
+                          </m:ctrlPr>
+                        </m:fPr>
+                        <m:num>
+                          <m:sSup>
+                            <m:sSupPr>
+                              <m:ctrlPr>
+                                <a:rPr lang="sr-Latn-RS" sz="2800" i="1" u="none" strike="noStrike" cap="none" spc="0">
+                                  <a:solidFill>
+                                    <a:schemeClr val="tx1"/>
+                                  </a:solidFill>
+                                  <a:latin typeface="Cambria Math"/>
+                                  <a:ea typeface="Cambria Math"/>
+                                  <a:cs typeface="Cambria Math"/>
+                                </a:rPr>
+                              </m:ctrlPr>
+                            </m:sSupPr>
+                            <m:e>
+                              <m:r>
+                                <m:rPr>
+                                  <m:sty m:val="i"/>
+                                </m:rPr>
+                                <a:rPr lang="sr-Latn-RS" sz="2800" u="none" strike="noStrike" cap="none" spc="0">
+                                  <a:solidFill>
+                                    <a:schemeClr val="tx1"/>
+                                  </a:solidFill>
+                                  <a:latin typeface="Cambria Math"/>
+                                  <a:ea typeface="Cambria Math"/>
+                                  <a:cs typeface="Cambria Math"/>
+                                </a:rPr>
+                                <m:t>e</m:t>
+                              </m:r>
+                            </m:e>
+                            <m:sup>
+                              <m:sSub>
+                                <m:sSubPr>
+                                  <m:ctrlPr>
+                                    <a:rPr i="1" u="none" strike="noStrike" cap="none" spc="0">
+                                      <a:solidFill>
+                                        <a:schemeClr val="tx1"/>
+                                      </a:solidFill>
+                                      <a:latin typeface="Cambria Math"/>
+                                      <a:ea typeface="Cambria Math"/>
+                                      <a:cs typeface="Cambria Math"/>
+                                    </a:rPr>
+                                  </m:ctrlPr>
+                                </m:sSubPr>
+                                <m:e>
+                                  <m:r>
+                                    <m:rPr>
+                                      <m:sty m:val="i"/>
+                                    </m:rPr>
+                                    <a:rPr u="none" strike="noStrike" cap="none" spc="0">
+                                      <a:solidFill>
+                                        <a:schemeClr val="tx1"/>
+                                      </a:solidFill>
+                                      <a:latin typeface="Cambria Math"/>
+                                      <a:ea typeface="Cambria Math"/>
+                                      <a:cs typeface="Cambria Math"/>
+                                    </a:rPr>
+                                    <m:t>z</m:t>
+                                  </m:r>
+                                </m:e>
+                                <m:sub>
+                                  <m:r>
+                                    <m:rPr>
+                                      <m:sty m:val="i"/>
+                                    </m:rPr>
+                                    <a:rPr u="none" strike="noStrike" cap="none" spc="0">
+                                      <a:solidFill>
+                                        <a:schemeClr val="tx1"/>
+                                      </a:solidFill>
+                                      <a:latin typeface="Cambria Math"/>
+                                      <a:ea typeface="Cambria Math"/>
+                                      <a:cs typeface="Cambria Math"/>
+                                    </a:rPr>
+                                    <m:t>i</m:t>
+                                  </m:r>
+                                </m:sub>
+                              </m:sSub>
+                            </m:sup>
+                          </m:sSup>
+                        </m:num>
+                        <m:den>
+                          <m:nary>
+                            <m:naryPr>
+                              <m:chr m:val="∑"/>
+                              <m:grow m:val="off"/>
+                              <m:limLoc m:val="undOvr"/>
+                              <m:supHide m:val="on"/>
+                              <m:ctrlPr>
+                                <a:rPr lang="sr-Latn-RS" sz="2800" i="1" u="none" strike="noStrike" cap="none" spc="0">
+                                  <a:solidFill>
+                                    <a:schemeClr val="tx1"/>
+                                  </a:solidFill>
+                                  <a:latin typeface="Cambria Math"/>
+                                  <a:ea typeface="Cambria Math"/>
+                                  <a:cs typeface="Cambria Math"/>
+                                </a:rPr>
+                              </m:ctrlPr>
+                            </m:naryPr>
+                            <m:sub>
+                              <m:r>
+                                <m:rPr>
+                                  <m:sty m:val="i"/>
+                                </m:rPr>
+                                <a:rPr lang="sr-Latn-RS" sz="2800" u="none" strike="noStrike" cap="none" spc="0">
+                                  <a:solidFill>
+                                    <a:schemeClr val="tx1"/>
+                                  </a:solidFill>
+                                  <a:latin typeface="Cambria Math"/>
+                                  <a:ea typeface="Cambria Math"/>
+                                  <a:cs typeface="Cambria Math"/>
+                                </a:rPr>
+                                <m:t>j</m:t>
+                              </m:r>
+                            </m:sub>
+                            <m:sup/>
+                            <m:e>
+                              <m:sSup>
+                                <m:sSupPr>
+                                  <m:ctrlPr>
+                                    <a:rPr lang="sr-Latn-RS" sz="2800" i="1" u="none" strike="noStrike" cap="none" spc="0">
+                                      <a:solidFill>
+                                        <a:schemeClr val="tx1"/>
+                                      </a:solidFill>
+                                      <a:latin typeface="Cambria Math"/>
+                                      <a:ea typeface="Cambria Math"/>
+                                      <a:cs typeface="Cambria Math"/>
+                                    </a:rPr>
+                                  </m:ctrlPr>
+                                </m:sSupPr>
+                                <m:e>
+                                  <m:r>
+                                    <m:rPr>
+                                      <m:sty m:val="i"/>
+                                    </m:rPr>
+                                    <a:rPr lang="sr-Latn-RS" sz="2800" u="none" strike="noStrike" cap="none" spc="0">
+                                      <a:solidFill>
+                                        <a:schemeClr val="tx1"/>
+                                      </a:solidFill>
+                                      <a:latin typeface="Cambria Math"/>
+                                      <a:ea typeface="Cambria Math"/>
+                                      <a:cs typeface="Cambria Math"/>
+                                    </a:rPr>
+                                    <m:t>e</m:t>
+                                  </m:r>
+                                </m:e>
+                                <m:sup>
+                                  <m:sSub>
+                                    <m:sSubPr>
+                                      <m:ctrlPr>
+                                        <a:rPr i="1" u="none" strike="noStrike" cap="none" spc="0">
+                                          <a:solidFill>
+                                            <a:schemeClr val="tx1"/>
+                                          </a:solidFill>
+                                          <a:latin typeface="Cambria Math"/>
+                                          <a:ea typeface="Cambria Math"/>
+                                          <a:cs typeface="Cambria Math"/>
+                                        </a:rPr>
+                                      </m:ctrlPr>
+                                    </m:sSubPr>
+                                    <m:e>
+                                      <m:r>
+                                        <m:rPr>
+                                          <m:sty m:val="i"/>
+                                        </m:rPr>
+                                        <a:rPr u="none" strike="noStrike" cap="none" spc="0">
+                                          <a:solidFill>
+                                            <a:schemeClr val="tx1"/>
+                                          </a:solidFill>
+                                          <a:latin typeface="Cambria Math"/>
+                                          <a:ea typeface="Cambria Math"/>
+                                          <a:cs typeface="Cambria Math"/>
+                                        </a:rPr>
+                                        <m:t>z</m:t>
+                                      </m:r>
+                                    </m:e>
+                                    <m:sub>
+                                      <m:r>
+                                        <m:rPr>
+                                          <m:sty m:val="i"/>
+                                        </m:rPr>
+                                        <a:rPr u="none" strike="noStrike" cap="none" spc="0">
+                                          <a:solidFill>
+                                            <a:schemeClr val="tx1"/>
+                                          </a:solidFill>
+                                          <a:latin typeface="Cambria Math"/>
+                                          <a:ea typeface="Cambria Math"/>
+                                          <a:cs typeface="Cambria Math"/>
+                                        </a:rPr>
+                                        <m:t>j</m:t>
+                                      </m:r>
+                                    </m:sub>
+                                  </m:sSub>
+                                </m:sup>
+                              </m:sSup>
+                            </m:e>
+                          </m:nary>
+                        </m:den>
+                      </m:f>
+                    </m:oMath>
+                  </m:oMathPara>
+                </a14:m>
+              </mc:Choice>
+              <mc:Fallback/>
+            </mc:AlternateContent>
+            <a:endParaRPr i="0"/>
+          </a:p>
+        </p:txBody>
+      </p:sp>
+    </p:spTree>
+  </p:cSld>
+  <p:clrMapOvr>
+    <a:masterClrMapping/>
+  </p:clrMapOvr>
+  <mc:AlternateContent xmlns:mc="http://schemas.openxmlformats.org/markup-compatibility/2006">
+    <mc:Choice xmlns:p159="http://schemas.microsoft.com/office/powerpoint/2015/09/main" xmlns:p14="http://schemas.microsoft.com/office/powerpoint/2010/main" Requires="p159">
+      <p:transition p14:dur="500" advClick="1"/>
+    </mc:Choice>
+    <mc:Fallback>
+      <p:transition advClick="1"/>
+    </mc:Fallback>
+  </mc:AlternateContent>
+</p:sld>
+</file>
+
+<file path=ppt/slides/slide12.xml><?xml version="1.0" encoding="utf-8"?>
+<p:sld xmlns:a="http://schemas.openxmlformats.org/drawingml/2006/main" xmlns:r="http://schemas.openxmlformats.org/officeDocument/2006/relationships" xmlns:p="http://schemas.openxmlformats.org/presentationml/2006/main" xmlns:m="http://schemas.openxmlformats.org/officeDocument/2006/math" xmlns:w="http://schemas.openxmlformats.org/wordprocessingml/2006/main" xmlns:mc="http://schemas.openxmlformats.org/markup-compatibility/2006" showMasterPhAnim="0" showMasterSp="1" show="1">
+  <p:cSld name="">
+    <p:spTree>
+      <p:nvGrpSpPr>
+        <p:cNvPr id="1" name=""/>
+        <p:cNvGrpSpPr/>
+        <p:nvPr/>
+      </p:nvGrpSpPr>
+      <p:grpSpPr bwMode="auto">
+        <a:xfrm>
+          <a:off x="0" y="0"/>
+          <a:ext cx="0" cy="0"/>
+          <a:chOff x="0" y="0"/>
+          <a:chExt cx="0" cy="0"/>
+        </a:xfrm>
+      </p:grpSpPr>
+      <p:sp>
+        <p:nvSpPr>
+          <p:cNvPr id="68055846" name="Title 1"/>
           <p:cNvSpPr>
             <a:spLocks noGrp="1"/>
           </p:cNvSpPr>
@@ -4578,7 +5660,7 @@
       </p:sp>
       <p:sp>
         <p:nvSpPr>
-          <p:cNvPr id="1141274071" name="Text Placeholder 2"/>
+          <p:cNvPr id="2138005985" name="Text Placeholder 2"/>
           <p:cNvSpPr>
             <a:spLocks noGrp="1"/>
           </p:cNvSpPr>
@@ -4641,6 +5723,37 @@
                   <m:oMathPara>
                     <m:oMathParaPr/>
                     <m:oMath>
+                      <m:acc>
+                        <m:accPr>
+                          <m:chr m:val="̃"/>
+                          <m:ctrlPr>
+                            <a:rPr lang="sr-Latn-RS" sz="2400" b="0" i="0" strike="noStrike" cap="none" spc="0">
+                              <a:solidFill>
+                                <a:schemeClr val="tx1"/>
+                              </a:solidFill>
+                              <a:latin typeface="Cambria Math"/>
+                              <a:ea typeface="Cambria Math"/>
+                              <a:cs typeface="Cambria Math"/>
+                            </a:rPr>
+                          </m:ctrlPr>
+                        </m:accPr>
+                        <m:e>
+                          <m:r>
+                            <m:rPr>
+                              <m:sty m:val="p"/>
+                            </m:rPr>
+                            <a:rPr lang="sr-Latn-RS" sz="2400" strike="noStrike" cap="none" spc="0">
+                              <a:solidFill>
+                                <a:schemeClr val="tx1"/>
+                              </a:solidFill>
+                              <a:latin typeface="Cambria Math"/>
+                              <a:ea typeface="Cambria Math"/>
+                              <a:cs typeface="Cambria Math"/>
+                            </a:rPr>
+                            <m:t>J</m:t>
+                          </m:r>
+                        </m:e>
+                      </m:acc>
                       <m:d>
                         <m:dPr>
                           <m:begChr m:val="("/>
@@ -4743,68 +5856,6 @@
                         </a:rPr>
                         <m:t>Ω(W)</m:t>
                       </m:r>
-                      <m:acc>
-                        <m:accPr>
-                          <m:chr m:val="̃"/>
-                          <m:ctrlPr>
-                            <a:rPr lang="sr-Latn-RS" b="0" i="0" strike="noStrike" cap="none" spc="0">
-                              <a:solidFill>
-                                <a:schemeClr val="tx1"/>
-                              </a:solidFill>
-                              <a:latin typeface="Cambria Math"/>
-                              <a:ea typeface="Cambria Math"/>
-                              <a:cs typeface="Cambria Math"/>
-                            </a:rPr>
-                          </m:ctrlPr>
-                        </m:accPr>
-                        <m:e>
-                          <m:r>
-                            <m:rPr>
-                              <m:sty m:val="p"/>
-                            </m:rPr>
-                            <a:rPr lang="sr-Latn-RS" strike="noStrike" cap="none" spc="0">
-                              <a:solidFill>
-                                <a:schemeClr val="tx1"/>
-                              </a:solidFill>
-                              <a:latin typeface="Cambria Math"/>
-                              <a:ea typeface="Cambria Math"/>
-                              <a:cs typeface="Cambria Math"/>
-                            </a:rPr>
-                            <m:t>J</m:t>
-                          </m:r>
-                        </m:e>
-                      </m:acc>
-                      <m:acc>
-                        <m:accPr>
-                          <m:chr m:val="̃"/>
-                          <m:ctrlPr>
-                            <a:rPr lang="sr-Latn-RS" sz="2400" b="0" i="0" strike="noStrike" cap="none" spc="0">
-                              <a:solidFill>
-                                <a:schemeClr val="tx1"/>
-                              </a:solidFill>
-                              <a:latin typeface="Cambria Math"/>
-                              <a:ea typeface="Cambria Math"/>
-                              <a:cs typeface="Cambria Math"/>
-                            </a:rPr>
-                          </m:ctrlPr>
-                        </m:accPr>
-                        <m:e>
-                          <m:r>
-                            <m:rPr>
-                              <m:sty m:val="p"/>
-                            </m:rPr>
-                            <a:rPr lang="sr-Latn-RS" sz="2400" strike="noStrike" cap="none" spc="0">
-                              <a:solidFill>
-                                <a:schemeClr val="tx1"/>
-                              </a:solidFill>
-                              <a:latin typeface="Cambria Math"/>
-                              <a:ea typeface="Cambria Math"/>
-                              <a:cs typeface="Cambria Math"/>
-                            </a:rPr>
-                            <m:t>J</m:t>
-                          </m:r>
-                        </m:e>
-                      </m:acc>
                     </m:oMath>
                   </m:oMathPara>
                 </a14:m>
@@ -4831,7 +5882,7 @@
 </p:sld>
 </file>
 
-<file path=ppt/slides/slide12.xml><?xml version="1.0" encoding="utf-8"?>
+<file path=ppt/slides/slide13.xml><?xml version="1.0" encoding="utf-8"?>
 <p:sld xmlns:a="http://schemas.openxmlformats.org/drawingml/2006/main" xmlns:r="http://schemas.openxmlformats.org/officeDocument/2006/relationships" xmlns:p="http://schemas.openxmlformats.org/presentationml/2006/main" xmlns:m="http://schemas.openxmlformats.org/officeDocument/2006/math" xmlns:w="http://schemas.openxmlformats.org/wordprocessingml/2006/main" xmlns:mc="http://schemas.openxmlformats.org/markup-compatibility/2006" showMasterPhAnim="0" showMasterSp="1" show="1">
   <p:cSld name="">
     <p:spTree>
@@ -4850,7 +5901,7 @@
       </p:grpSpPr>
       <p:sp>
         <p:nvSpPr>
-          <p:cNvPr id="971306491" name="Title 1"/>
+          <p:cNvPr id="1979607431" name="Title 1"/>
           <p:cNvSpPr>
             <a:spLocks noGrp="1"/>
           </p:cNvSpPr>
@@ -4876,7 +5927,7 @@
       </p:sp>
       <p:sp>
         <p:nvSpPr>
-          <p:cNvPr id="727815422" name="Text Placeholder 2"/>
+          <p:cNvPr id="1740281718" name="Text Placeholder 2"/>
           <p:cNvSpPr>
             <a:spLocks noGrp="1"/>
           </p:cNvSpPr>
@@ -5361,141 +6412,6 @@
 </p:sld>
 </file>
 
-<file path=ppt/slides/slide13.xml><?xml version="1.0" encoding="utf-8"?>
-<p:sld xmlns:a="http://schemas.openxmlformats.org/drawingml/2006/main" xmlns:r="http://schemas.openxmlformats.org/officeDocument/2006/relationships" xmlns:p="http://schemas.openxmlformats.org/presentationml/2006/main" xmlns:m="http://schemas.openxmlformats.org/officeDocument/2006/math" xmlns:w="http://schemas.openxmlformats.org/wordprocessingml/2006/main" xmlns:mc="http://schemas.openxmlformats.org/markup-compatibility/2006" showMasterPhAnim="0" showMasterSp="1" show="1">
-  <p:cSld name="">
-    <p:spTree>
-      <p:nvGrpSpPr>
-        <p:cNvPr id="1" name=""/>
-        <p:cNvGrpSpPr/>
-        <p:nvPr/>
-      </p:nvGrpSpPr>
-      <p:grpSpPr bwMode="auto">
-        <a:xfrm>
-          <a:off x="0" y="0"/>
-          <a:ext cx="0" cy="0"/>
-          <a:chOff x="0" y="0"/>
-          <a:chExt cx="0" cy="0"/>
-        </a:xfrm>
-      </p:grpSpPr>
-      <p:sp>
-        <p:nvSpPr>
-          <p:cNvPr id="305566684" name="Title 1"/>
-          <p:cNvSpPr>
-            <a:spLocks noGrp="1"/>
-          </p:cNvSpPr>
-          <p:nvPr>
-            <p:ph type="title"/>
-          </p:nvPr>
-        </p:nvSpPr>
-        <p:spPr bwMode="auto"/>
-        <p:txBody>
-          <a:bodyPr/>
-          <a:lstStyle/>
-          <a:p>
-            <a:pPr>
-              <a:defRPr/>
-            </a:pPr>
-            <a:r>
-              <a:rPr/>
-              <a:t>Paralelizacija obuke</a:t>
-            </a:r>
-            <a:endParaRPr/>
-          </a:p>
-        </p:txBody>
-      </p:sp>
-      <p:sp>
-        <p:nvSpPr>
-          <p:cNvPr id="992681052" name="Text Placeholder 2"/>
-          <p:cNvSpPr>
-            <a:spLocks noGrp="1"/>
-          </p:cNvSpPr>
-          <p:nvPr>
-            <p:ph idx="1"/>
-          </p:nvPr>
-        </p:nvSpPr>
-        <p:spPr bwMode="auto">
-          <a:prstGeom prst="rect">
-            <a:avLst/>
-          </a:prstGeom>
-        </p:spPr>
-        <p:txBody>
-          <a:bodyPr/>
-          <a:lstStyle/>
-          <a:p>
-            <a:pPr>
-              <a:defRPr/>
-            </a:pPr>
-            <a:r>
-              <a:rPr/>
-              <a:t>Paralelizacijom se skraćuje potrebno vreme za obuku modela</a:t>
-            </a:r>
-            <a:endParaRPr/>
-          </a:p>
-          <a:p>
-            <a:pPr>
-              <a:defRPr/>
-            </a:pPr>
-            <a:r>
-              <a:rPr/>
-              <a:t>Odabrani način za to je simuliranom federalnom obukom</a:t>
-            </a:r>
-            <a:endParaRPr/>
-          </a:p>
-          <a:p>
-            <a:pPr lvl="1">
-              <a:defRPr/>
-            </a:pPr>
-            <a:r>
-              <a:rPr/>
-              <a:t>Simulirana obuka podrazumeva izvršavanje na jednom računaru</a:t>
-            </a:r>
-            <a:endParaRPr/>
-          </a:p>
-          <a:p>
-            <a:pPr lvl="0">
-              <a:defRPr/>
-            </a:pPr>
-            <a:r>
-              <a:rPr/>
-              <a:t>Osnovni koncept je da se proces obuke podeli na N niti, gde svaka nit dobija poseban deo trening skupa podataka</a:t>
-            </a:r>
-            <a:endParaRPr/>
-          </a:p>
-          <a:p>
-            <a:pPr lvl="0">
-              <a:defRPr/>
-            </a:pPr>
-            <a:r>
-              <a:rPr/>
-              <a:t>Nakon svake iteracije se vrši agregacija gradijenata koji se koriste za ažuriranje modela</a:t>
-            </a:r>
-            <a:endParaRPr/>
-          </a:p>
-          <a:p>
-            <a:pPr lvl="0">
-              <a:defRPr/>
-            </a:pPr>
-            <a:endParaRPr/>
-          </a:p>
-        </p:txBody>
-      </p:sp>
-    </p:spTree>
-  </p:cSld>
-  <p:clrMapOvr>
-    <a:masterClrMapping/>
-  </p:clrMapOvr>
-  <mc:AlternateContent xmlns:mc="http://schemas.openxmlformats.org/markup-compatibility/2006">
-    <mc:Choice xmlns:p159="http://schemas.microsoft.com/office/powerpoint/2015/09/main" xmlns:p14="http://schemas.microsoft.com/office/powerpoint/2010/main" Requires="p159">
-      <p:transition p14:dur="500" advClick="1"/>
-    </mc:Choice>
-    <mc:Fallback>
-      <p:transition advClick="1"/>
-    </mc:Fallback>
-  </mc:AlternateContent>
-</p:sld>
-</file>
-
 <file path=ppt/slides/slide14.xml><?xml version="1.0" encoding="utf-8"?>
 <p:sld xmlns:a="http://schemas.openxmlformats.org/drawingml/2006/main" xmlns:r="http://schemas.openxmlformats.org/officeDocument/2006/relationships" xmlns:p="http://schemas.openxmlformats.org/presentationml/2006/main" xmlns:m="http://schemas.openxmlformats.org/officeDocument/2006/math" xmlns:w="http://schemas.openxmlformats.org/wordprocessingml/2006/main" xmlns:mc="http://schemas.openxmlformats.org/markup-compatibility/2006" showMasterPhAnim="0" showMasterSp="1" show="1">
   <p:cSld name="">
@@ -5515,7 +6431,7 @@
       </p:grpSpPr>
       <p:sp>
         <p:nvSpPr>
-          <p:cNvPr id="1730427411" name="Title 1"/>
+          <p:cNvPr id="1173411693" name="Title 1"/>
           <p:cNvSpPr>
             <a:spLocks noGrp="1"/>
           </p:cNvSpPr>
@@ -5533,15 +6449,15 @@
             </a:pPr>
             <a:r>
               <a:rPr/>
-              <a:t>LSTM (Long short term memory)</a:t>
-            </a:r>
-            <a:endParaRPr/>
-          </a:p>
-        </p:txBody>
-      </p:sp>
-      <p:sp>
-        <p:nvSpPr>
-          <p:cNvPr id="1172803364" name="Text Placeholder 2"/>
+              <a:t>Paralelizacija obuke</a:t>
+            </a:r>
+            <a:endParaRPr/>
+          </a:p>
+        </p:txBody>
+      </p:sp>
+      <p:sp>
+        <p:nvSpPr>
+          <p:cNvPr id="313325264" name="Text Placeholder 2"/>
           <p:cNvSpPr>
             <a:spLocks noGrp="1"/>
           </p:cNvSpPr>
@@ -5563,78 +6479,54 @@
             </a:pPr>
             <a:r>
               <a:rPr/>
-              <a:t>Jedan od ciljeva zadatka je izrada primitivnog jezičkog modela za predviđanje sledećeg slova u sekvenci</a:t>
-            </a:r>
-            <a:endParaRPr/>
-          </a:p>
-          <a:p>
-            <a:pPr>
-              <a:defRPr/>
-            </a:pPr>
-            <a:r>
-              <a:rPr i="1"/>
-              <a:t>Feedforward</a:t>
-            </a:r>
+              <a:t>Paralelizacijom se skraćuje potrebno vreme za obuku modela</a:t>
+            </a:r>
+            <a:endParaRPr/>
+          </a:p>
+          <a:p>
+            <a:pPr>
+              <a:defRPr/>
+            </a:pPr>
             <a:r>
               <a:rPr/>
-              <a:t> neuronske mreže nisu namenjene za predviđanje sekvenci</a:t>
-            </a:r>
-            <a:endParaRPr/>
-          </a:p>
-          <a:p>
-            <a:pPr>
+              <a:t>Odabrani način za to je simuliranom federalnom obukom</a:t>
+            </a:r>
+            <a:endParaRPr/>
+          </a:p>
+          <a:p>
+            <a:pPr lvl="1">
               <a:defRPr/>
             </a:pPr>
             <a:r>
               <a:rPr/>
-              <a:t>Rekurentne neuronske mreže mogu da obrađuju sekvencijalne podatke, ali nastaje problem nestajućih i eksplozivnih gradijenata</a:t>
-            </a:r>
-            <a:endParaRPr/>
-          </a:p>
-          <a:p>
-            <a:pPr>
+              <a:t>Simulirana obuka podrazumeva izvršavanje na jednom računaru</a:t>
+            </a:r>
+            <a:endParaRPr/>
+          </a:p>
+          <a:p>
+            <a:pPr lvl="0">
               <a:defRPr/>
             </a:pPr>
             <a:r>
               <a:rPr/>
-              <a:t>LSTM re</a:t>
-            </a:r>
+              <a:t>Osnovni koncept je da se proces obuke podeli na N niti, gde svaka nit dobija poseban deo trening skupa podataka</a:t>
+            </a:r>
+            <a:endParaRPr/>
+          </a:p>
+          <a:p>
+            <a:pPr lvl="0">
+              <a:defRPr/>
+            </a:pPr>
             <a:r>
               <a:rPr/>
-              <a:t>šava taj problem upotrebom kratkoročne i dugoročne memorije</a:t>
-            </a:r>
-            <a:endParaRPr/>
-          </a:p>
-          <a:p>
-            <a:pPr>
-              <a:defRPr/>
-            </a:pPr>
-            <a:r>
-              <a:rPr/>
-              <a:t>Time je moguće čuvanje informacija kroz du</a:t>
-            </a:r>
-            <a:r>
-              <a:rPr/>
-              <a:t>ži niz koraka</a:t>
-            </a:r>
-            <a:endParaRPr/>
-          </a:p>
-          <a:p>
-            <a:pPr>
-              <a:defRPr/>
-            </a:pPr>
-            <a:r>
-              <a:rPr/>
-              <a:t>Pomoću kapija(</a:t>
-            </a:r>
-            <a:r>
-              <a:rPr i="1"/>
-              <a:t>gates</a:t>
-            </a:r>
-            <a:r>
-              <a:rPr/>
-              <a:t>) se određuje koje informacije treba odbaciti, zamaptiti ili zadržati</a:t>
-            </a:r>
+              <a:t>Nakon svake iteracije se vrši agregacija gradijenata koji se koriste za ažuriranje modela</a:t>
+            </a:r>
+            <a:endParaRPr/>
+          </a:p>
+          <a:p>
+            <a:pPr lvl="0">
+              <a:defRPr/>
+            </a:pPr>
             <a:endParaRPr/>
           </a:p>
         </p:txBody>
@@ -5674,7 +6566,7 @@
       </p:grpSpPr>
       <p:sp>
         <p:nvSpPr>
-          <p:cNvPr id="1273570247" name="Title 1"/>
+          <p:cNvPr id="2131831347" name="Title 1"/>
           <p:cNvSpPr>
             <a:spLocks noGrp="1"/>
           </p:cNvSpPr>
@@ -5692,15 +6584,15 @@
             </a:pPr>
             <a:r>
               <a:rPr/>
-              <a:t>Arhitektura LSTM</a:t>
-            </a:r>
-            <a:endParaRPr/>
-          </a:p>
-        </p:txBody>
-      </p:sp>
-      <p:sp>
-        <p:nvSpPr>
-          <p:cNvPr id="290000381" name="Text Placeholder 2"/>
+              <a:t>LSTM (Long short term memory)</a:t>
+            </a:r>
+            <a:endParaRPr/>
+          </a:p>
+        </p:txBody>
+      </p:sp>
+      <p:sp>
+        <p:nvSpPr>
+          <p:cNvPr id="1441595811" name="Text Placeholder 2"/>
           <p:cNvSpPr>
             <a:spLocks noGrp="1"/>
           </p:cNvSpPr>
@@ -5720,6 +6612,80 @@
             <a:pPr>
               <a:defRPr/>
             </a:pPr>
+            <a:r>
+              <a:rPr/>
+              <a:t>Jedan od ciljeva zadatka je izrada primitivnog jezičkog modela za predviđanje sledećeg slova u sekvenci</a:t>
+            </a:r>
+            <a:endParaRPr/>
+          </a:p>
+          <a:p>
+            <a:pPr>
+              <a:defRPr/>
+            </a:pPr>
+            <a:r>
+              <a:rPr i="1"/>
+              <a:t>Feedforward</a:t>
+            </a:r>
+            <a:r>
+              <a:rPr/>
+              <a:t> neuronske mreže nisu namenjene za predviđanje sekvenci</a:t>
+            </a:r>
+            <a:endParaRPr/>
+          </a:p>
+          <a:p>
+            <a:pPr>
+              <a:defRPr/>
+            </a:pPr>
+            <a:r>
+              <a:rPr/>
+              <a:t>Rekurentne neuronske mreže mogu da obrađuju sekvencijalne podatke, ali nastaje problem nestajućih i eksplozivnih gradijenata</a:t>
+            </a:r>
+            <a:endParaRPr/>
+          </a:p>
+          <a:p>
+            <a:pPr>
+              <a:defRPr/>
+            </a:pPr>
+            <a:r>
+              <a:rPr/>
+              <a:t>LSTM re</a:t>
+            </a:r>
+            <a:r>
+              <a:rPr/>
+              <a:t>šava taj problem upotrebom kratkoročne i dugoročne memorije</a:t>
+            </a:r>
+            <a:endParaRPr/>
+          </a:p>
+          <a:p>
+            <a:pPr>
+              <a:defRPr/>
+            </a:pPr>
+            <a:r>
+              <a:rPr/>
+              <a:t>Time je moguće čuvanje informacija kroz du</a:t>
+            </a:r>
+            <a:r>
+              <a:rPr/>
+              <a:t>ži niz koraka</a:t>
+            </a:r>
+            <a:endParaRPr/>
+          </a:p>
+          <a:p>
+            <a:pPr>
+              <a:defRPr/>
+            </a:pPr>
+            <a:r>
+              <a:rPr/>
+              <a:t>Pomoću kapija(</a:t>
+            </a:r>
+            <a:r>
+              <a:rPr i="1"/>
+              <a:t>gates</a:t>
+            </a:r>
+            <a:r>
+              <a:rPr/>
+              <a:t>) se određuje koje informacije treba odbaciti, zamaptiti ili zadržati</a:t>
+            </a:r>
             <a:endParaRPr/>
           </a:p>
         </p:txBody>
@@ -5759,7 +6725,7 @@
       </p:grpSpPr>
       <p:sp>
         <p:nvSpPr>
-          <p:cNvPr id="979641503" name="Title 1"/>
+          <p:cNvPr id="327247656" name="Title 1"/>
           <p:cNvSpPr>
             <a:spLocks noGrp="1"/>
           </p:cNvSpPr>
@@ -5776,389 +6742,101 @@
               <a:defRPr/>
             </a:pPr>
             <a:r>
-              <a:rPr lang="sr-Latn-RS"/>
-              <a:t>Pored slika moguće je ubaciti i tabele i/ili druge mogućnosti koje nudi PowerPoint</a:t>
-            </a:r>
-            <a:endParaRPr/>
-          </a:p>
-        </p:txBody>
-      </p:sp>
-      <p:graphicFrame>
-        <p:nvGraphicFramePr>
-          <p:cNvPr id="534064183" name="Table 4"/>
-          <p:cNvGraphicFramePr>
-            <a:graphicFrameLocks xmlns:a="http://schemas.openxmlformats.org/drawingml/2006/main" noGrp="1"/>
-          </p:cNvGraphicFramePr>
+              <a:rPr/>
+              <a:t>Arhitektura LSTM</a:t>
+            </a:r>
+            <a:endParaRPr/>
+          </a:p>
+        </p:txBody>
+      </p:sp>
+      <p:pic>
+        <p:nvPicPr>
+          <p:cNvPr id="1919360106" name=""/>
+          <p:cNvPicPr>
+            <a:picLocks noChangeAspect="1"/>
+          </p:cNvPicPr>
           <p:nvPr>
             <p:ph idx="1"/>
           </p:nvPr>
-        </p:nvGraphicFramePr>
-        <p:xfrm rot="0">
-          <a:off x="177800" y="1535113"/>
-          <a:ext cx="11822112" cy="3383280"/>
-        </p:xfrm>
-        <a:graphic>
-          <a:graphicData uri="http://schemas.openxmlformats.org/drawingml/2006/table">
-            <a:tbl>
-              <a:tblPr firstRow="1" firstCol="0" lastRow="0" lastCol="0" bandRow="1" bandCol="0">
-                <a:tableStyleId>{5C22544A-7EE6-4342-B048-85BDC9FD1C3A}</a:tableStyleId>
-              </a:tblPr>
-              <a:tblGrid>
-                <a:gridCol w="2955528"/>
-                <a:gridCol w="2955528"/>
-                <a:gridCol w="2955528"/>
-                <a:gridCol w="2955528"/>
-              </a:tblGrid>
-              <a:tr h="370840">
-                <a:tc>
-                  <a:txBody>
-                    <a:bodyPr/>
-                    <a:p>
-                      <a:pPr algn="ctr">
-                        <a:defRPr/>
-                      </a:pPr>
-                      <a:r>
-                        <a:rPr lang="sr-Latn-RS" sz="2400"/>
-                        <a:t>Tip izlaza</a:t>
-                      </a:r>
-                      <a:endParaRPr/>
-                    </a:p>
-                  </a:txBody>
-                  <a:tcPr anchor="ctr"/>
-                </a:tc>
-                <a:tc>
-                  <a:txBody>
-                    <a:bodyPr/>
-                    <a:p>
-                      <a:pPr algn="ctr">
-                        <a:defRPr/>
-                      </a:pPr>
-                      <a:r>
-                        <a:rPr lang="sr-Latn-RS" sz="2400"/>
-                        <a:t>Izlazna raspodela</a:t>
-                      </a:r>
-                      <a:endParaRPr/>
-                    </a:p>
-                  </a:txBody>
-                  <a:tcPr anchor="ctr"/>
-                </a:tc>
-                <a:tc>
-                  <a:txBody>
-                    <a:bodyPr/>
-                    <a:p>
-                      <a:pPr algn="ctr">
-                        <a:defRPr/>
-                      </a:pPr>
-                      <a:r>
-                        <a:rPr lang="sr-Latn-RS" sz="2400"/>
-                        <a:t>Izlazni sloj</a:t>
-                      </a:r>
-                      <a:endParaRPr/>
-                    </a:p>
-                  </a:txBody>
-                  <a:tcPr anchor="ctr"/>
-                </a:tc>
-                <a:tc>
-                  <a:txBody>
-                    <a:bodyPr/>
-                    <a:p>
-                      <a:pPr algn="ctr">
-                        <a:defRPr/>
-                      </a:pPr>
-                      <a:r>
-                        <a:rPr lang="sr-Latn-RS" sz="2400"/>
-                        <a:t>Funkcija cene</a:t>
-                      </a:r>
-                      <a:endParaRPr/>
-                    </a:p>
-                  </a:txBody>
-                  <a:tcPr anchor="ctr"/>
-                </a:tc>
-              </a:tr>
-              <a:tr h="370840">
-                <a:tc>
-                  <a:txBody>
-                    <a:bodyPr/>
-                    <a:p>
-                      <a:pPr algn="ctr">
-                        <a:defRPr/>
-                      </a:pPr>
-                      <a:r>
-                        <a:rPr lang="sr-Latn-RS" sz="2400"/>
-                        <a:t>Binarni</a:t>
-                      </a:r>
-                      <a:endParaRPr/>
-                    </a:p>
-                  </a:txBody>
-                  <a:tcPr anchor="ctr"/>
-                </a:tc>
-                <a:tc>
-                  <a:txBody>
-                    <a:bodyPr/>
-                    <a:p>
-                      <a:pPr algn="ctr">
-                        <a:defRPr/>
-                      </a:pPr>
-                      <a:r>
-                        <a:rPr lang="sr-Latn-RS" sz="2400"/>
-                        <a:t>Bernoullieva</a:t>
-                      </a:r>
-                      <a:endParaRPr lang="sr-Latn-RS" sz="2400"/>
-                    </a:p>
-                  </a:txBody>
-                  <a:tcPr anchor="ctr"/>
-                </a:tc>
-                <a:tc>
-                  <a:txBody>
-                    <a:bodyPr/>
-                    <a:p>
-                      <a:pPr algn="ctr">
-                        <a:defRPr/>
-                      </a:pPr>
-                      <a:r>
-                        <a:rPr lang="sr-Latn-RS" sz="2400"/>
-                        <a:t>Sigmoid</a:t>
-                      </a:r>
-                      <a:endParaRPr lang="sr-Latn-RS" sz="2400"/>
-                    </a:p>
-                  </a:txBody>
-                  <a:tcPr anchor="ctr"/>
-                </a:tc>
-                <a:tc>
-                  <a:txBody>
-                    <a:bodyPr/>
-                    <a:p>
-                      <a:pPr algn="ctr">
-                        <a:defRPr/>
-                      </a:pPr>
-                      <a:r>
-                        <a:rPr lang="sr-Latn-RS" sz="2400"/>
-                        <a:t>Binarna unakrsna entropija</a:t>
-                      </a:r>
-                      <a:endParaRPr/>
-                    </a:p>
-                  </a:txBody>
-                  <a:tcPr anchor="ctr"/>
-                </a:tc>
-              </a:tr>
-              <a:tr h="370840">
-                <a:tc>
-                  <a:txBody>
-                    <a:bodyPr/>
-                    <a:p>
-                      <a:pPr algn="ctr">
-                        <a:defRPr/>
-                      </a:pPr>
-                      <a:r>
-                        <a:rPr lang="sr-Latn-RS" sz="2400"/>
-                        <a:t>Diskretni</a:t>
-                      </a:r>
-                      <a:endParaRPr/>
-                    </a:p>
-                  </a:txBody>
-                  <a:tcPr anchor="ctr"/>
-                </a:tc>
-                <a:tc>
-                  <a:txBody>
-                    <a:bodyPr/>
-                    <a:p>
-                      <a:pPr algn="ctr">
-                        <a:defRPr/>
-                      </a:pPr>
-                      <a:r>
-                        <a:rPr lang="sr-Latn-RS" sz="2400"/>
-                        <a:t>Multinolli</a:t>
-                      </a:r>
-                      <a:r>
-                        <a:rPr lang="sr-Latn-RS" sz="2400"/>
-                        <a:t> </a:t>
-                      </a:r>
-                      <a:endParaRPr/>
-                    </a:p>
-                  </a:txBody>
-                  <a:tcPr anchor="ctr"/>
-                </a:tc>
-                <a:tc>
-                  <a:txBody>
-                    <a:bodyPr/>
-                    <a:p>
-                      <a:pPr algn="ctr">
-                        <a:defRPr/>
-                      </a:pPr>
-                      <a:r>
-                        <a:rPr lang="sr-Latn-RS" sz="2400"/>
-                        <a:t>Softmax</a:t>
-                      </a:r>
-                      <a:endParaRPr lang="sr-Latn-RS" sz="2400"/>
-                    </a:p>
-                  </a:txBody>
-                  <a:tcPr anchor="ctr"/>
-                </a:tc>
-                <a:tc>
-                  <a:txBody>
-                    <a:bodyPr/>
-                    <a:p>
-                      <a:pPr algn="ctr">
-                        <a:defRPr/>
-                      </a:pPr>
-                      <a:r>
-                        <a:rPr lang="sr-Latn-RS" sz="2400"/>
-                        <a:t>Diskretna unakrsna entropija</a:t>
-                      </a:r>
-                      <a:endParaRPr/>
-                    </a:p>
-                  </a:txBody>
-                  <a:tcPr anchor="ctr"/>
-                </a:tc>
-              </a:tr>
-              <a:tr h="370840">
-                <a:tc>
-                  <a:txBody>
-                    <a:bodyPr/>
-                    <a:p>
-                      <a:pPr algn="ctr">
-                        <a:defRPr/>
-                      </a:pPr>
-                      <a:r>
-                        <a:rPr lang="sr-Latn-RS" sz="2400"/>
-                        <a:t>Kontinualni</a:t>
-                      </a:r>
-                      <a:endParaRPr/>
-                    </a:p>
-                  </a:txBody>
-                  <a:tcPr anchor="ctr"/>
-                </a:tc>
-                <a:tc>
-                  <a:txBody>
-                    <a:bodyPr/>
-                    <a:p>
-                      <a:pPr algn="ctr">
-                        <a:defRPr/>
-                      </a:pPr>
-                      <a:r>
-                        <a:rPr lang="sr-Latn-RS" sz="2400"/>
-                        <a:t>Gaussova</a:t>
-                      </a:r>
-                      <a:endParaRPr lang="sr-Latn-RS" sz="2400"/>
-                    </a:p>
-                  </a:txBody>
-                  <a:tcPr anchor="ctr"/>
-                </a:tc>
-                <a:tc>
-                  <a:txBody>
-                    <a:bodyPr/>
-                    <a:p>
-                      <a:pPr algn="ctr">
-                        <a:defRPr/>
-                      </a:pPr>
-                      <a:r>
-                        <a:rPr lang="sr-Latn-RS" sz="2400"/>
-                        <a:t>Linearan</a:t>
-                      </a:r>
-                      <a:endParaRPr/>
-                    </a:p>
-                  </a:txBody>
-                  <a:tcPr anchor="ctr"/>
-                </a:tc>
-                <a:tc>
-                  <a:txBody>
-                    <a:bodyPr/>
-                    <a:p>
-                      <a:pPr algn="ctr">
-                        <a:defRPr/>
-                      </a:pPr>
-                      <a:r>
-                        <a:rPr lang="sr-Latn-RS" sz="2400"/>
-                        <a:t>Srednja kvadratna greška</a:t>
-                      </a:r>
-                      <a:endParaRPr/>
-                    </a:p>
-                  </a:txBody>
-                  <a:tcPr anchor="ctr"/>
-                </a:tc>
-              </a:tr>
-              <a:tr h="370840">
-                <a:tc>
-                  <a:txBody>
-                    <a:bodyPr/>
-                    <a:p>
-                      <a:pPr algn="ctr">
-                        <a:defRPr/>
-                      </a:pPr>
-                      <a:r>
-                        <a:rPr lang="sr-Latn-RS" sz="2400"/>
-                        <a:t>Kontinualni</a:t>
-                      </a:r>
-                      <a:endParaRPr/>
-                    </a:p>
-                  </a:txBody>
-                  <a:tcPr anchor="ctr"/>
-                </a:tc>
-                <a:tc>
-                  <a:txBody>
-                    <a:bodyPr/>
-                    <a:p>
-                      <a:pPr algn="ctr">
-                        <a:defRPr/>
-                      </a:pPr>
-                      <a:r>
-                        <a:rPr lang="sr-Latn-RS" sz="2400"/>
-                        <a:t>Gaussova</a:t>
-                      </a:r>
-                      <a:r>
-                        <a:rPr lang="sr-Latn-RS" sz="2400"/>
-                        <a:t> mešavina</a:t>
-                      </a:r>
-                      <a:endParaRPr/>
-                    </a:p>
-                  </a:txBody>
-                  <a:tcPr anchor="ctr"/>
-                </a:tc>
-                <a:tc>
-                  <a:txBody>
-                    <a:bodyPr/>
-                    <a:p>
-                      <a:pPr algn="ctr">
-                        <a:defRPr/>
-                      </a:pPr>
-                      <a:r>
-                        <a:rPr lang="sr-Latn-RS" sz="2400"/>
-                        <a:t>Mixture</a:t>
-                      </a:r>
-                      <a:r>
-                        <a:rPr lang="sr-Latn-RS" sz="2400"/>
-                        <a:t> </a:t>
-                      </a:r>
-                      <a:r>
-                        <a:rPr lang="sr-Latn-RS" sz="2400"/>
-                        <a:t>denisty</a:t>
-                      </a:r>
-                      <a:endParaRPr lang="sr-Latn-RS" sz="2400"/>
-                    </a:p>
-                  </a:txBody>
-                  <a:tcPr anchor="ctr"/>
-                </a:tc>
-                <a:tc>
-                  <a:txBody>
-                    <a:bodyPr/>
-                    <a:p>
-                      <a:pPr algn="ctr">
-                        <a:defRPr/>
-                      </a:pPr>
-                      <a:r>
-                        <a:rPr lang="sr-Latn-RS" sz="2400"/>
-                        <a:t>Unakrsna entropija</a:t>
-                      </a:r>
-                      <a:endParaRPr/>
-                    </a:p>
-                  </a:txBody>
-                  <a:tcPr anchor="ctr"/>
-                </a:tc>
-              </a:tr>
-            </a:tbl>
-          </a:graphicData>
-        </a:graphic>
-      </p:graphicFrame>
+        </p:nvPicPr>
+        <p:blipFill rotWithShape="1">
+          <a:blip r:embed="rId3"/>
+          <a:stretch/>
+        </p:blipFill>
+        <p:spPr bwMode="auto">
+          <a:xfrm rot="0" flipH="0" flipV="0">
+            <a:off x="1523974" y="1535542"/>
+            <a:ext cx="8657911" cy="4398553"/>
+          </a:xfrm>
+          <a:prstGeom prst="rect">
+            <a:avLst/>
+          </a:prstGeom>
+        </p:spPr>
+      </p:pic>
+      <p:sp>
+        <p:nvSpPr>
+          <p:cNvPr id="1864983550" name=""/>
+          <p:cNvSpPr txBox="1"/>
+          <p:nvPr/>
+        </p:nvSpPr>
+        <p:spPr bwMode="auto">
+          <a:xfrm rot="0" flipH="0" flipV="0">
+            <a:off x="1753160" y="6026234"/>
+            <a:ext cx="8977583" cy="640440"/>
+          </a:xfrm>
+          <a:prstGeom prst="rect">
+            <a:avLst/>
+          </a:prstGeom>
+          <a:noFill/>
+        </p:spPr>
+        <p:txBody>
+          <a:bodyPr vertOverflow="overflow" horzOverflow="overflow" vert="horz" wrap="square" lIns="91440" tIns="45720" rIns="91440" bIns="45720" numCol="1" spcCol="0" rtlCol="0" fromWordArt="0" anchor="t" anchorCtr="0" forceAA="0" upright="0" compatLnSpc="0">
+            <a:spAutoFit/>
+          </a:bodyPr>
+          <a:p>
+            <a:pPr>
+              <a:defRPr/>
+            </a:pPr>
+            <a:r>
+              <a:rPr/>
+              <a:t>Arhitektura LSTM izra</a:t>
+            </a:r>
+            <a:r>
+              <a:rPr/>
+              <a:t>đena pomoću </a:t>
+            </a:r>
+            <a:r>
+              <a:rPr lang="sr-Latn-RS" sz="1800" b="0" i="0" u="sng" strike="noStrike" cap="none" spc="0">
+                <a:solidFill>
+                  <a:schemeClr val="tx1"/>
+                </a:solidFill>
+                <a:latin typeface="Calibri"/>
+                <a:ea typeface="Calibri"/>
+                <a:cs typeface="Calibri"/>
+                <a:hlinkClick r:id="rId4" tooltip=""/>
+              </a:rPr>
+              <a:t>https://app.diagrams.net/</a:t>
+            </a:r>
+            <a:r>
+              <a:rPr/>
+              <a:t> alata, po uzoru na </a:t>
+            </a:r>
+            <a:r>
+              <a:rPr lang="sr-Latn-RS" sz="1800" b="0" i="0" u="sng" strike="noStrike" cap="none" spc="0">
+                <a:solidFill>
+                  <a:schemeClr val="tx1"/>
+                </a:solidFill>
+                <a:latin typeface="Calibri"/>
+                <a:ea typeface="Calibri"/>
+                <a:cs typeface="Calibri"/>
+                <a:hlinkClick r:id="rId5" tooltip=""/>
+              </a:rPr>
+              <a:t>https://youtu.be/YCzL96nL7j0?t=358</a:t>
+            </a:r>
+            <a:endParaRPr/>
+          </a:p>
+        </p:txBody>
+      </p:sp>
     </p:spTree>
   </p:cSld>
   <p:clrMapOvr>
@@ -6194,7 +6872,66 @@
       </p:grpSpPr>
       <p:sp>
         <p:nvSpPr>
-          <p:cNvPr id="1420678456" name="Title 1"/>
+          <p:cNvPr id="76483842" name="Title 3"/>
+          <p:cNvSpPr>
+            <a:spLocks noGrp="1"/>
+          </p:cNvSpPr>
+          <p:nvPr>
+            <p:ph type="ctrTitle"/>
+          </p:nvPr>
+        </p:nvSpPr>
+        <p:spPr bwMode="auto"/>
+        <p:txBody>
+          <a:bodyPr/>
+          <a:lstStyle/>
+          <a:p>
+            <a:pPr>
+              <a:defRPr/>
+            </a:pPr>
+            <a:r>
+              <a:rPr lang="en-US" i="0"/>
+              <a:t>Primitivni jezički model</a:t>
+            </a:r>
+            <a:endParaRPr/>
+          </a:p>
+        </p:txBody>
+      </p:sp>
+    </p:spTree>
+  </p:cSld>
+  <p:clrMapOvr>
+    <a:masterClrMapping/>
+  </p:clrMapOvr>
+  <mc:AlternateContent xmlns:mc="http://schemas.openxmlformats.org/markup-compatibility/2006">
+    <mc:Choice xmlns:p159="http://schemas.microsoft.com/office/powerpoint/2015/09/main" xmlns:p14="http://schemas.microsoft.com/office/powerpoint/2010/main" Requires="p159">
+      <p:transition p14:dur="500" advClick="1"/>
+    </mc:Choice>
+    <mc:Fallback>
+      <p:transition advClick="1"/>
+    </mc:Fallback>
+  </mc:AlternateContent>
+</p:sld>
+</file>
+
+<file path=ppt/slides/slide18.xml><?xml version="1.0" encoding="utf-8"?>
+<p:sld xmlns:a="http://schemas.openxmlformats.org/drawingml/2006/main" xmlns:r="http://schemas.openxmlformats.org/officeDocument/2006/relationships" xmlns:p="http://schemas.openxmlformats.org/presentationml/2006/main" xmlns:m="http://schemas.openxmlformats.org/officeDocument/2006/math" xmlns:w="http://schemas.openxmlformats.org/wordprocessingml/2006/main" xmlns:mc="http://schemas.openxmlformats.org/markup-compatibility/2006" showMasterPhAnim="0" showMasterSp="1" show="1">
+  <p:cSld name="">
+    <p:spTree>
+      <p:nvGrpSpPr>
+        <p:cNvPr id="1" name=""/>
+        <p:cNvGrpSpPr/>
+        <p:nvPr/>
+      </p:nvGrpSpPr>
+      <p:grpSpPr bwMode="auto">
+        <a:xfrm>
+          <a:off x="0" y="0"/>
+          <a:ext cx="0" cy="0"/>
+          <a:chOff x="0" y="0"/>
+          <a:chExt cx="0" cy="0"/>
+        </a:xfrm>
+      </p:grpSpPr>
+      <p:sp>
+        <p:nvSpPr>
+          <p:cNvPr id="488493354" name="Title 1"/>
           <p:cNvSpPr>
             <a:spLocks noGrp="1"/>
           </p:cNvSpPr>
@@ -6211,16 +6948,23 @@
               <a:defRPr/>
             </a:pPr>
             <a:r>
-              <a:rPr lang="sr-Latn-RS"/>
-              <a:t>Reference</a:t>
-            </a:r>
-            <a:endParaRPr/>
-          </a:p>
-        </p:txBody>
-      </p:sp>
-      <p:sp>
-        <p:nvSpPr>
-          <p:cNvPr id="1668082565" name="Content Placeholder 2"/>
+              <a:rPr lang="en-US" sz="4400" b="0" i="0" u="none" strike="noStrike" cap="none" spc="0">
+                <a:solidFill>
+                  <a:schemeClr val="tx1"/>
+                </a:solidFill>
+                <a:latin typeface="+mj-lt"/>
+                <a:ea typeface="+mj-ea"/>
+                <a:cs typeface="+mj-cs"/>
+              </a:rPr>
+              <a:t>Primitivni jezički model</a:t>
+            </a:r>
+            <a:endParaRPr sz="4400"/>
+          </a:p>
+        </p:txBody>
+      </p:sp>
+      <p:sp>
+        <p:nvSpPr>
+          <p:cNvPr id="423384376" name="Text Placeholder 2"/>
           <p:cNvSpPr>
             <a:spLocks noGrp="1"/>
           </p:cNvSpPr>
@@ -6228,254 +6972,261 @@
             <p:ph idx="1"/>
           </p:nvPr>
         </p:nvSpPr>
-        <p:spPr bwMode="auto"/>
-        <p:txBody>
-          <a:bodyPr>
-            <a:normAutofit/>
-          </a:bodyPr>
-          <a:lstStyle/>
-          <a:p>
-            <a:pPr marL="0" indent="0">
-              <a:buNone/>
-              <a:defRPr/>
-            </a:pPr>
-            <a:r>
-              <a:rPr lang="sr-Latn-RS" sz="2400"/>
-              <a:t>Obavezan slajd u kome će biti navedeni izvori koji su iskorišćeni za pripremu prezentacije. Npr.</a:t>
-            </a:r>
-            <a:endParaRPr/>
-          </a:p>
-          <a:p>
-            <a:pPr marL="514350" indent="-514350">
-              <a:buFont typeface="+mj-lt"/>
-              <a:buAutoNum type="arabicParenR"/>
-              <a:defRPr/>
-            </a:pPr>
-            <a:r>
-              <a:rPr lang="sr-Latn-RS" sz="2400"/>
-              <a:t>Slajdovi sa predavanja: S. </a:t>
-            </a:r>
-            <a:r>
-              <a:rPr lang="sr-Latn-RS" sz="2400"/>
-              <a:t>Pathak</a:t>
-            </a:r>
-            <a:r>
-              <a:rPr lang="sr-Latn-RS" sz="2400"/>
-              <a:t>, R. Fernandez „</a:t>
-            </a:r>
-            <a:r>
-              <a:rPr lang="en-US" sz="2400"/>
-              <a:t>Module 5: Recurrence (RNN) and Long-Short Term Memory (LSTM)</a:t>
-            </a:r>
-            <a:r>
-              <a:rPr lang="sr-Latn-RS" sz="2400"/>
-              <a:t>“ in </a:t>
-            </a:r>
-            <a:r>
-              <a:rPr lang="sr-Latn-RS" sz="2400" i="1"/>
-              <a:t>Deep</a:t>
-            </a:r>
-            <a:r>
-              <a:rPr lang="sr-Latn-RS" sz="2400" i="1"/>
-              <a:t> </a:t>
-            </a:r>
-            <a:r>
-              <a:rPr lang="sr-Latn-RS" sz="2400" i="1"/>
-              <a:t>Learning</a:t>
-            </a:r>
-            <a:r>
-              <a:rPr lang="sr-Latn-RS" sz="2400" i="1"/>
-              <a:t> </a:t>
-            </a:r>
-            <a:r>
-              <a:rPr lang="sr-Latn-RS" sz="2400" i="1"/>
-              <a:t>Explained</a:t>
-            </a:r>
-            <a:r>
-              <a:rPr lang="sr-Latn-RS" sz="2400" i="1"/>
-              <a:t>  - </a:t>
-            </a:r>
-            <a:r>
-              <a:rPr lang="sr-Latn-RS" sz="2400" u="sng">
+        <p:spPr bwMode="auto">
+          <a:prstGeom prst="rect">
+            <a:avLst/>
+          </a:prstGeom>
+        </p:spPr>
+        <p:txBody>
+          <a:bodyPr/>
+          <a:lstStyle/>
+          <a:p>
+            <a:pPr>
+              <a:defRPr/>
+            </a:pPr>
+            <a:r>
+              <a:rPr/>
+              <a:t>Kulminacija navedenih proširenja je implementacija primitivnog jezičkog modela</a:t>
+            </a:r>
+            <a:endParaRPr/>
+          </a:p>
+          <a:p>
+            <a:pPr>
+              <a:defRPr/>
+            </a:pPr>
+            <a:r>
+              <a:rPr/>
+              <a:t>Osnovni koncept je predviđanje narednog slova u sekvenci</a:t>
+            </a:r>
+            <a:endParaRPr/>
+          </a:p>
+          <a:p>
+            <a:pPr>
+              <a:defRPr/>
+            </a:pPr>
+            <a:r>
+              <a:rPr/>
+              <a:t>Kao baza modela koristi se SrpELTeC, što je skup starih srpskih knjiga</a:t>
+            </a:r>
+            <a:endParaRPr/>
+          </a:p>
+          <a:p>
+            <a:pPr lvl="1">
+              <a:defRPr/>
+            </a:pPr>
+            <a:r>
+              <a:rPr lang="sr-Latn-RS" sz="2400" b="0" i="0" u="sng" strike="noStrike" cap="none" spc="0">
+                <a:solidFill>
+                  <a:schemeClr val="tx1"/>
+                </a:solidFill>
+                <a:latin typeface="Calibri Light"/>
+                <a:ea typeface="Calibri Light"/>
+                <a:cs typeface="Calibri Light"/>
                 <a:hlinkClick r:id="rId3" tooltip=""/>
               </a:rPr>
-              <a:t>https://raw.githubusercontent.com/huynhthaihoa/Microsoft-Deep-Learning-Explained/master/Slides/Module%2005_RNN%20and%20LSTM.pdf</a:t>
-            </a:r>
-            <a:r>
-              <a:rPr lang="sr-Latn-RS" sz="2400"/>
+              <a:t>https://huggingface.co/datasets/jerteh/SrpELTeC/tree/main</a:t>
+            </a:r>
+            <a:r>
+              <a:rPr/>
               <a:t> </a:t>
             </a:r>
-            <a:r>
-              <a:rPr lang="sr-Latn-RS" sz="2400"/>
-              <a:t>pristupljeno</a:t>
-            </a:r>
-            <a:r>
-              <a:rPr lang="sr-Latn-RS" sz="2400"/>
-              <a:t> 16.11.2022.</a:t>
-            </a:r>
-            <a:endParaRPr/>
-          </a:p>
-          <a:p>
-            <a:pPr marL="514350" indent="-514350">
-              <a:buFont typeface="+mj-lt"/>
-              <a:buAutoNum type="arabicParenR"/>
-              <a:defRPr/>
-            </a:pPr>
-            <a:r>
-              <a:rPr lang="en-US" sz="2400"/>
-              <a:t>I</a:t>
-            </a:r>
-            <a:r>
-              <a:rPr lang="sr-Latn-RS" sz="2400"/>
-              <a:t>.</a:t>
-            </a:r>
-            <a:r>
-              <a:rPr lang="en-US" sz="2400"/>
-              <a:t> Goodfellow</a:t>
-            </a:r>
-            <a:r>
-              <a:rPr lang="sr-Latn-RS" sz="2400"/>
-              <a:t>, </a:t>
-            </a:r>
-            <a:r>
-              <a:rPr lang="en-US" sz="2400"/>
-              <a:t>Y</a:t>
-            </a:r>
-            <a:r>
-              <a:rPr lang="sr-Latn-RS" sz="2400"/>
-              <a:t>.</a:t>
-            </a:r>
-            <a:r>
-              <a:rPr lang="en-US" sz="2400"/>
-              <a:t> Bengio  A</a:t>
-            </a:r>
-            <a:r>
-              <a:rPr lang="sr-Latn-RS" sz="2400"/>
-              <a:t>.</a:t>
-            </a:r>
-            <a:r>
-              <a:rPr lang="en-US" sz="2400"/>
-              <a:t> Courville</a:t>
-            </a:r>
-            <a:r>
-              <a:rPr lang="sr-Latn-RS" sz="2400"/>
-              <a:t>,</a:t>
-            </a:r>
-            <a:r>
-              <a:rPr lang="en-US" sz="2400"/>
-              <a:t> </a:t>
-            </a:r>
-            <a:r>
-              <a:rPr lang="sr-Latn-RS" sz="2400"/>
-              <a:t>“</a:t>
-            </a:r>
-            <a:r>
-              <a:rPr lang="sr-Latn-RS" sz="2400"/>
-              <a:t>Ch</a:t>
-            </a:r>
-            <a:r>
-              <a:rPr lang="sr-Latn-RS" sz="2400"/>
-              <a:t>. 8 -</a:t>
-            </a:r>
-            <a:r>
-              <a:rPr lang="en-US" sz="2400"/>
-              <a:t> </a:t>
-            </a:r>
-            <a:r>
-              <a:rPr lang="sr-Latn-RS" sz="2400"/>
-              <a:t>Convolutional</a:t>
-            </a:r>
-            <a:r>
-              <a:rPr lang="sr-Latn-RS" sz="2400"/>
-              <a:t> </a:t>
-            </a:r>
-            <a:r>
-              <a:rPr lang="sr-Latn-RS" sz="2400"/>
-              <a:t>Networks</a:t>
-            </a:r>
-            <a:r>
-              <a:rPr lang="sr-Latn-RS" sz="2400"/>
-              <a:t>“ </a:t>
-            </a:r>
-            <a:r>
-              <a:rPr lang="sr-Latn-RS" sz="2400" i="1"/>
-              <a:t>Deep</a:t>
-            </a:r>
-            <a:r>
-              <a:rPr lang="sr-Latn-RS" sz="2400" i="1"/>
-              <a:t> </a:t>
-            </a:r>
-            <a:r>
-              <a:rPr lang="sr-Latn-RS" sz="2400" i="1"/>
-              <a:t>Learning</a:t>
-            </a:r>
-            <a:r>
-              <a:rPr lang="sr-Latn-RS" sz="2400" i="1"/>
-              <a:t>, MIT </a:t>
-            </a:r>
-            <a:r>
-              <a:rPr lang="sr-Latn-RS" sz="2400" i="1"/>
-              <a:t>Press</a:t>
-            </a:r>
-            <a:r>
-              <a:rPr lang="sr-Latn-RS" sz="2400" i="1"/>
-              <a:t>, </a:t>
-            </a:r>
-            <a:r>
-              <a:rPr lang="sr-Latn-RS" sz="2400"/>
-              <a:t>2016, url: https://www.deeplearningbook.org/contents/convnets.html  (pristupljeno: 8.11.2022).</a:t>
-            </a:r>
-            <a:endParaRPr lang="sr-Latn-RS" sz="2400" i="1"/>
-          </a:p>
-          <a:p>
-            <a:pPr marL="0" indent="0">
-              <a:buNone/>
-              <a:defRPr/>
-            </a:pPr>
-            <a:r>
-              <a:rPr lang="sr-Latn-RS"/>
-              <a:t> </a:t>
-            </a:r>
-            <a:endParaRPr/>
-          </a:p>
-        </p:txBody>
-      </p:sp>
-      <p:sp>
-        <p:nvSpPr>
-          <p:cNvPr id="1967491347" name=""/>
-          <p:cNvSpPr/>
+            <a:endParaRPr/>
+          </a:p>
+          <a:p>
+            <a:pPr lvl="1">
+              <a:defRPr/>
+            </a:pPr>
+            <a:r>
+              <a:rPr/>
+              <a:t>Sadrži oko 5 miliona reči</a:t>
+            </a:r>
+            <a:endParaRPr/>
+          </a:p>
+        </p:txBody>
+      </p:sp>
+    </p:spTree>
+  </p:cSld>
+  <p:clrMapOvr>
+    <a:masterClrMapping/>
+  </p:clrMapOvr>
+  <mc:AlternateContent xmlns:mc="http://schemas.openxmlformats.org/markup-compatibility/2006">
+    <mc:Choice xmlns:p159="http://schemas.microsoft.com/office/powerpoint/2015/09/main" xmlns:p14="http://schemas.microsoft.com/office/powerpoint/2010/main" Requires="p159">
+      <p:transition p14:dur="500" advClick="1"/>
+    </mc:Choice>
+    <mc:Fallback>
+      <p:transition advClick="1"/>
+    </mc:Fallback>
+  </mc:AlternateContent>
+</p:sld>
+</file>
+
+<file path=ppt/slides/slide19.xml><?xml version="1.0" encoding="utf-8"?>
+<p:sld xmlns:a="http://schemas.openxmlformats.org/drawingml/2006/main" xmlns:r="http://schemas.openxmlformats.org/officeDocument/2006/relationships" xmlns:p="http://schemas.openxmlformats.org/presentationml/2006/main" xmlns:m="http://schemas.openxmlformats.org/officeDocument/2006/math" xmlns:w="http://schemas.openxmlformats.org/wordprocessingml/2006/main" xmlns:mc="http://schemas.openxmlformats.org/markup-compatibility/2006" showMasterPhAnim="0" showMasterSp="1" show="1">
+  <p:cSld name="">
+    <p:spTree>
+      <p:nvGrpSpPr>
+        <p:cNvPr id="1" name=""/>
+        <p:cNvGrpSpPr/>
+        <p:nvPr/>
+      </p:nvGrpSpPr>
+      <p:grpSpPr bwMode="auto">
+        <a:xfrm>
+          <a:off x="0" y="0"/>
+          <a:ext cx="0" cy="0"/>
+          <a:chOff x="0" y="0"/>
+          <a:chExt cx="0" cy="0"/>
+        </a:xfrm>
+      </p:grpSpPr>
+      <p:sp>
+        <p:nvSpPr>
+          <p:cNvPr id="1993713658" name="Title 1"/>
+          <p:cNvSpPr>
+            <a:spLocks noGrp="1"/>
+          </p:cNvSpPr>
+          <p:nvPr>
+            <p:ph type="title"/>
+          </p:nvPr>
+        </p:nvSpPr>
+        <p:spPr bwMode="auto"/>
+        <p:txBody>
+          <a:bodyPr/>
+          <a:lstStyle/>
+          <a:p>
+            <a:pPr>
+              <a:defRPr/>
+            </a:pPr>
+            <a:r>
+              <a:rPr/>
+              <a:t>Arhitektura modela</a:t>
+            </a:r>
+            <a:endParaRPr/>
+          </a:p>
+        </p:txBody>
+      </p:sp>
+      <p:sp>
+        <p:nvSpPr>
+          <p:cNvPr id="1700912921" name="Text Placeholder 2"/>
+          <p:cNvSpPr>
+            <a:spLocks noGrp="1"/>
+          </p:cNvSpPr>
+          <p:nvPr>
+            <p:ph idx="1"/>
+          </p:nvPr>
+        </p:nvSpPr>
+        <p:spPr bwMode="auto">
+          <a:prstGeom prst="rect">
+            <a:avLst/>
+          </a:prstGeom>
+        </p:spPr>
+        <p:txBody>
+          <a:bodyPr/>
+          <a:lstStyle/>
+          <a:p>
+            <a:pPr>
+              <a:defRPr/>
+            </a:pPr>
+            <a:r>
+              <a:rPr/>
+              <a:t>One-hot enkodovanje</a:t>
+            </a:r>
+            <a:r>
+              <a:rPr/>
+              <a:t> na ulazu</a:t>
+            </a:r>
+            <a:endParaRPr/>
+          </a:p>
+          <a:p>
+            <a:pPr lvl="1">
+              <a:defRPr/>
+            </a:pPr>
+            <a:r>
+              <a:rPr/>
+              <a:t>Svako slovo je poseban ulaz</a:t>
+            </a:r>
+            <a:endParaRPr/>
+          </a:p>
+          <a:p>
+            <a:pPr lvl="0">
+              <a:defRPr/>
+            </a:pPr>
+            <a:r>
+              <a:rPr/>
+              <a:t>Sloj sa više paralelnih LSTM-ova</a:t>
+            </a:r>
+            <a:endParaRPr/>
+          </a:p>
+          <a:p>
+            <a:pPr lvl="0">
+              <a:defRPr/>
+            </a:pPr>
+            <a:r>
+              <a:rPr/>
+              <a:t>Klasičan sloj koji služi kao dekoder</a:t>
+            </a:r>
+            <a:endParaRPr/>
+          </a:p>
+          <a:p>
+            <a:pPr lvl="1">
+              <a:defRPr/>
+            </a:pPr>
+            <a:r>
+              <a:rPr/>
+              <a:t>Koristi </a:t>
+            </a:r>
+            <a:r>
+              <a:rPr i="1"/>
+              <a:t>softmax </a:t>
+            </a:r>
+            <a:r>
+              <a:rPr i="0"/>
+              <a:t>funkciju aktivacije</a:t>
+            </a:r>
+            <a:endParaRPr i="0"/>
+          </a:p>
+          <a:p>
+            <a:pPr lvl="0">
+              <a:defRPr/>
+            </a:pPr>
+            <a:r>
+              <a:rPr i="0"/>
+              <a:t>One-hot enkodovanje na izlazu</a:t>
+            </a:r>
+            <a:endParaRPr i="0"/>
+          </a:p>
+          <a:p>
+            <a:pPr lvl="1">
+              <a:defRPr/>
+            </a:pPr>
+            <a:r>
+              <a:rPr i="0"/>
+              <a:t>Svako slovo je poseban izlaz</a:t>
+            </a:r>
+            <a:endParaRPr i="0"/>
+          </a:p>
+        </p:txBody>
+      </p:sp>
+      <p:pic>
+        <p:nvPicPr>
+          <p:cNvPr id="1879541491" name=""/>
+          <p:cNvPicPr>
+            <a:picLocks noChangeAspect="1"/>
+          </p:cNvPicPr>
           <p:nvPr/>
-        </p:nvSpPr>
+        </p:nvPicPr>
+        <p:blipFill rotWithShape="1">
+          <a:blip r:embed="rId3"/>
+          <a:stretch/>
+        </p:blipFill>
         <p:spPr bwMode="auto">
           <a:xfrm>
-            <a:off x="5968559" y="3291840"/>
-            <a:ext cx="255240" cy="366119"/>
+            <a:off x="6552367" y="1535542"/>
+            <a:ext cx="5286375" cy="4448174"/>
           </a:xfrm>
+          <a:prstGeom prst="rect">
+            <a:avLst/>
+          </a:prstGeom>
         </p:spPr>
-        <p:txBody>
-          <a:bodyPr rot="0" spcFirstLastPara="0" vertOverflow="overflow" horzOverflow="overflow" vert="horz" wrap="square" lIns="91440" tIns="45720" rIns="91440" bIns="45720" numCol="1" spcCol="0" rtlCol="0" fromWordArt="0" anchor="t" anchorCtr="0" forceAA="0" upright="0" compatLnSpc="1">
-            <a:prstTxWarp prst="textNoShape"/>
-            <a:spAutoFit/>
-          </a:bodyPr>
-          <a:p>
-            <a:pPr>
-              <a:defRPr/>
-            </a:pPr>
-            <a:r>
-              <a:rPr sz="1200" b="0" i="0" u="none">
-                <a:solidFill>
-                  <a:srgbClr val="000000"/>
-                </a:solidFill>
-                <a:latin typeface="Times New Roman"/>
-                <a:ea typeface="Times New Roman"/>
-                <a:cs typeface="Times New Roman"/>
-              </a:rPr>
-              <a:t> </a:t>
-            </a:r>
-            <a:endParaRPr/>
-          </a:p>
-        </p:txBody>
-      </p:sp>
+      </p:pic>
     </p:spTree>
   </p:cSld>
   <p:clrMapOvr>
@@ -6511,7 +7262,7 @@
       </p:grpSpPr>
       <p:sp>
         <p:nvSpPr>
-          <p:cNvPr id="134553695" name="Title 1"/>
+          <p:cNvPr id="802492744" name="Title 1"/>
           <p:cNvSpPr>
             <a:spLocks noGrp="1"/>
           </p:cNvSpPr>
@@ -6537,7 +7288,7 @@
       </p:sp>
       <p:sp>
         <p:nvSpPr>
-          <p:cNvPr id="1402839415" name="Content Placeholder 2"/>
+          <p:cNvPr id="388898845" name="Content Placeholder 2"/>
           <p:cNvSpPr>
             <a:spLocks noGrp="1"/>
           </p:cNvSpPr>
@@ -6621,6 +7372,844 @@
               <a:defRPr/>
             </a:pPr>
             <a:endParaRPr lang="sr-Latn-RS"/>
+          </a:p>
+        </p:txBody>
+      </p:sp>
+    </p:spTree>
+  </p:cSld>
+  <p:clrMapOvr>
+    <a:masterClrMapping/>
+  </p:clrMapOvr>
+  <mc:AlternateContent xmlns:mc="http://schemas.openxmlformats.org/markup-compatibility/2006">
+    <mc:Choice xmlns:p159="http://schemas.microsoft.com/office/powerpoint/2015/09/main" xmlns:p14="http://schemas.microsoft.com/office/powerpoint/2010/main" Requires="p159">
+      <p:transition p14:dur="500" advClick="1"/>
+    </mc:Choice>
+    <mc:Fallback>
+      <p:transition advClick="1"/>
+    </mc:Fallback>
+  </mc:AlternateContent>
+</p:sld>
+</file>
+
+<file path=ppt/slides/slide20.xml><?xml version="1.0" encoding="utf-8"?>
+<p:sld xmlns:a="http://schemas.openxmlformats.org/drawingml/2006/main" xmlns:r="http://schemas.openxmlformats.org/officeDocument/2006/relationships" xmlns:p="http://schemas.openxmlformats.org/presentationml/2006/main" xmlns:m="http://schemas.openxmlformats.org/officeDocument/2006/math" xmlns:w="http://schemas.openxmlformats.org/wordprocessingml/2006/main" xmlns:mc="http://schemas.openxmlformats.org/markup-compatibility/2006" showMasterPhAnim="0" showMasterSp="1" show="1">
+  <p:cSld name="">
+    <p:spTree>
+      <p:nvGrpSpPr>
+        <p:cNvPr id="1" name=""/>
+        <p:cNvGrpSpPr/>
+        <p:nvPr/>
+      </p:nvGrpSpPr>
+      <p:grpSpPr bwMode="auto">
+        <a:xfrm>
+          <a:off x="0" y="0"/>
+          <a:ext cx="0" cy="0"/>
+          <a:chOff x="0" y="0"/>
+          <a:chExt cx="0" cy="0"/>
+        </a:xfrm>
+      </p:grpSpPr>
+      <p:sp>
+        <p:nvSpPr>
+          <p:cNvPr id="968104634" name="Title 3"/>
+          <p:cNvSpPr>
+            <a:spLocks noGrp="1"/>
+          </p:cNvSpPr>
+          <p:nvPr>
+            <p:ph type="ctrTitle"/>
+          </p:nvPr>
+        </p:nvSpPr>
+        <p:spPr bwMode="auto"/>
+        <p:txBody>
+          <a:bodyPr/>
+          <a:lstStyle/>
+          <a:p>
+            <a:pPr>
+              <a:defRPr/>
+            </a:pPr>
+            <a:r>
+              <a:rPr lang="en-US" i="0"/>
+              <a:t>Organizacija koda</a:t>
+            </a:r>
+            <a:endParaRPr/>
+          </a:p>
+        </p:txBody>
+      </p:sp>
+    </p:spTree>
+  </p:cSld>
+  <p:clrMapOvr>
+    <a:masterClrMapping/>
+  </p:clrMapOvr>
+  <mc:AlternateContent xmlns:mc="http://schemas.openxmlformats.org/markup-compatibility/2006">
+    <mc:Choice xmlns:p159="http://schemas.microsoft.com/office/powerpoint/2015/09/main" xmlns:p14="http://schemas.microsoft.com/office/powerpoint/2010/main" Requires="p159">
+      <p:transition p14:dur="500" advClick="1"/>
+    </mc:Choice>
+    <mc:Fallback>
+      <p:transition advClick="1"/>
+    </mc:Fallback>
+  </mc:AlternateContent>
+</p:sld>
+</file>
+
+<file path=ppt/slides/slide21.xml><?xml version="1.0" encoding="utf-8"?>
+<p:sld xmlns:a="http://schemas.openxmlformats.org/drawingml/2006/main" xmlns:r="http://schemas.openxmlformats.org/officeDocument/2006/relationships" xmlns:p="http://schemas.openxmlformats.org/presentationml/2006/main" xmlns:m="http://schemas.openxmlformats.org/officeDocument/2006/math" xmlns:w="http://schemas.openxmlformats.org/wordprocessingml/2006/main" xmlns:mc="http://schemas.openxmlformats.org/markup-compatibility/2006" showMasterPhAnim="0" showMasterSp="1" show="1">
+  <p:cSld name="">
+    <p:spTree>
+      <p:nvGrpSpPr>
+        <p:cNvPr id="1" name=""/>
+        <p:cNvGrpSpPr/>
+        <p:nvPr/>
+      </p:nvGrpSpPr>
+      <p:grpSpPr bwMode="auto">
+        <a:xfrm>
+          <a:off x="0" y="0"/>
+          <a:ext cx="0" cy="0"/>
+          <a:chOff x="0" y="0"/>
+          <a:chExt cx="0" cy="0"/>
+        </a:xfrm>
+      </p:grpSpPr>
+      <p:sp>
+        <p:nvSpPr>
+          <p:cNvPr id="1881629799" name="Title 1"/>
+          <p:cNvSpPr>
+            <a:spLocks noGrp="1"/>
+          </p:cNvSpPr>
+          <p:nvPr>
+            <p:ph type="title"/>
+          </p:nvPr>
+        </p:nvSpPr>
+        <p:spPr bwMode="auto"/>
+        <p:txBody>
+          <a:bodyPr/>
+          <a:lstStyle/>
+          <a:p>
+            <a:pPr>
+              <a:defRPr/>
+            </a:pPr>
+            <a:r>
+              <a:rPr/>
+              <a:t>Trenutna organizacija koda</a:t>
+            </a:r>
+            <a:endParaRPr/>
+          </a:p>
+        </p:txBody>
+      </p:sp>
+      <p:sp>
+        <p:nvSpPr>
+          <p:cNvPr id="549110932" name="Text Placeholder 2"/>
+          <p:cNvSpPr>
+            <a:spLocks noGrp="1"/>
+          </p:cNvSpPr>
+          <p:nvPr>
+            <p:ph idx="1"/>
+          </p:nvPr>
+        </p:nvSpPr>
+        <p:spPr bwMode="auto">
+          <a:prstGeom prst="rect">
+            <a:avLst/>
+          </a:prstGeom>
+        </p:spPr>
+        <p:txBody>
+          <a:bodyPr/>
+          <a:lstStyle/>
+          <a:p>
+            <a:pPr>
+              <a:defRPr/>
+            </a:pPr>
+            <a:r>
+              <a:rPr i="0"/>
+              <a:t>Sam kod </a:t>
+            </a:r>
+            <a:r>
+              <a:rPr i="1"/>
+              <a:t>dumbgrad</a:t>
+            </a:r>
+            <a:r>
+              <a:rPr i="0"/>
+              <a:t> alata je organizovan u dve jedinice:</a:t>
+            </a:r>
+            <a:endParaRPr i="0"/>
+          </a:p>
+          <a:p>
+            <a:pPr lvl="1">
+              <a:defRPr/>
+            </a:pPr>
+            <a:r>
+              <a:rPr i="1"/>
+              <a:t>engine.py – </a:t>
+            </a:r>
+            <a:r>
+              <a:rPr i="0"/>
+              <a:t>Implementacija </a:t>
+            </a:r>
+            <a:r>
+              <a:rPr i="1"/>
+              <a:t>Value</a:t>
+            </a:r>
+            <a:r>
+              <a:rPr i="0"/>
+              <a:t> klase, gde se definišu aritmetičke operacije neophodne za kreiranje modela, kao i operacije kreiranja grafa računanja</a:t>
+            </a:r>
+            <a:endParaRPr i="0"/>
+          </a:p>
+          <a:p>
+            <a:pPr lvl="1">
+              <a:defRPr/>
+            </a:pPr>
+            <a:r>
+              <a:rPr i="1"/>
+              <a:t>network.py</a:t>
+            </a:r>
+            <a:r>
+              <a:rPr i="0"/>
+              <a:t> – Klase i metode potrebne za kreiranje neuronske mre</a:t>
+            </a:r>
+            <a:r>
+              <a:rPr i="0"/>
+              <a:t>že</a:t>
+            </a:r>
+            <a:endParaRPr i="0"/>
+          </a:p>
+          <a:p>
+            <a:pPr lvl="0">
+              <a:defRPr/>
+            </a:pPr>
+            <a:r>
+              <a:rPr i="0"/>
+              <a:t>Pored osnovnog koda postoji i </a:t>
+            </a:r>
+            <a:r>
+              <a:rPr i="1"/>
+              <a:t>tests/</a:t>
+            </a:r>
+            <a:r>
+              <a:rPr i="0"/>
+              <a:t> folder, gde se nalaze primeri vizuelizacije i obučavanja modela.</a:t>
+            </a:r>
+            <a:endParaRPr i="0"/>
+          </a:p>
+        </p:txBody>
+      </p:sp>
+    </p:spTree>
+  </p:cSld>
+  <p:clrMapOvr>
+    <a:masterClrMapping/>
+  </p:clrMapOvr>
+  <mc:AlternateContent xmlns:mc="http://schemas.openxmlformats.org/markup-compatibility/2006">
+    <mc:Choice xmlns:p159="http://schemas.microsoft.com/office/powerpoint/2015/09/main" xmlns:p14="http://schemas.microsoft.com/office/powerpoint/2010/main" Requires="p159">
+      <p:transition p14:dur="500" advClick="1"/>
+    </mc:Choice>
+    <mc:Fallback>
+      <p:transition advClick="1"/>
+    </mc:Fallback>
+  </mc:AlternateContent>
+</p:sld>
+</file>
+
+<file path=ppt/slides/slide22.xml><?xml version="1.0" encoding="utf-8"?>
+<p:sld xmlns:a="http://schemas.openxmlformats.org/drawingml/2006/main" xmlns:r="http://schemas.openxmlformats.org/officeDocument/2006/relationships" xmlns:p="http://schemas.openxmlformats.org/presentationml/2006/main" xmlns:m="http://schemas.openxmlformats.org/officeDocument/2006/math" xmlns:w="http://schemas.openxmlformats.org/wordprocessingml/2006/main" xmlns:mc="http://schemas.openxmlformats.org/markup-compatibility/2006" showMasterPhAnim="0" showMasterSp="1" show="1">
+  <p:cSld name="">
+    <p:spTree>
+      <p:nvGrpSpPr>
+        <p:cNvPr id="1" name=""/>
+        <p:cNvGrpSpPr/>
+        <p:nvPr/>
+      </p:nvGrpSpPr>
+      <p:grpSpPr bwMode="auto">
+        <a:xfrm>
+          <a:off x="0" y="0"/>
+          <a:ext cx="0" cy="0"/>
+          <a:chOff x="0" y="0"/>
+          <a:chExt cx="0" cy="0"/>
+        </a:xfrm>
+      </p:grpSpPr>
+      <p:sp>
+        <p:nvSpPr>
+          <p:cNvPr id="2048717003" name="Title 1"/>
+          <p:cNvSpPr>
+            <a:spLocks noGrp="1"/>
+          </p:cNvSpPr>
+          <p:nvPr>
+            <p:ph type="title"/>
+          </p:nvPr>
+        </p:nvSpPr>
+        <p:spPr bwMode="auto"/>
+        <p:txBody>
+          <a:bodyPr/>
+          <a:lstStyle/>
+          <a:p>
+            <a:pPr>
+              <a:defRPr/>
+            </a:pPr>
+            <a:r>
+              <a:rPr lang="en-US" sz="4400" b="0" i="0" u="none" strike="noStrike" cap="none" spc="0">
+                <a:solidFill>
+                  <a:schemeClr val="tx1"/>
+                </a:solidFill>
+                <a:latin typeface="Calibri Light"/>
+                <a:ea typeface="Arial"/>
+                <a:cs typeface="Arial"/>
+              </a:rPr>
+              <a:t>Proširenje skupa podržanih aktivacionih funkcija</a:t>
+            </a:r>
+            <a:endParaRPr sz="4400"/>
+          </a:p>
+        </p:txBody>
+      </p:sp>
+      <p:sp>
+        <p:nvSpPr>
+          <p:cNvPr id="1542418925" name="Text Placeholder 2"/>
+          <p:cNvSpPr>
+            <a:spLocks noGrp="1"/>
+          </p:cNvSpPr>
+          <p:nvPr>
+            <p:ph idx="1"/>
+          </p:nvPr>
+        </p:nvSpPr>
+        <p:spPr bwMode="auto">
+          <a:prstGeom prst="rect">
+            <a:avLst/>
+          </a:prstGeom>
+        </p:spPr>
+        <p:txBody>
+          <a:bodyPr/>
+          <a:lstStyle/>
+          <a:p>
+            <a:pPr>
+              <a:defRPr/>
+            </a:pPr>
+            <a:r>
+              <a:rPr/>
+              <a:t>Ideja je proširiti </a:t>
+            </a:r>
+            <a:r>
+              <a:rPr i="1"/>
+              <a:t>Value </a:t>
+            </a:r>
+            <a:r>
+              <a:rPr i="0"/>
+              <a:t>klasu unutar osnovnog </a:t>
+            </a:r>
+            <a:r>
+              <a:rPr i="1"/>
+              <a:t>engine.py </a:t>
+            </a:r>
+            <a:r>
+              <a:rPr i="0"/>
+              <a:t>fajla tako da podržava potrebne funkcije aktivacije</a:t>
+            </a:r>
+            <a:endParaRPr i="0"/>
+          </a:p>
+          <a:p>
+            <a:pPr>
+              <a:defRPr/>
+            </a:pPr>
+            <a:r>
+              <a:rPr i="0"/>
+              <a:t>Takođe treba omogućiti podešavanje aktivacione funkcije zasebno za svaki sloj</a:t>
+            </a:r>
+            <a:endParaRPr i="0"/>
+          </a:p>
+          <a:p>
+            <a:pPr lvl="1">
+              <a:defRPr/>
+            </a:pPr>
+            <a:r>
+              <a:rPr i="0"/>
+              <a:t>Npr. neuroni u jednom sloju koriste tanh, u drugom sigmoidu</a:t>
+            </a:r>
+            <a:endParaRPr i="0"/>
+          </a:p>
+          <a:p>
+            <a:pPr>
+              <a:defRPr/>
+            </a:pPr>
+            <a:r>
+              <a:rPr i="0"/>
+              <a:t>Izuzetak je </a:t>
+            </a:r>
+            <a:r>
+              <a:rPr i="1"/>
+              <a:t>softmax</a:t>
+            </a:r>
+            <a:r>
+              <a:rPr i="0"/>
+              <a:t> aktivaciona funkcija, jer vrednost zavisi od drugih izlaza u sloju</a:t>
+            </a:r>
+            <a:endParaRPr i="0"/>
+          </a:p>
+          <a:p>
+            <a:pPr>
+              <a:defRPr/>
+            </a:pPr>
+            <a:r>
+              <a:rPr i="0"/>
+              <a:t>Zato se predlaže da bude </a:t>
+            </a:r>
+            <a:r>
+              <a:rPr i="1"/>
+              <a:t>softmax </a:t>
+            </a:r>
+            <a:r>
+              <a:rPr i="0"/>
+              <a:t>implementiran unutar </a:t>
+            </a:r>
+            <a:r>
+              <a:rPr i="1"/>
+              <a:t>Layer (</a:t>
+            </a:r>
+            <a:r>
+              <a:rPr i="0"/>
+              <a:t>ili </a:t>
+            </a:r>
+            <a:r>
+              <a:rPr i="1"/>
+              <a:t>Network)</a:t>
+            </a:r>
+            <a:r>
+              <a:rPr i="0"/>
+              <a:t> klase</a:t>
+            </a:r>
+            <a:endParaRPr i="0"/>
+          </a:p>
+          <a:p>
+            <a:pPr>
+              <a:defRPr/>
+            </a:pPr>
+            <a:endParaRPr i="0"/>
+          </a:p>
+        </p:txBody>
+      </p:sp>
+    </p:spTree>
+  </p:cSld>
+  <p:clrMapOvr>
+    <a:masterClrMapping/>
+  </p:clrMapOvr>
+  <mc:AlternateContent xmlns:mc="http://schemas.openxmlformats.org/markup-compatibility/2006">
+    <mc:Choice xmlns:p159="http://schemas.microsoft.com/office/powerpoint/2015/09/main" xmlns:p14="http://schemas.microsoft.com/office/powerpoint/2010/main" Requires="p159">
+      <p:transition p14:dur="500" advClick="1"/>
+    </mc:Choice>
+    <mc:Fallback>
+      <p:transition advClick="1"/>
+    </mc:Fallback>
+  </mc:AlternateContent>
+</p:sld>
+</file>
+
+<file path=ppt/slides/slide23.xml><?xml version="1.0" encoding="utf-8"?>
+<p:sld xmlns:a="http://schemas.openxmlformats.org/drawingml/2006/main" xmlns:r="http://schemas.openxmlformats.org/officeDocument/2006/relationships" xmlns:p="http://schemas.openxmlformats.org/presentationml/2006/main" xmlns:m="http://schemas.openxmlformats.org/officeDocument/2006/math" xmlns:w="http://schemas.openxmlformats.org/wordprocessingml/2006/main" xmlns:mc="http://schemas.openxmlformats.org/markup-compatibility/2006" showMasterPhAnim="0" showMasterSp="1" show="1">
+  <p:cSld name="">
+    <p:spTree>
+      <p:nvGrpSpPr>
+        <p:cNvPr id="1" name=""/>
+        <p:cNvGrpSpPr/>
+        <p:nvPr/>
+      </p:nvGrpSpPr>
+      <p:grpSpPr bwMode="auto">
+        <a:xfrm>
+          <a:off x="0" y="0"/>
+          <a:ext cx="0" cy="0"/>
+          <a:chOff x="0" y="0"/>
+          <a:chExt cx="0" cy="0"/>
+        </a:xfrm>
+      </p:grpSpPr>
+      <p:sp>
+        <p:nvSpPr>
+          <p:cNvPr id="2101323454" name="Title 1"/>
+          <p:cNvSpPr>
+            <a:spLocks noGrp="1"/>
+          </p:cNvSpPr>
+          <p:nvPr>
+            <p:ph type="title"/>
+          </p:nvPr>
+        </p:nvSpPr>
+        <p:spPr bwMode="auto"/>
+        <p:txBody>
+          <a:bodyPr/>
+          <a:lstStyle/>
+          <a:p>
+            <a:pPr>
+              <a:defRPr/>
+            </a:pPr>
+            <a:r>
+              <a:rPr/>
+              <a:t>Proširenje metode obuke modela</a:t>
+            </a:r>
+            <a:endParaRPr/>
+          </a:p>
+        </p:txBody>
+      </p:sp>
+      <p:sp>
+        <p:nvSpPr>
+          <p:cNvPr id="1048269322" name="Text Placeholder 2"/>
+          <p:cNvSpPr>
+            <a:spLocks noGrp="1"/>
+          </p:cNvSpPr>
+          <p:nvPr>
+            <p:ph idx="1"/>
+          </p:nvPr>
+        </p:nvSpPr>
+        <p:spPr bwMode="auto">
+          <a:prstGeom prst="rect">
+            <a:avLst/>
+          </a:prstGeom>
+        </p:spPr>
+        <p:txBody>
+          <a:bodyPr/>
+          <a:lstStyle/>
+          <a:p>
+            <a:pPr>
+              <a:defRPr/>
+            </a:pPr>
+            <a:r>
+              <a:rPr/>
+              <a:t>Unakrsna entropija, L1 i L2 norme regularizacije, kao i paralelizacija procesa ne zahtevaju značajne izmene koda van metode obuke</a:t>
+            </a:r>
+            <a:endParaRPr/>
+          </a:p>
+          <a:p>
+            <a:pPr lvl="1">
+              <a:defRPr/>
+            </a:pPr>
+            <a:r>
+              <a:rPr/>
+              <a:t>Omogućiti podešavanje procesa obuke</a:t>
+            </a:r>
+            <a:endParaRPr/>
+          </a:p>
+          <a:p>
+            <a:pPr lvl="0">
+              <a:defRPr/>
+            </a:pPr>
+            <a:r>
+              <a:rPr/>
+              <a:t>Unakrsna entropija zahteva dodavanje računanje logaritma unutar </a:t>
+            </a:r>
+            <a:r>
+              <a:rPr i="1"/>
+              <a:t>Value </a:t>
+            </a:r>
+            <a:r>
+              <a:rPr i="0"/>
+              <a:t>klase</a:t>
+            </a:r>
+            <a:endParaRPr i="0"/>
+          </a:p>
+        </p:txBody>
+      </p:sp>
+    </p:spTree>
+  </p:cSld>
+  <p:clrMapOvr>
+    <a:masterClrMapping/>
+  </p:clrMapOvr>
+  <mc:AlternateContent xmlns:mc="http://schemas.openxmlformats.org/markup-compatibility/2006">
+    <mc:Choice xmlns:p159="http://schemas.microsoft.com/office/powerpoint/2015/09/main" xmlns:p14="http://schemas.microsoft.com/office/powerpoint/2010/main" Requires="p159">
+      <p:transition p14:dur="500" advClick="1"/>
+    </mc:Choice>
+    <mc:Fallback>
+      <p:transition advClick="1"/>
+    </mc:Fallback>
+  </mc:AlternateContent>
+</p:sld>
+</file>
+
+<file path=ppt/slides/slide24.xml><?xml version="1.0" encoding="utf-8"?>
+<p:sld xmlns:a="http://schemas.openxmlformats.org/drawingml/2006/main" xmlns:r="http://schemas.openxmlformats.org/officeDocument/2006/relationships" xmlns:p="http://schemas.openxmlformats.org/presentationml/2006/main" xmlns:m="http://schemas.openxmlformats.org/officeDocument/2006/math" xmlns:w="http://schemas.openxmlformats.org/wordprocessingml/2006/main" xmlns:mc="http://schemas.openxmlformats.org/markup-compatibility/2006" showMasterPhAnim="0" showMasterSp="1" show="1">
+  <p:cSld name="">
+    <p:spTree>
+      <p:nvGrpSpPr>
+        <p:cNvPr id="1" name=""/>
+        <p:cNvGrpSpPr/>
+        <p:nvPr/>
+      </p:nvGrpSpPr>
+      <p:grpSpPr bwMode="auto">
+        <a:xfrm>
+          <a:off x="0" y="0"/>
+          <a:ext cx="0" cy="0"/>
+          <a:chOff x="0" y="0"/>
+          <a:chExt cx="0" cy="0"/>
+        </a:xfrm>
+      </p:grpSpPr>
+      <p:sp>
+        <p:nvSpPr>
+          <p:cNvPr id="298091824" name="Title 1"/>
+          <p:cNvSpPr>
+            <a:spLocks noGrp="1"/>
+          </p:cNvSpPr>
+          <p:nvPr>
+            <p:ph type="title"/>
+          </p:nvPr>
+        </p:nvSpPr>
+        <p:spPr bwMode="auto"/>
+        <p:txBody>
+          <a:bodyPr/>
+          <a:lstStyle/>
+          <a:p>
+            <a:pPr>
+              <a:defRPr/>
+            </a:pPr>
+            <a:r>
+              <a:rPr lang="sr-Latn-RS"/>
+              <a:t>Reference</a:t>
+            </a:r>
+            <a:endParaRPr/>
+          </a:p>
+        </p:txBody>
+      </p:sp>
+      <p:sp>
+        <p:nvSpPr>
+          <p:cNvPr id="1366284141" name="Content Placeholder 2"/>
+          <p:cNvSpPr>
+            <a:spLocks noGrp="1"/>
+          </p:cNvSpPr>
+          <p:nvPr>
+            <p:ph idx="1"/>
+          </p:nvPr>
+        </p:nvSpPr>
+        <p:spPr bwMode="auto"/>
+        <p:txBody>
+          <a:bodyPr>
+            <a:normAutofit/>
+          </a:bodyPr>
+          <a:lstStyle/>
+          <a:p>
+            <a:pPr marL="0" indent="0">
+              <a:buNone/>
+              <a:defRPr/>
+            </a:pPr>
+            <a:r>
+              <a:rPr lang="sr-Latn-RS" sz="2400"/>
+              <a:t>Obavezan slajd u kome će biti navedeni izvori koji su iskorišćeni za pripremu prezentacije. Npr.</a:t>
+            </a:r>
+            <a:endParaRPr/>
+          </a:p>
+          <a:p>
+            <a:pPr marL="514350" indent="-514350">
+              <a:buFont typeface="+mj-lt"/>
+              <a:buAutoNum type="arabicParenR"/>
+              <a:defRPr/>
+            </a:pPr>
+            <a:r>
+              <a:rPr lang="sr-Latn-RS" sz="2400"/>
+              <a:t>Slajdovi sa predavanja: S. </a:t>
+            </a:r>
+            <a:r>
+              <a:rPr lang="sr-Latn-RS" sz="2400"/>
+              <a:t>Pathak</a:t>
+            </a:r>
+            <a:r>
+              <a:rPr lang="sr-Latn-RS" sz="2400"/>
+              <a:t>, R. Fernandez „</a:t>
+            </a:r>
+            <a:r>
+              <a:rPr lang="en-US" sz="2400"/>
+              <a:t>Module 5: Recurrence (RNN) and Long-Short Term Memory (LSTM)</a:t>
+            </a:r>
+            <a:r>
+              <a:rPr lang="sr-Latn-RS" sz="2400"/>
+              <a:t>“ in </a:t>
+            </a:r>
+            <a:r>
+              <a:rPr lang="sr-Latn-RS" sz="2400" i="1"/>
+              <a:t>Deep</a:t>
+            </a:r>
+            <a:r>
+              <a:rPr lang="sr-Latn-RS" sz="2400" i="1"/>
+              <a:t> </a:t>
+            </a:r>
+            <a:r>
+              <a:rPr lang="sr-Latn-RS" sz="2400" i="1"/>
+              <a:t>Learning</a:t>
+            </a:r>
+            <a:r>
+              <a:rPr lang="sr-Latn-RS" sz="2400" i="1"/>
+              <a:t> </a:t>
+            </a:r>
+            <a:r>
+              <a:rPr lang="sr-Latn-RS" sz="2400" i="1"/>
+              <a:t>Explained</a:t>
+            </a:r>
+            <a:r>
+              <a:rPr lang="sr-Latn-RS" sz="2400" i="1"/>
+              <a:t>  - </a:t>
+            </a:r>
+            <a:r>
+              <a:rPr lang="sr-Latn-RS" sz="2400" u="sng">
+                <a:hlinkClick r:id="rId3" tooltip=""/>
+              </a:rPr>
+              <a:t>https://raw.githubusercontent.com/huynhthaihoa/Microsoft-Deep-Learning-Explained/master/Slides/Module%2005_RNN%20and%20LSTM.pdf</a:t>
+            </a:r>
+            <a:r>
+              <a:rPr lang="sr-Latn-RS" sz="2400"/>
+              <a:t> </a:t>
+            </a:r>
+            <a:r>
+              <a:rPr lang="sr-Latn-RS" sz="2400"/>
+              <a:t>pristupljeno</a:t>
+            </a:r>
+            <a:r>
+              <a:rPr lang="sr-Latn-RS" sz="2400"/>
+              <a:t> 16.11.2022.</a:t>
+            </a:r>
+            <a:endParaRPr/>
+          </a:p>
+          <a:p>
+            <a:pPr marL="514350" indent="-514350">
+              <a:buFont typeface="+mj-lt"/>
+              <a:buAutoNum type="arabicParenR"/>
+              <a:defRPr/>
+            </a:pPr>
+            <a:r>
+              <a:rPr lang="en-US" sz="2400"/>
+              <a:t>I</a:t>
+            </a:r>
+            <a:r>
+              <a:rPr lang="sr-Latn-RS" sz="2400"/>
+              <a:t>.</a:t>
+            </a:r>
+            <a:r>
+              <a:rPr lang="en-US" sz="2400"/>
+              <a:t> Goodfellow</a:t>
+            </a:r>
+            <a:r>
+              <a:rPr lang="sr-Latn-RS" sz="2400"/>
+              <a:t>, </a:t>
+            </a:r>
+            <a:r>
+              <a:rPr lang="en-US" sz="2400"/>
+              <a:t>Y</a:t>
+            </a:r>
+            <a:r>
+              <a:rPr lang="sr-Latn-RS" sz="2400"/>
+              <a:t>.</a:t>
+            </a:r>
+            <a:r>
+              <a:rPr lang="en-US" sz="2400"/>
+              <a:t> Bengio  A</a:t>
+            </a:r>
+            <a:r>
+              <a:rPr lang="sr-Latn-RS" sz="2400"/>
+              <a:t>.</a:t>
+            </a:r>
+            <a:r>
+              <a:rPr lang="en-US" sz="2400"/>
+              <a:t> Courville</a:t>
+            </a:r>
+            <a:r>
+              <a:rPr lang="sr-Latn-RS" sz="2400"/>
+              <a:t>,</a:t>
+            </a:r>
+            <a:r>
+              <a:rPr lang="en-US" sz="2400"/>
+              <a:t> </a:t>
+            </a:r>
+            <a:r>
+              <a:rPr lang="sr-Latn-RS" sz="2400"/>
+              <a:t>“</a:t>
+            </a:r>
+            <a:r>
+              <a:rPr lang="sr-Latn-RS" sz="2400"/>
+              <a:t>Ch</a:t>
+            </a:r>
+            <a:r>
+              <a:rPr lang="sr-Latn-RS" sz="2400"/>
+              <a:t>. 8 -</a:t>
+            </a:r>
+            <a:r>
+              <a:rPr lang="en-US" sz="2400"/>
+              <a:t> </a:t>
+            </a:r>
+            <a:r>
+              <a:rPr lang="sr-Latn-RS" sz="2400"/>
+              <a:t>Convolutional</a:t>
+            </a:r>
+            <a:r>
+              <a:rPr lang="sr-Latn-RS" sz="2400"/>
+              <a:t> </a:t>
+            </a:r>
+            <a:r>
+              <a:rPr lang="sr-Latn-RS" sz="2400"/>
+              <a:t>Networks</a:t>
+            </a:r>
+            <a:r>
+              <a:rPr lang="sr-Latn-RS" sz="2400"/>
+              <a:t>“ </a:t>
+            </a:r>
+            <a:r>
+              <a:rPr lang="sr-Latn-RS" sz="2400" i="1"/>
+              <a:t>Deep</a:t>
+            </a:r>
+            <a:r>
+              <a:rPr lang="sr-Latn-RS" sz="2400" i="1"/>
+              <a:t> </a:t>
+            </a:r>
+            <a:r>
+              <a:rPr lang="sr-Latn-RS" sz="2400" i="1"/>
+              <a:t>Learning</a:t>
+            </a:r>
+            <a:r>
+              <a:rPr lang="sr-Latn-RS" sz="2400" i="1"/>
+              <a:t>, MIT </a:t>
+            </a:r>
+            <a:r>
+              <a:rPr lang="sr-Latn-RS" sz="2400" i="1"/>
+              <a:t>Press</a:t>
+            </a:r>
+            <a:r>
+              <a:rPr lang="sr-Latn-RS" sz="2400" i="1"/>
+              <a:t>, </a:t>
+            </a:r>
+            <a:r>
+              <a:rPr lang="sr-Latn-RS" sz="2400"/>
+              <a:t>2016, url: https://www.deeplearningbook.org/contents/convnets.html  (pristupljeno: 8.11.2022).</a:t>
+            </a:r>
+            <a:endParaRPr lang="sr-Latn-RS" sz="2400" i="1"/>
+          </a:p>
+          <a:p>
+            <a:pPr marL="0" indent="0">
+              <a:buNone/>
+              <a:defRPr/>
+            </a:pPr>
+            <a:r>
+              <a:rPr lang="sr-Latn-RS"/>
+              <a:t> </a:t>
+            </a:r>
+            <a:endParaRPr/>
+          </a:p>
+        </p:txBody>
+      </p:sp>
+      <p:sp>
+        <p:nvSpPr>
+          <p:cNvPr id="733698181" name=""/>
+          <p:cNvSpPr/>
+          <p:nvPr/>
+        </p:nvSpPr>
+        <p:spPr bwMode="auto">
+          <a:xfrm>
+            <a:off x="5968559" y="3291840"/>
+            <a:ext cx="255240" cy="366119"/>
+          </a:xfrm>
+        </p:spPr>
+        <p:txBody>
+          <a:bodyPr rot="0" spcFirstLastPara="0" vertOverflow="overflow" horzOverflow="overflow" vert="horz" wrap="square" lIns="91440" tIns="45720" rIns="91440" bIns="45720" numCol="1" spcCol="0" rtlCol="0" fromWordArt="0" anchor="t" anchorCtr="0" forceAA="0" upright="0" compatLnSpc="1">
+            <a:prstTxWarp prst="textNoShape"/>
+            <a:spAutoFit/>
+          </a:bodyPr>
+          <a:p>
+            <a:pPr>
+              <a:defRPr/>
+            </a:pPr>
+            <a:r>
+              <a:rPr sz="1200" b="0" i="0" u="none">
+                <a:solidFill>
+                  <a:srgbClr val="000000"/>
+                </a:solidFill>
+                <a:latin typeface="Times New Roman"/>
+                <a:ea typeface="Times New Roman"/>
+                <a:cs typeface="Times New Roman"/>
+              </a:rPr>
+              <a:t> </a:t>
+            </a:r>
+            <a:endParaRPr/>
           </a:p>
         </p:txBody>
       </p:sp>
@@ -6659,7 +8248,7 @@
       </p:grpSpPr>
       <p:sp>
         <p:nvSpPr>
-          <p:cNvPr id="26168030" name="Title 3"/>
+          <p:cNvPr id="730384014" name="Title 3"/>
           <p:cNvSpPr>
             <a:spLocks noGrp="1"/>
           </p:cNvSpPr>
@@ -6722,7 +8311,7 @@
       </p:grpSpPr>
       <p:sp>
         <p:nvSpPr>
-          <p:cNvPr id="1501710395" name="Title 1"/>
+          <p:cNvPr id="1885239947" name="Title 1"/>
           <p:cNvSpPr>
             <a:spLocks noGrp="1"/>
           </p:cNvSpPr>
@@ -6760,7 +8349,7 @@
       </p:sp>
       <p:sp>
         <p:nvSpPr>
-          <p:cNvPr id="1375085175" name="Content Placeholder 2"/>
+          <p:cNvPr id="956970701" name="Content Placeholder 2"/>
           <p:cNvSpPr>
             <a:spLocks noGrp="1"/>
           </p:cNvSpPr>
@@ -7017,7 +8606,7 @@
       </p:grpSpPr>
       <p:sp>
         <p:nvSpPr>
-          <p:cNvPr id="681531302" name="Title 1"/>
+          <p:cNvPr id="1690324387" name="Title 1"/>
           <p:cNvSpPr>
             <a:spLocks noGrp="1"/>
           </p:cNvSpPr>
@@ -7047,7 +8636,7 @@
       </p:sp>
       <p:pic>
         <p:nvPicPr>
-          <p:cNvPr id="1014812993" name=""/>
+          <p:cNvPr id="1745892757" name=""/>
           <p:cNvPicPr>
             <a:picLocks noChangeAspect="1"/>
           </p:cNvPicPr>
@@ -7069,6 +8658,58 @@
           </a:prstGeom>
         </p:spPr>
       </p:pic>
+      <p:sp>
+        <p:nvSpPr>
+          <p:cNvPr id="681399036" name=""/>
+          <p:cNvSpPr txBox="1"/>
+          <p:nvPr/>
+        </p:nvSpPr>
+        <p:spPr bwMode="auto">
+          <a:xfrm rot="0" flipH="0" flipV="0">
+            <a:off x="2534929" y="5265707"/>
+            <a:ext cx="6552166" cy="640440"/>
+          </a:xfrm>
+          <a:prstGeom prst="rect">
+            <a:avLst/>
+          </a:prstGeom>
+          <a:noFill/>
+        </p:spPr>
+        <p:txBody>
+          <a:bodyPr vertOverflow="overflow" horzOverflow="overflow" vert="horz" wrap="square" lIns="91440" tIns="45720" rIns="91440" bIns="45720" numCol="1" spcCol="0" rtlCol="0" fromWordArt="0" anchor="t" anchorCtr="0" forceAA="0" upright="0" compatLnSpc="0">
+            <a:spAutoFit/>
+          </a:bodyPr>
+          <a:p>
+            <a:pPr>
+              <a:defRPr/>
+            </a:pPr>
+            <a:r>
+              <a:rPr/>
+              <a:t>Primer grafa računanja napravljen pomoću </a:t>
+            </a:r>
+            <a:r>
+              <a:rPr/>
+              <a:t>graphviz alata: </a:t>
+            </a:r>
+            <a:r>
+              <a:rPr lang="sr-Latn-RS" sz="1800" b="0" i="0" u="sng" strike="noStrike" cap="none" spc="0">
+                <a:solidFill>
+                  <a:schemeClr val="tx1"/>
+                </a:solidFill>
+                <a:latin typeface="Calibri"/>
+                <a:ea typeface="Calibri"/>
+                <a:cs typeface="Calibri"/>
+                <a:hlinkClick r:id="rId4" tooltip=""/>
+              </a:rPr>
+              <a:t>https://graphviz.org/</a:t>
+            </a:r>
+            <a:r>
+              <a:rPr/>
+              <a:t> </a:t>
+            </a:r>
+            <a:endParaRPr/>
+          </a:p>
+        </p:txBody>
+      </p:sp>
     </p:spTree>
   </p:cSld>
   <p:clrMapOvr>
@@ -7104,7 +8745,7 @@
       </p:grpSpPr>
       <p:sp>
         <p:nvSpPr>
-          <p:cNvPr id="1004823041" name="Title 1"/>
+          <p:cNvPr id="1293575333" name="Title 1"/>
           <p:cNvSpPr>
             <a:spLocks noGrp="1"/>
           </p:cNvSpPr>
@@ -7134,7 +8775,7 @@
       </p:sp>
       <p:pic>
         <p:nvPicPr>
-          <p:cNvPr id="1907846507" name=""/>
+          <p:cNvPr id="681284457" name=""/>
           <p:cNvPicPr>
             <a:picLocks noChangeAspect="1"/>
           </p:cNvPicPr>
@@ -7156,6 +8797,85 @@
           </a:prstGeom>
         </p:spPr>
       </p:pic>
+      <p:sp>
+        <p:nvSpPr>
+          <p:cNvPr id="1023382420" name=""/>
+          <p:cNvSpPr txBox="1"/>
+          <p:nvPr/>
+        </p:nvSpPr>
+        <p:spPr bwMode="auto">
+          <a:xfrm rot="0" flipH="0" flipV="0">
+            <a:off x="3092051" y="6011818"/>
+            <a:ext cx="7570358" cy="640440"/>
+          </a:xfrm>
+          <a:prstGeom prst="rect">
+            <a:avLst/>
+          </a:prstGeom>
+          <a:noFill/>
+        </p:spPr>
+        <p:txBody>
+          <a:bodyPr vertOverflow="overflow" horzOverflow="overflow" vert="horz" wrap="none" lIns="91440" tIns="45720" rIns="91440" bIns="45720" numCol="1" spcCol="0" rtlCol="0" fromWordArt="0" anchor="t" anchorCtr="0" forceAA="0" upright="0" compatLnSpc="0">
+            <a:spAutoFit/>
+          </a:bodyPr>
+          <a:p>
+            <a:pPr>
+              <a:defRPr/>
+            </a:pPr>
+            <a:r>
+              <a:rPr lang="sr-Latn-RS" sz="1800" b="0" i="0" u="none" strike="noStrike" cap="none" spc="0">
+                <a:solidFill>
+                  <a:schemeClr val="tx1"/>
+                </a:solidFill>
+                <a:latin typeface="+mn-lt"/>
+                <a:ea typeface="+mn-ea"/>
+                <a:cs typeface="+mn-cs"/>
+              </a:rPr>
+              <a:t>Primer grafa računanja napravljen pomoću </a:t>
+            </a:r>
+            <a:r>
+              <a:rPr lang="sr-Latn-RS" sz="1800" b="0" i="0" u="none" strike="noStrike" cap="none" spc="0">
+                <a:solidFill>
+                  <a:schemeClr val="tx1"/>
+                </a:solidFill>
+                <a:latin typeface="+mn-lt"/>
+                <a:ea typeface="+mn-ea"/>
+                <a:cs typeface="+mn-cs"/>
+              </a:rPr>
+              <a:t>graphviz alata: </a:t>
+            </a:r>
+            <a:r>
+              <a:rPr lang="sr-Latn-RS" sz="1800" b="0" i="0" u="sng" strike="noStrike" cap="none" spc="0">
+                <a:solidFill>
+                  <a:schemeClr val="tx1"/>
+                </a:solidFill>
+                <a:latin typeface="Calibri"/>
+                <a:ea typeface="Calibri"/>
+                <a:cs typeface="Calibri"/>
+                <a:hlinkClick r:id="rId4" tooltip=""/>
+              </a:rPr>
+              <a:t>https://graphviz.org/</a:t>
+            </a:r>
+            <a:r>
+              <a:rPr lang="sr-Latn-RS" sz="1800" b="0" i="0" u="none" strike="noStrike" cap="none" spc="0">
+                <a:solidFill>
+                  <a:schemeClr val="tx1"/>
+                </a:solidFill>
+                <a:latin typeface="+mn-lt"/>
+                <a:ea typeface="+mn-ea"/>
+                <a:cs typeface="+mn-cs"/>
+              </a:rPr>
+              <a:t> </a:t>
+            </a:r>
+            <a:endParaRPr sz="1800"/>
+          </a:p>
+          <a:p>
+            <a:pPr>
+              <a:defRPr/>
+            </a:pPr>
+            <a:endParaRPr/>
+          </a:p>
+        </p:txBody>
+      </p:sp>
     </p:spTree>
   </p:cSld>
   <p:clrMapOvr>
@@ -7191,7 +8911,7 @@
       </p:grpSpPr>
       <p:sp>
         <p:nvSpPr>
-          <p:cNvPr id="1507354235" name="Title 1"/>
+          <p:cNvPr id="1248260589" name="Title 1"/>
           <p:cNvSpPr>
             <a:spLocks noGrp="1"/>
           </p:cNvSpPr>
@@ -7229,7 +8949,7 @@
       </p:sp>
       <p:sp>
         <p:nvSpPr>
-          <p:cNvPr id="1529940432" name="Text Placeholder 2"/>
+          <p:cNvPr id="1015649148" name="Text Placeholder 2"/>
           <p:cNvSpPr>
             <a:spLocks noGrp="1"/>
           </p:cNvSpPr>
@@ -7370,7 +9090,7 @@
       </p:grpSpPr>
       <p:sp>
         <p:nvSpPr>
-          <p:cNvPr id="227182925" name="Title 3"/>
+          <p:cNvPr id="384598747" name="Title 3"/>
           <p:cNvSpPr>
             <a:spLocks noGrp="1"/>
           </p:cNvSpPr>
@@ -7496,7 +9216,7 @@
       </p:grpSpPr>
       <p:sp>
         <p:nvSpPr>
-          <p:cNvPr id="35098416" name="Title 1"/>
+          <p:cNvPr id="610596216" name="Title 1"/>
           <p:cNvSpPr>
             <a:spLocks noGrp="1"/>
           </p:cNvSpPr>
@@ -7526,7 +9246,7 @@
       </p:sp>
       <p:sp>
         <p:nvSpPr>
-          <p:cNvPr id="70127424" name="Text Placeholder 2"/>
+          <p:cNvPr id="46340662" name="Text Placeholder 2"/>
           <p:cNvSpPr>
             <a:spLocks noGrp="1"/>
           </p:cNvSpPr>
@@ -7935,7 +9655,7 @@
       </p:sp>
       <p:pic>
         <p:nvPicPr>
-          <p:cNvPr id="2013153210" name=""/>
+          <p:cNvPr id="857692826" name=""/>
           <p:cNvPicPr>
             <a:picLocks noChangeAspect="1"/>
           </p:cNvPicPr>
@@ -7947,14 +9667,97 @@
         </p:blipFill>
         <p:spPr bwMode="auto">
           <a:xfrm flipH="0" flipV="0">
-            <a:off x="7144930" y="1326549"/>
-            <a:ext cx="5054817" cy="5528707"/>
+            <a:off x="6982922" y="1388063"/>
+            <a:ext cx="4668685" cy="5106375"/>
           </a:xfrm>
           <a:prstGeom prst="rect">
             <a:avLst/>
           </a:prstGeom>
         </p:spPr>
       </p:pic>
+      <p:sp>
+        <p:nvSpPr>
+          <p:cNvPr id="307189208" name=""/>
+          <p:cNvSpPr txBox="1"/>
+          <p:nvPr/>
+        </p:nvSpPr>
+        <p:spPr bwMode="auto">
+          <a:xfrm rot="0" flipH="0" flipV="0">
+            <a:off x="7800636" y="6430524"/>
+            <a:ext cx="914400" cy="366119"/>
+          </a:xfrm>
+          <a:prstGeom prst="rect">
+            <a:avLst/>
+          </a:prstGeom>
+          <a:noFill/>
+        </p:spPr>
+        <p:txBody>
+          <a:bodyPr vertOverflow="overflow" horzOverflow="overflow" vert="horz" wrap="none" lIns="91440" tIns="45720" rIns="91440" bIns="45720" numCol="1" spcCol="0" rtlCol="0" fromWordArt="0" anchor="t" anchorCtr="0" forceAA="0" upright="0" compatLnSpc="0">
+            <a:spAutoFit/>
+          </a:bodyPr>
+          <a:p>
+            <a:pPr>
+              <a:defRPr/>
+            </a:pPr>
+            <a:endParaRPr/>
+          </a:p>
+        </p:txBody>
+      </p:sp>
+      <p:sp>
+        <p:nvSpPr>
+          <p:cNvPr id="95160383" name=""/>
+          <p:cNvSpPr txBox="1"/>
+          <p:nvPr/>
+        </p:nvSpPr>
+        <p:spPr bwMode="auto">
+          <a:xfrm rot="0" flipH="0" flipV="0">
+            <a:off x="7252499" y="6174219"/>
+            <a:ext cx="4635987" cy="640440"/>
+          </a:xfrm>
+          <a:prstGeom prst="rect">
+            <a:avLst/>
+          </a:prstGeom>
+          <a:noFill/>
+        </p:spPr>
+        <p:txBody>
+          <a:bodyPr vertOverflow="overflow" horzOverflow="overflow" vert="horz" wrap="none" lIns="91440" tIns="45720" rIns="91440" bIns="45720" numCol="1" spcCol="0" rtlCol="0" fromWordArt="0" anchor="t" anchorCtr="0" forceAA="0" upright="0" compatLnSpc="0">
+            <a:spAutoFit/>
+          </a:bodyPr>
+          <a:p>
+            <a:pPr>
+              <a:defRPr/>
+            </a:pPr>
+            <a:r>
+              <a:rPr/>
+              <a:t>Grafici aktivacionih funkcija napravljeni pomoću</a:t>
+            </a:r>
+            <a:br>
+              <a:rPr/>
+            </a:br>
+            <a:r>
+              <a:rPr/>
+              <a:t>matplotlib biblioteke: </a:t>
+            </a:r>
+            <a:r>
+              <a:rPr lang="sr-Latn-RS" sz="1800" b="0" i="0" u="sng" strike="noStrike" cap="none" spc="0">
+                <a:solidFill>
+                  <a:schemeClr val="tx1"/>
+                </a:solidFill>
+                <a:latin typeface="Calibri"/>
+                <a:ea typeface="Calibri"/>
+                <a:cs typeface="Calibri"/>
+                <a:hlinkClick r:id="rId4" tooltip=""/>
+              </a:rPr>
+              <a:t>https://matplotlib.org/</a:t>
+            </a:r>
+            <a:r>
+              <a:rPr/>
+              <a:t> </a:t>
+            </a:r>
+            <a:endParaRPr/>
+          </a:p>
+        </p:txBody>
+      </p:sp>
     </p:spTree>
   </p:cSld>
   <p:clrMapOvr>

--- a/doc/prezentacija.pptx
+++ b/doc/prezentacija.pptx
@@ -157,7 +157,7 @@
       </p:grpSpPr>
       <p:sp>
         <p:nvSpPr>
-          <p:cNvPr id="2102620920" name="Header Placeholder 1"/>
+          <p:cNvPr id="1285784492" name="Header Placeholder 1"/>
           <p:cNvSpPr>
             <a:spLocks noGrp="1"/>
           </p:cNvSpPr>
@@ -191,7 +191,7 @@
       </p:sp>
       <p:sp>
         <p:nvSpPr>
-          <p:cNvPr id="1406750037" name="Date Placeholder 2"/>
+          <p:cNvPr id="11844983" name="Date Placeholder 2"/>
           <p:cNvSpPr>
             <a:spLocks noGrp="1"/>
           </p:cNvSpPr>
@@ -229,7 +229,7 @@
       </p:sp>
       <p:sp>
         <p:nvSpPr>
-          <p:cNvPr id="1029582395" name="Slide Image Placeholder 3"/>
+          <p:cNvPr id="989314075" name="Slide Image Placeholder 3"/>
           <p:cNvSpPr>
             <a:spLocks noChangeAspect="1" noGrp="1" noRot="1"/>
           </p:cNvSpPr>
@@ -265,7 +265,7 @@
       </p:sp>
       <p:sp>
         <p:nvSpPr>
-          <p:cNvPr id="1646073498" name="Notes Placeholder 4"/>
+          <p:cNvPr id="1787146800" name="Notes Placeholder 4"/>
           <p:cNvSpPr>
             <a:spLocks noGrp="1"/>
           </p:cNvSpPr>
@@ -339,7 +339,7 @@
       </p:sp>
       <p:sp>
         <p:nvSpPr>
-          <p:cNvPr id="1994829091" name="Footer Placeholder 5"/>
+          <p:cNvPr id="533423064" name="Footer Placeholder 5"/>
           <p:cNvSpPr>
             <a:spLocks noGrp="1"/>
           </p:cNvSpPr>
@@ -373,7 +373,7 @@
       </p:sp>
       <p:sp>
         <p:nvSpPr>
-          <p:cNvPr id="1760315716" name="Slide Number Placeholder 6"/>
+          <p:cNvPr id="629452611" name="Slide Number Placeholder 6"/>
           <p:cNvSpPr>
             <a:spLocks noGrp="1"/>
           </p:cNvSpPr>
@@ -526,7 +526,7 @@
       </p:grpSpPr>
       <p:sp>
         <p:nvSpPr>
-          <p:cNvPr id="572427112" name="Slide Image Placeholder 1"/>
+          <p:cNvPr id="713483353" name="Slide Image Placeholder 1"/>
           <p:cNvSpPr>
             <a:spLocks noChangeAspect="1" noGrp="1" noRot="1"/>
           </p:cNvSpPr>
@@ -543,7 +543,7 @@
       </p:sp>
       <p:sp>
         <p:nvSpPr>
-          <p:cNvPr id="529857813" name="Notes Placeholder 2"/>
+          <p:cNvPr id="726282568" name="Notes Placeholder 2"/>
           <p:cNvSpPr>
             <a:spLocks noGrp="1"/>
           </p:cNvSpPr>
@@ -565,7 +565,7 @@
       </p:sp>
       <p:sp>
         <p:nvSpPr>
-          <p:cNvPr id="707351118" name="Slide Number Placeholder 3"/>
+          <p:cNvPr id="959498426" name="Slide Number Placeholder 3"/>
           <p:cNvSpPr>
             <a:spLocks noGrp="1"/>
           </p:cNvSpPr>
@@ -616,7 +616,7 @@
       </p:grpSpPr>
       <p:sp>
         <p:nvSpPr>
-          <p:cNvPr id="864956103" name="Slide Image Placeholder 1"/>
+          <p:cNvPr id="568007197" name="Slide Image Placeholder 1"/>
           <p:cNvSpPr>
             <a:spLocks noChangeAspect="1" noGrp="1" noRot="1"/>
           </p:cNvSpPr>
@@ -628,7 +628,7 @@
       </p:sp>
       <p:sp>
         <p:nvSpPr>
-          <p:cNvPr id="1272016208" name="Notes Placeholder 2"/>
+          <p:cNvPr id="1915366668" name="Notes Placeholder 2"/>
           <p:cNvSpPr>
             <a:spLocks noGrp="1"/>
           </p:cNvSpPr>
@@ -650,7 +650,7 @@
       </p:sp>
       <p:sp>
         <p:nvSpPr>
-          <p:cNvPr id="1344831443" name="Slide Number Placeholder 3"/>
+          <p:cNvPr id="1227295124" name="Slide Number Placeholder 3"/>
           <p:cNvSpPr>
             <a:spLocks noGrp="1"/>
           </p:cNvSpPr>
@@ -786,7 +786,7 @@
       </p:grpSpPr>
       <p:sp>
         <p:nvSpPr>
-          <p:cNvPr id="1754158772" name="Slide Image Placeholder 1"/>
+          <p:cNvPr id="800764902" name="Slide Image Placeholder 1"/>
           <p:cNvSpPr>
             <a:spLocks noChangeAspect="1" noGrp="1" noRot="1"/>
           </p:cNvSpPr>
@@ -798,7 +798,7 @@
       </p:sp>
       <p:sp>
         <p:nvSpPr>
-          <p:cNvPr id="400364458" name="Notes Placeholder 2"/>
+          <p:cNvPr id="929933904" name="Notes Placeholder 2"/>
           <p:cNvSpPr>
             <a:spLocks noGrp="1"/>
           </p:cNvSpPr>
@@ -820,7 +820,7 @@
       </p:sp>
       <p:sp>
         <p:nvSpPr>
-          <p:cNvPr id="1883188428" name="Slide Number Placeholder 3"/>
+          <p:cNvPr id="1547526054" name="Slide Number Placeholder 3"/>
           <p:cNvSpPr>
             <a:spLocks noGrp="1"/>
           </p:cNvSpPr>
@@ -871,7 +871,7 @@
       </p:grpSpPr>
       <p:sp>
         <p:nvSpPr>
-          <p:cNvPr id="1954897492" name="Slide Image Placeholder 1"/>
+          <p:cNvPr id="1613924562" name="Slide Image Placeholder 1"/>
           <p:cNvSpPr>
             <a:spLocks noChangeAspect="1" noGrp="1" noRot="1"/>
           </p:cNvSpPr>
@@ -883,7 +883,7 @@
       </p:sp>
       <p:sp>
         <p:nvSpPr>
-          <p:cNvPr id="281041068" name="Notes Placeholder 2"/>
+          <p:cNvPr id="751044591" name="Notes Placeholder 2"/>
           <p:cNvSpPr>
             <a:spLocks noGrp="1"/>
           </p:cNvSpPr>
@@ -905,7 +905,7 @@
       </p:sp>
       <p:sp>
         <p:nvSpPr>
-          <p:cNvPr id="1566297231" name="Slide Number Placeholder 3"/>
+          <p:cNvPr id="2095128261" name="Slide Number Placeholder 3"/>
           <p:cNvSpPr>
             <a:spLocks noGrp="1"/>
           </p:cNvSpPr>
@@ -956,7 +956,7 @@
       </p:grpSpPr>
       <p:sp>
         <p:nvSpPr>
-          <p:cNvPr id="314637513" name="Slide Image Placeholder 1"/>
+          <p:cNvPr id="17310415" name="Slide Image Placeholder 1"/>
           <p:cNvSpPr>
             <a:spLocks noChangeAspect="1" noGrp="1" noRot="1"/>
           </p:cNvSpPr>
@@ -968,7 +968,7 @@
       </p:sp>
       <p:sp>
         <p:nvSpPr>
-          <p:cNvPr id="1713236523" name="Notes Placeholder 2"/>
+          <p:cNvPr id="1664966631" name="Notes Placeholder 2"/>
           <p:cNvSpPr>
             <a:spLocks noGrp="1"/>
           </p:cNvSpPr>
@@ -990,7 +990,7 @@
       </p:sp>
       <p:sp>
         <p:nvSpPr>
-          <p:cNvPr id="434066305" name="Slide Number Placeholder 3"/>
+          <p:cNvPr id="985123341" name="Slide Number Placeholder 3"/>
           <p:cNvSpPr>
             <a:spLocks noGrp="1"/>
           </p:cNvSpPr>
@@ -1041,7 +1041,7 @@
       </p:grpSpPr>
       <p:sp>
         <p:nvSpPr>
-          <p:cNvPr id="1258535794" name="Slide Image Placeholder 1"/>
+          <p:cNvPr id="1642212562" name="Slide Image Placeholder 1"/>
           <p:cNvSpPr>
             <a:spLocks noChangeAspect="1" noGrp="1" noRot="1"/>
           </p:cNvSpPr>
@@ -1053,7 +1053,7 @@
       </p:sp>
       <p:sp>
         <p:nvSpPr>
-          <p:cNvPr id="473789892" name="Notes Placeholder 2"/>
+          <p:cNvPr id="1212546931" name="Notes Placeholder 2"/>
           <p:cNvSpPr>
             <a:spLocks noGrp="1"/>
           </p:cNvSpPr>
@@ -1075,7 +1075,7 @@
       </p:sp>
       <p:sp>
         <p:nvSpPr>
-          <p:cNvPr id="111550126" name="Slide Number Placeholder 3"/>
+          <p:cNvPr id="1569141418" name="Slide Number Placeholder 3"/>
           <p:cNvSpPr>
             <a:spLocks noGrp="1"/>
           </p:cNvSpPr>
@@ -1126,7 +1126,7 @@
       </p:grpSpPr>
       <p:sp>
         <p:nvSpPr>
-          <p:cNvPr id="1653969402" name="Slide Image Placeholder 1"/>
+          <p:cNvPr id="185493666" name="Slide Image Placeholder 1"/>
           <p:cNvSpPr>
             <a:spLocks noChangeAspect="1" noGrp="1" noRot="1"/>
           </p:cNvSpPr>
@@ -1138,7 +1138,7 @@
       </p:sp>
       <p:sp>
         <p:nvSpPr>
-          <p:cNvPr id="1688354499" name="Notes Placeholder 2"/>
+          <p:cNvPr id="2046966369" name="Notes Placeholder 2"/>
           <p:cNvSpPr>
             <a:spLocks noGrp="1"/>
           </p:cNvSpPr>
@@ -1160,7 +1160,7 @@
       </p:sp>
       <p:sp>
         <p:nvSpPr>
-          <p:cNvPr id="315725481" name="Slide Number Placeholder 3"/>
+          <p:cNvPr id="2146504907" name="Slide Number Placeholder 3"/>
           <p:cNvSpPr>
             <a:spLocks noGrp="1"/>
           </p:cNvSpPr>
@@ -1466,7 +1466,7 @@
       </p:grpSpPr>
       <p:sp>
         <p:nvSpPr>
-          <p:cNvPr id="942786807" name="Slide Image Placeholder 1"/>
+          <p:cNvPr id="1708145623" name="Slide Image Placeholder 1"/>
           <p:cNvSpPr>
             <a:spLocks noChangeAspect="1" noGrp="1" noRot="1"/>
           </p:cNvSpPr>
@@ -1478,7 +1478,7 @@
       </p:sp>
       <p:sp>
         <p:nvSpPr>
-          <p:cNvPr id="659686187" name="Notes Placeholder 2"/>
+          <p:cNvPr id="3739189" name="Notes Placeholder 2"/>
           <p:cNvSpPr>
             <a:spLocks noGrp="1"/>
           </p:cNvSpPr>
@@ -1500,7 +1500,7 @@
       </p:sp>
       <p:sp>
         <p:nvSpPr>
-          <p:cNvPr id="125826357" name="Slide Number Placeholder 3"/>
+          <p:cNvPr id="1615315553" name="Slide Number Placeholder 3"/>
           <p:cNvSpPr>
             <a:spLocks noGrp="1"/>
           </p:cNvSpPr>
@@ -1891,7 +1891,7 @@
       </p:grpSpPr>
       <p:sp>
         <p:nvSpPr>
-          <p:cNvPr id="1467868835" name="Slide Image Placeholder 1"/>
+          <p:cNvPr id="1962875477" name="Slide Image Placeholder 1"/>
           <p:cNvSpPr>
             <a:spLocks noChangeAspect="1" noGrp="1" noRot="1"/>
           </p:cNvSpPr>
@@ -1903,7 +1903,7 @@
       </p:sp>
       <p:sp>
         <p:nvSpPr>
-          <p:cNvPr id="15744817" name="Notes Placeholder 2"/>
+          <p:cNvPr id="1618830410" name="Notes Placeholder 2"/>
           <p:cNvSpPr>
             <a:spLocks noGrp="1"/>
           </p:cNvSpPr>
@@ -1925,7 +1925,7 @@
       </p:sp>
       <p:sp>
         <p:nvSpPr>
-          <p:cNvPr id="673149296" name="Slide Number Placeholder 3"/>
+          <p:cNvPr id="1649809656" name="Slide Number Placeholder 3"/>
           <p:cNvSpPr>
             <a:spLocks noGrp="1"/>
           </p:cNvSpPr>
@@ -1976,7 +1976,7 @@
       </p:grpSpPr>
       <p:sp>
         <p:nvSpPr>
-          <p:cNvPr id="1928191951" name="Slide Image Placeholder 1"/>
+          <p:cNvPr id="1600835402" name="Slide Image Placeholder 1"/>
           <p:cNvSpPr>
             <a:spLocks noChangeAspect="1" noGrp="1" noRot="1"/>
           </p:cNvSpPr>
@@ -1988,7 +1988,7 @@
       </p:sp>
       <p:sp>
         <p:nvSpPr>
-          <p:cNvPr id="1207617864" name="Notes Placeholder 2"/>
+          <p:cNvPr id="285953335" name="Notes Placeholder 2"/>
           <p:cNvSpPr>
             <a:spLocks noGrp="1"/>
           </p:cNvSpPr>
@@ -2010,7 +2010,7 @@
       </p:sp>
       <p:sp>
         <p:nvSpPr>
-          <p:cNvPr id="1240808182" name="Slide Number Placeholder 3"/>
+          <p:cNvPr id="474194947" name="Slide Number Placeholder 3"/>
           <p:cNvSpPr>
             <a:spLocks noGrp="1"/>
           </p:cNvSpPr>
@@ -2061,7 +2061,7 @@
       </p:grpSpPr>
       <p:sp>
         <p:nvSpPr>
-          <p:cNvPr id="2134828858" name="Slide Image Placeholder 1"/>
+          <p:cNvPr id="417340542" name="Slide Image Placeholder 1"/>
           <p:cNvSpPr>
             <a:spLocks noChangeAspect="1" noGrp="1" noRot="1"/>
           </p:cNvSpPr>
@@ -2073,7 +2073,7 @@
       </p:sp>
       <p:sp>
         <p:nvSpPr>
-          <p:cNvPr id="1891396323" name="Notes Placeholder 2"/>
+          <p:cNvPr id="1352316437" name="Notes Placeholder 2"/>
           <p:cNvSpPr>
             <a:spLocks noGrp="1"/>
           </p:cNvSpPr>
@@ -2105,7 +2105,7 @@
       </p:sp>
       <p:sp>
         <p:nvSpPr>
-          <p:cNvPr id="1650843162" name="Slide Number Placeholder 3"/>
+          <p:cNvPr id="855489378" name="Slide Number Placeholder 3"/>
           <p:cNvSpPr>
             <a:spLocks noGrp="1"/>
           </p:cNvSpPr>
@@ -2156,7 +2156,7 @@
       </p:grpSpPr>
       <p:sp>
         <p:nvSpPr>
-          <p:cNvPr id="104146917" name="Slide Image Placeholder 1"/>
+          <p:cNvPr id="2083295785" name="Slide Image Placeholder 1"/>
           <p:cNvSpPr>
             <a:spLocks noChangeAspect="1" noGrp="1" noRot="1"/>
           </p:cNvSpPr>
@@ -2168,7 +2168,7 @@
       </p:sp>
       <p:sp>
         <p:nvSpPr>
-          <p:cNvPr id="731837253" name="Notes Placeholder 2"/>
+          <p:cNvPr id="1981788470" name="Notes Placeholder 2"/>
           <p:cNvSpPr>
             <a:spLocks noGrp="1"/>
           </p:cNvSpPr>
@@ -2190,7 +2190,7 @@
       </p:sp>
       <p:sp>
         <p:nvSpPr>
-          <p:cNvPr id="818508819" name="Slide Number Placeholder 3"/>
+          <p:cNvPr id="1447613244" name="Slide Number Placeholder 3"/>
           <p:cNvSpPr>
             <a:spLocks noGrp="1"/>
           </p:cNvSpPr>
@@ -2241,7 +2241,7 @@
       </p:grpSpPr>
       <p:sp>
         <p:nvSpPr>
-          <p:cNvPr id="1115554839" name="Slide Image Placeholder 1"/>
+          <p:cNvPr id="928106823" name="Slide Image Placeholder 1"/>
           <p:cNvSpPr>
             <a:spLocks noChangeAspect="1" noGrp="1" noRot="1"/>
           </p:cNvSpPr>
@@ -2253,7 +2253,7 @@
       </p:sp>
       <p:sp>
         <p:nvSpPr>
-          <p:cNvPr id="1068722626" name="Notes Placeholder 2"/>
+          <p:cNvPr id="1615052560" name="Notes Placeholder 2"/>
           <p:cNvSpPr>
             <a:spLocks noGrp="1"/>
           </p:cNvSpPr>
@@ -2275,7 +2275,7 @@
       </p:sp>
       <p:sp>
         <p:nvSpPr>
-          <p:cNvPr id="1297205966" name="Slide Number Placeholder 3"/>
+          <p:cNvPr id="448400466" name="Slide Number Placeholder 3"/>
           <p:cNvSpPr>
             <a:spLocks noGrp="1"/>
           </p:cNvSpPr>
@@ -2326,7 +2326,7 @@
       </p:grpSpPr>
       <p:sp>
         <p:nvSpPr>
-          <p:cNvPr id="215324305" name="Slide Image Placeholder 1"/>
+          <p:cNvPr id="1635077068" name="Slide Image Placeholder 1"/>
           <p:cNvSpPr>
             <a:spLocks noChangeAspect="1" noGrp="1" noRot="1"/>
           </p:cNvSpPr>
@@ -2338,7 +2338,7 @@
       </p:sp>
       <p:sp>
         <p:nvSpPr>
-          <p:cNvPr id="84899668" name="Notes Placeholder 2"/>
+          <p:cNvPr id="1397052043" name="Notes Placeholder 2"/>
           <p:cNvSpPr>
             <a:spLocks noGrp="1"/>
           </p:cNvSpPr>
@@ -2360,7 +2360,7 @@
       </p:sp>
       <p:sp>
         <p:nvSpPr>
-          <p:cNvPr id="1085656721" name="Slide Number Placeholder 3"/>
+          <p:cNvPr id="97227205" name="Slide Number Placeholder 3"/>
           <p:cNvSpPr>
             <a:spLocks noGrp="1"/>
           </p:cNvSpPr>
@@ -2411,7 +2411,7 @@
       </p:grpSpPr>
       <p:sp>
         <p:nvSpPr>
-          <p:cNvPr id="767493641" name="Slide Image Placeholder 1"/>
+          <p:cNvPr id="413043746" name="Slide Image Placeholder 1"/>
           <p:cNvSpPr>
             <a:spLocks noChangeAspect="1" noGrp="1" noRot="1"/>
           </p:cNvSpPr>
@@ -2423,7 +2423,7 @@
       </p:sp>
       <p:sp>
         <p:nvSpPr>
-          <p:cNvPr id="1256687285" name="Notes Placeholder 2"/>
+          <p:cNvPr id="488976742" name="Notes Placeholder 2"/>
           <p:cNvSpPr>
             <a:spLocks noGrp="1"/>
           </p:cNvSpPr>
@@ -2445,7 +2445,7 @@
       </p:sp>
       <p:sp>
         <p:nvSpPr>
-          <p:cNvPr id="1606622740" name="Slide Number Placeholder 3"/>
+          <p:cNvPr id="215408342" name="Slide Number Placeholder 3"/>
           <p:cNvSpPr>
             <a:spLocks noGrp="1"/>
           </p:cNvSpPr>
@@ -2496,7 +2496,7 @@
       </p:grpSpPr>
       <p:sp>
         <p:nvSpPr>
-          <p:cNvPr id="1672611759" name="Slide Image Placeholder 1"/>
+          <p:cNvPr id="128692628" name="Slide Image Placeholder 1"/>
           <p:cNvSpPr>
             <a:spLocks noChangeAspect="1" noGrp="1" noRot="1"/>
           </p:cNvSpPr>
@@ -2508,7 +2508,7 @@
       </p:sp>
       <p:sp>
         <p:nvSpPr>
-          <p:cNvPr id="1754179872" name="Notes Placeholder 2"/>
+          <p:cNvPr id="1652795113" name="Notes Placeholder 2"/>
           <p:cNvSpPr>
             <a:spLocks noGrp="1"/>
           </p:cNvSpPr>
@@ -2530,7 +2530,7 @@
       </p:sp>
       <p:sp>
         <p:nvSpPr>
-          <p:cNvPr id="2071571208" name="Slide Number Placeholder 3"/>
+          <p:cNvPr id="912999768" name="Slide Number Placeholder 3"/>
           <p:cNvSpPr>
             <a:spLocks noGrp="1"/>
           </p:cNvSpPr>
@@ -2581,7 +2581,7 @@
       </p:grpSpPr>
       <p:sp>
         <p:nvSpPr>
-          <p:cNvPr id="1442459406" name="Title 1"/>
+          <p:cNvPr id="217094876" name="Title 1"/>
           <p:cNvSpPr>
             <a:spLocks noGrp="1"/>
           </p:cNvSpPr>
@@ -2621,7 +2621,7 @@
       </p:sp>
       <p:sp>
         <p:nvSpPr>
-          <p:cNvPr id="965001423" name="Subtitle 2"/>
+          <p:cNvPr id="1491183151" name="Subtitle 2"/>
           <p:cNvSpPr>
             <a:spLocks noGrp="1"/>
           </p:cNvSpPr>
@@ -2694,7 +2694,7 @@
       </p:sp>
       <p:sp>
         <p:nvSpPr>
-          <p:cNvPr id="2118380189" name="Rectangle 7"/>
+          <p:cNvPr id="1632243678" name="Rectangle 7"/>
           <p:cNvSpPr/>
           <p:nvPr userDrawn="1"/>
         </p:nvSpPr>
@@ -2736,7 +2736,7 @@
       </p:sp>
       <p:sp>
         <p:nvSpPr>
-          <p:cNvPr id="1560001750" name="Rectangle 10"/>
+          <p:cNvPr id="823547908" name="Rectangle 10"/>
           <p:cNvSpPr/>
           <p:nvPr userDrawn="1"/>
         </p:nvSpPr>
@@ -2803,7 +2803,7 @@
       </p:grpSpPr>
       <p:sp>
         <p:nvSpPr>
-          <p:cNvPr id="2122610233" name="Title 1"/>
+          <p:cNvPr id="463898574" name="Title 1"/>
           <p:cNvSpPr>
             <a:spLocks noGrp="1"/>
           </p:cNvSpPr>
@@ -2843,7 +2843,7 @@
       </p:sp>
       <p:sp>
         <p:nvSpPr>
-          <p:cNvPr id="792748482" name="Rectangle 7"/>
+          <p:cNvPr id="202164656" name="Rectangle 7"/>
           <p:cNvSpPr/>
           <p:nvPr userDrawn="1"/>
         </p:nvSpPr>
@@ -2885,7 +2885,7 @@
       </p:sp>
       <p:sp>
         <p:nvSpPr>
-          <p:cNvPr id="810325483" name="Rectangle 10"/>
+          <p:cNvPr id="1751986028" name="Rectangle 10"/>
           <p:cNvSpPr/>
           <p:nvPr userDrawn="1"/>
         </p:nvSpPr>
@@ -2952,7 +2952,7 @@
       </p:grpSpPr>
       <p:sp>
         <p:nvSpPr>
-          <p:cNvPr id="1853471594" name="Content Placeholder 2"/>
+          <p:cNvPr id="1388683734" name="Content Placeholder 2"/>
           <p:cNvSpPr>
             <a:spLocks noGrp="1"/>
           </p:cNvSpPr>
@@ -3049,7 +3049,7 @@
       </p:sp>
       <p:sp>
         <p:nvSpPr>
-          <p:cNvPr id="1583687452" name="Content Placeholder 3"/>
+          <p:cNvPr id="1078865077" name="Content Placeholder 3"/>
           <p:cNvSpPr>
             <a:spLocks noGrp="1"/>
           </p:cNvSpPr>
@@ -3146,7 +3146,7 @@
       </p:sp>
       <p:sp>
         <p:nvSpPr>
-          <p:cNvPr id="689715249" name="Slide Number Placeholder 6"/>
+          <p:cNvPr id="1947991310" name="Slide Number Placeholder 6"/>
           <p:cNvSpPr>
             <a:spLocks noGrp="1"/>
           </p:cNvSpPr>
@@ -3177,7 +3177,7 @@
       </p:sp>
       <p:sp>
         <p:nvSpPr>
-          <p:cNvPr id="1277664289" name="Footer Placeholder 5"/>
+          <p:cNvPr id="184363957" name="Footer Placeholder 5"/>
           <p:cNvSpPr>
             <a:spLocks noGrp="1"/>
           </p:cNvSpPr>
@@ -3203,7 +3203,7 @@
       </p:sp>
       <p:sp>
         <p:nvSpPr>
-          <p:cNvPr id="1668804471" name="Title Placeholder 1"/>
+          <p:cNvPr id="1188019652" name="Title Placeholder 1"/>
           <p:cNvSpPr>
             <a:spLocks noGrp="1"/>
           </p:cNvSpPr>
@@ -3239,7 +3239,7 @@
       </p:sp>
       <p:cxnSp>
         <p:nvCxnSpPr>
-          <p:cNvPr id="1764745174" name="Straight Connector 9"/>
+          <p:cNvPr id="264191595" name="Straight Connector 9"/>
           <p:cNvCxnSpPr/>
           <p:nvPr userDrawn="1"/>
         </p:nvCxnSpPr>
@@ -3302,7 +3302,7 @@
       </p:grpSpPr>
       <p:sp>
         <p:nvSpPr>
-          <p:cNvPr id="1696504307" name="Title 1"/>
+          <p:cNvPr id="514988496" name="Title 1"/>
           <p:cNvSpPr>
             <a:spLocks noGrp="1"/>
           </p:cNvSpPr>
@@ -3328,7 +3328,7 @@
       </p:sp>
       <p:sp>
         <p:nvSpPr>
-          <p:cNvPr id="888357281" name="Footer Placeholder 2"/>
+          <p:cNvPr id="1528513754" name="Footer Placeholder 2"/>
           <p:cNvSpPr>
             <a:spLocks noGrp="1"/>
           </p:cNvSpPr>
@@ -3354,7 +3354,7 @@
       </p:sp>
       <p:sp>
         <p:nvSpPr>
-          <p:cNvPr id="1695708406" name="Slide Number Placeholder 3"/>
+          <p:cNvPr id="2013693273" name="Slide Number Placeholder 3"/>
           <p:cNvSpPr>
             <a:spLocks noGrp="1"/>
           </p:cNvSpPr>
@@ -3380,7 +3380,7 @@
       </p:sp>
       <p:sp>
         <p:nvSpPr>
-          <p:cNvPr id="1214998381" name="Text Placeholder 2"/>
+          <p:cNvPr id="1102321391" name="Text Placeholder 2"/>
           <p:cNvSpPr>
             <a:spLocks noGrp="1"/>
           </p:cNvSpPr>
@@ -3456,7 +3456,7 @@
       </p:sp>
       <p:cxnSp>
         <p:nvCxnSpPr>
-          <p:cNvPr id="329834795" name="Straight Connector 5"/>
+          <p:cNvPr id="561289247" name="Straight Connector 5"/>
           <p:cNvCxnSpPr/>
           <p:nvPr userDrawn="1"/>
         </p:nvCxnSpPr>
@@ -3519,7 +3519,7 @@
       </p:grpSpPr>
       <p:sp>
         <p:nvSpPr>
-          <p:cNvPr id="40386782" name="Title 1"/>
+          <p:cNvPr id="1162731761" name="Title 1"/>
           <p:cNvSpPr>
             <a:spLocks noGrp="1"/>
           </p:cNvSpPr>
@@ -3551,7 +3551,7 @@
       </p:sp>
       <p:sp>
         <p:nvSpPr>
-          <p:cNvPr id="321603047" name="Footer Placeholder 2"/>
+          <p:cNvPr id="236886458" name="Footer Placeholder 2"/>
           <p:cNvSpPr>
             <a:spLocks noGrp="1"/>
           </p:cNvSpPr>
@@ -3577,7 +3577,7 @@
       </p:sp>
       <p:sp>
         <p:nvSpPr>
-          <p:cNvPr id="129171096" name="Slide Number Placeholder 3"/>
+          <p:cNvPr id="429045343" name="Slide Number Placeholder 3"/>
           <p:cNvSpPr>
             <a:spLocks noGrp="1"/>
           </p:cNvSpPr>
@@ -3603,7 +3603,7 @@
       </p:sp>
       <p:sp>
         <p:nvSpPr>
-          <p:cNvPr id="1497837763" name="Text Placeholder 2"/>
+          <p:cNvPr id="263880560" name="Text Placeholder 2"/>
           <p:cNvSpPr>
             <a:spLocks noGrp="1"/>
           </p:cNvSpPr>
@@ -3705,7 +3705,7 @@
       </p:sp>
       <p:cxnSp>
         <p:nvCxnSpPr>
-          <p:cNvPr id="1005447090" name="Straight Connector 5"/>
+          <p:cNvPr id="2026227756" name="Straight Connector 5"/>
           <p:cNvCxnSpPr/>
           <p:nvPr userDrawn="1"/>
         </p:nvCxnSpPr>
@@ -3743,7 +3743,7 @@
       </p:cxnSp>
       <p:pic>
         <p:nvPicPr>
-          <p:cNvPr id="1413656209" name="Graphic 6" descr="Bullseye"/>
+          <p:cNvPr id="2120448711" name="Graphic 6" descr="Bullseye"/>
           <p:cNvPicPr>
             <a:picLocks noChangeAspect="1"/>
           </p:cNvPicPr>
@@ -3796,7 +3796,7 @@
       </p:grpSpPr>
       <p:sp>
         <p:nvSpPr>
-          <p:cNvPr id="1719134285" name="Title 1"/>
+          <p:cNvPr id="1442754474" name="Title 1"/>
           <p:cNvSpPr>
             <a:spLocks noGrp="1"/>
           </p:cNvSpPr>
@@ -3836,7 +3836,7 @@
       </p:sp>
       <p:sp>
         <p:nvSpPr>
-          <p:cNvPr id="1260410831" name="Content Placeholder 2"/>
+          <p:cNvPr id="1203011231" name="Content Placeholder 2"/>
           <p:cNvSpPr>
             <a:spLocks noGrp="1"/>
           </p:cNvSpPr>
@@ -3948,7 +3948,7 @@
       </p:sp>
       <p:sp>
         <p:nvSpPr>
-          <p:cNvPr id="1383787553" name="Footer Placeholder 12"/>
+          <p:cNvPr id="74753227" name="Footer Placeholder 12"/>
           <p:cNvSpPr>
             <a:spLocks noGrp="1"/>
           </p:cNvSpPr>
@@ -3974,7 +3974,7 @@
       </p:sp>
       <p:sp>
         <p:nvSpPr>
-          <p:cNvPr id="2020714531" name="Slide Number Placeholder 13"/>
+          <p:cNvPr id="295188268" name="Slide Number Placeholder 13"/>
           <p:cNvSpPr>
             <a:spLocks noGrp="1"/>
           </p:cNvSpPr>
@@ -4000,7 +4000,7 @@
       </p:sp>
       <p:cxnSp>
         <p:nvCxnSpPr>
-          <p:cNvPr id="1951323602" name="Straight Connector 5"/>
+          <p:cNvPr id="2091263146" name="Straight Connector 5"/>
           <p:cNvCxnSpPr/>
           <p:nvPr userDrawn="1"/>
         </p:nvCxnSpPr>
@@ -4068,7 +4068,7 @@
       </p:grpSpPr>
       <p:sp>
         <p:nvSpPr>
-          <p:cNvPr id="261915799" name="Title Placeholder 1"/>
+          <p:cNvPr id="901053127" name="Title Placeholder 1"/>
           <p:cNvSpPr>
             <a:spLocks noGrp="1"/>
           </p:cNvSpPr>
@@ -4104,7 +4104,7 @@
       </p:sp>
       <p:sp>
         <p:nvSpPr>
-          <p:cNvPr id="1377075475" name="Text Placeholder 2"/>
+          <p:cNvPr id="751775431" name="Text Placeholder 2"/>
           <p:cNvSpPr>
             <a:spLocks noGrp="1"/>
           </p:cNvSpPr>
@@ -4180,7 +4180,7 @@
       </p:sp>
       <p:sp>
         <p:nvSpPr>
-          <p:cNvPr id="440952865" name="Footer Placeholder 4"/>
+          <p:cNvPr id="1487992769" name="Footer Placeholder 4"/>
           <p:cNvSpPr>
             <a:spLocks noGrp="1"/>
           </p:cNvSpPr>
@@ -4223,7 +4223,7 @@
       </p:sp>
       <p:sp>
         <p:nvSpPr>
-          <p:cNvPr id="709651010" name="Slide Number Placeholder 5"/>
+          <p:cNvPr id="231614297" name="Slide Number Placeholder 5"/>
           <p:cNvSpPr>
             <a:spLocks noGrp="1"/>
           </p:cNvSpPr>
@@ -4268,7 +4268,7 @@
       </p:sp>
       <p:pic>
         <p:nvPicPr>
-          <p:cNvPr id="1649053174" name="Picture 6"/>
+          <p:cNvPr id="246327303" name="Picture 6"/>
           <p:cNvPicPr>
             <a:picLocks noChangeAspect="1"/>
           </p:cNvPicPr>
@@ -4298,7 +4298,7 @@
       </p:pic>
       <p:pic>
         <p:nvPicPr>
-          <p:cNvPr id="425443262" name="Picture 7"/>
+          <p:cNvPr id="290520324" name="Picture 7"/>
           <p:cNvPicPr>
             <a:picLocks noChangeAspect="1"/>
           </p:cNvPicPr>
@@ -4328,7 +4328,7 @@
       </p:pic>
       <p:pic>
         <p:nvPicPr>
-          <p:cNvPr id="760925330" name="Content Placeholder 3"/>
+          <p:cNvPr id="895780556" name="Content Placeholder 3"/>
           <p:cNvPicPr>
             <a:picLocks noChangeAspect="1"/>
           </p:cNvPicPr>
@@ -4694,7 +4694,7 @@
       </p:grpSpPr>
       <p:sp>
         <p:nvSpPr>
-          <p:cNvPr id="1702164269" name="Title 1"/>
+          <p:cNvPr id="1731241248" name="Title 1"/>
           <p:cNvSpPr>
             <a:spLocks noGrp="1"/>
           </p:cNvSpPr>
@@ -4785,7 +4785,7 @@
       </p:grpSpPr>
       <p:sp>
         <p:nvSpPr>
-          <p:cNvPr id="127732543" name="Title 1"/>
+          <p:cNvPr id="1538603999" name="Title 1"/>
           <p:cNvSpPr>
             <a:spLocks noGrp="1"/>
           </p:cNvSpPr>
@@ -4811,7 +4811,7 @@
       </p:sp>
       <p:sp>
         <p:nvSpPr>
-          <p:cNvPr id="1639961870" name="Text Placeholder 2"/>
+          <p:cNvPr id="365354668" name="Text Placeholder 2"/>
           <p:cNvSpPr>
             <a:spLocks noGrp="1"/>
           </p:cNvSpPr>
@@ -5634,7 +5634,7 @@
       </p:grpSpPr>
       <p:sp>
         <p:nvSpPr>
-          <p:cNvPr id="68055846" name="Title 1"/>
+          <p:cNvPr id="2037796966" name="Title 1"/>
           <p:cNvSpPr>
             <a:spLocks noGrp="1"/>
           </p:cNvSpPr>
@@ -5660,7 +5660,7 @@
       </p:sp>
       <p:sp>
         <p:nvSpPr>
-          <p:cNvPr id="2138005985" name="Text Placeholder 2"/>
+          <p:cNvPr id="1749866997" name="Text Placeholder 2"/>
           <p:cNvSpPr>
             <a:spLocks noGrp="1"/>
           </p:cNvSpPr>
@@ -5901,7 +5901,7 @@
       </p:grpSpPr>
       <p:sp>
         <p:nvSpPr>
-          <p:cNvPr id="1979607431" name="Title 1"/>
+          <p:cNvPr id="87154617" name="Title 1"/>
           <p:cNvSpPr>
             <a:spLocks noGrp="1"/>
           </p:cNvSpPr>
@@ -5927,7 +5927,7 @@
       </p:sp>
       <p:sp>
         <p:nvSpPr>
-          <p:cNvPr id="1740281718" name="Text Placeholder 2"/>
+          <p:cNvPr id="2095905324" name="Text Placeholder 2"/>
           <p:cNvSpPr>
             <a:spLocks noGrp="1"/>
           </p:cNvSpPr>
@@ -6431,7 +6431,7 @@
       </p:grpSpPr>
       <p:sp>
         <p:nvSpPr>
-          <p:cNvPr id="1173411693" name="Title 1"/>
+          <p:cNvPr id="771067620" name="Title 1"/>
           <p:cNvSpPr>
             <a:spLocks noGrp="1"/>
           </p:cNvSpPr>
@@ -6457,7 +6457,7 @@
       </p:sp>
       <p:sp>
         <p:nvSpPr>
-          <p:cNvPr id="313325264" name="Text Placeholder 2"/>
+          <p:cNvPr id="943866768" name="Text Placeholder 2"/>
           <p:cNvSpPr>
             <a:spLocks noGrp="1"/>
           </p:cNvSpPr>
@@ -6566,7 +6566,7 @@
       </p:grpSpPr>
       <p:sp>
         <p:nvSpPr>
-          <p:cNvPr id="2131831347" name="Title 1"/>
+          <p:cNvPr id="593362497" name="Title 1"/>
           <p:cNvSpPr>
             <a:spLocks noGrp="1"/>
           </p:cNvSpPr>
@@ -6592,7 +6592,7 @@
       </p:sp>
       <p:sp>
         <p:nvSpPr>
-          <p:cNvPr id="1441595811" name="Text Placeholder 2"/>
+          <p:cNvPr id="2049423643" name="Text Placeholder 2"/>
           <p:cNvSpPr>
             <a:spLocks noGrp="1"/>
           </p:cNvSpPr>
@@ -6725,7 +6725,7 @@
       </p:grpSpPr>
       <p:sp>
         <p:nvSpPr>
-          <p:cNvPr id="327247656" name="Title 1"/>
+          <p:cNvPr id="1648192299" name="Title 1"/>
           <p:cNvSpPr>
             <a:spLocks noGrp="1"/>
           </p:cNvSpPr>
@@ -7262,7 +7262,7 @@
       </p:grpSpPr>
       <p:sp>
         <p:nvSpPr>
-          <p:cNvPr id="802492744" name="Title 1"/>
+          <p:cNvPr id="740949748" name="Title 1"/>
           <p:cNvSpPr>
             <a:spLocks noGrp="1"/>
           </p:cNvSpPr>
@@ -7288,7 +7288,7 @@
       </p:sp>
       <p:sp>
         <p:nvSpPr>
-          <p:cNvPr id="388898845" name="Content Placeholder 2"/>
+          <p:cNvPr id="1399591662" name="Content Placeholder 2"/>
           <p:cNvSpPr>
             <a:spLocks noGrp="1"/>
           </p:cNvSpPr>
@@ -7862,7 +7862,11 @@
             </a:pPr>
             <a:r>
               <a:rPr/>
-              <a:t>Unakrsna entropija, L1 i L2 norme regularizacije, kao i paralelizacija procesa ne zahtevaju značajne izmene koda van metode obuke</a:t>
+              <a:t>Pro</a:t>
+            </a:r>
+            <a:r>
+              <a:rPr/>
+              <a:t>širiti izbor ciljnih funkcija implementacijom unakrsne entropije</a:t>
             </a:r>
             <a:endParaRPr/>
           </a:p>
@@ -7872,9 +7876,13 @@
             </a:pPr>
             <a:r>
               <a:rPr/>
-              <a:t>Omogućiti podešavanje procesa obuke</a:t>
-            </a:r>
-            <a:endParaRPr/>
+              <a:t>Zahteva da se doda logaritamska funkcija u klasu </a:t>
+            </a:r>
+            <a:r>
+              <a:rPr i="1"/>
+              <a:t>Value</a:t>
+            </a:r>
+            <a:endParaRPr i="0"/>
           </a:p>
           <a:p>
             <a:pPr lvl="0">
@@ -7882,17 +7890,33 @@
             </a:pPr>
             <a:r>
               <a:rPr/>
-              <a:t>Unakrsna entropija zahteva dodavanje računanje logaritma unutar </a:t>
-            </a:r>
-            <a:r>
-              <a:rPr i="1"/>
-              <a:t>Value </a:t>
-            </a:r>
-            <a:r>
-              <a:rPr i="0"/>
-              <a:t>klase</a:t>
-            </a:r>
-            <a:endParaRPr i="0"/>
+              <a:t>Omogu</a:t>
+            </a:r>
+            <a:r>
+              <a:rPr/>
+              <a:t>ćiti primenu L1 ili L2 regularizacije tokom obuke</a:t>
+            </a:r>
+            <a:endParaRPr/>
+          </a:p>
+          <a:p>
+            <a:pPr lvl="0">
+              <a:defRPr/>
+            </a:pPr>
+            <a:r>
+              <a:rPr/>
+              <a:t>Ubrzati obuku modela paralelizacijom zasnovanoj na simuliranoj federalnoj obuci</a:t>
+            </a:r>
+            <a:endParaRPr/>
+          </a:p>
+          <a:p>
+            <a:pPr lvl="1">
+              <a:defRPr/>
+            </a:pPr>
+            <a:r>
+              <a:rPr/>
+              <a:t>Broj paralelnih zadataka mora biti podesiv</a:t>
+            </a:r>
+            <a:endParaRPr/>
           </a:p>
         </p:txBody>
       </p:sp>
@@ -7931,7 +7955,7 @@
       </p:grpSpPr>
       <p:sp>
         <p:nvSpPr>
-          <p:cNvPr id="298091824" name="Title 1"/>
+          <p:cNvPr id="1180580742" name="Title 1"/>
           <p:cNvSpPr>
             <a:spLocks noGrp="1"/>
           </p:cNvSpPr>
@@ -7957,7 +7981,7 @@
       </p:sp>
       <p:sp>
         <p:nvSpPr>
-          <p:cNvPr id="1366284141" name="Content Placeholder 2"/>
+          <p:cNvPr id="507625145" name="Content Placeholder 2"/>
           <p:cNvSpPr>
             <a:spLocks noGrp="1"/>
           </p:cNvSpPr>
@@ -7972,204 +7996,127 @@
           </a:bodyPr>
           <a:lstStyle/>
           <a:p>
+            <a:pPr marL="349965" indent="-349965">
+              <a:buClr>
+                <a:schemeClr val="accent1">
+                  <a:lumMod val="50000"/>
+                </a:schemeClr>
+              </a:buClr>
+              <a:buFont typeface="+mj-lt"/>
+              <a:buAutoNum type="arabicParenR"/>
+              <a:defRPr/>
+            </a:pPr>
+            <a:r>
+              <a:rPr lang="en-US" sz="2400"/>
+              <a:t>I</a:t>
+            </a:r>
+            <a:r>
+              <a:rPr lang="sr-Latn-RS" sz="2400"/>
+              <a:t>.</a:t>
+            </a:r>
+            <a:r>
+              <a:rPr lang="en-US" sz="2400"/>
+              <a:t> Goodfellow</a:t>
+            </a:r>
+            <a:r>
+              <a:rPr lang="sr-Latn-RS" sz="2400"/>
+              <a:t>, </a:t>
+            </a:r>
+            <a:r>
+              <a:rPr lang="en-US" sz="2400"/>
+              <a:t>Y</a:t>
+            </a:r>
+            <a:r>
+              <a:rPr lang="sr-Latn-RS" sz="2400"/>
+              <a:t>.</a:t>
+            </a:r>
+            <a:r>
+              <a:rPr lang="en-US" sz="2400"/>
+              <a:t> Bengio  A</a:t>
+            </a:r>
+            <a:r>
+              <a:rPr lang="sr-Latn-RS" sz="2400"/>
+              <a:t>.</a:t>
+            </a:r>
+            <a:r>
+              <a:rPr lang="en-US" sz="2400"/>
+              <a:t> Courville</a:t>
+            </a:r>
+            <a:r>
+              <a:rPr lang="sr-Latn-RS" sz="2400"/>
+              <a:t>,</a:t>
+            </a:r>
+            <a:r>
+              <a:rPr lang="en-US" sz="2400"/>
+              <a:t> </a:t>
+            </a:r>
+            <a:r>
+              <a:rPr lang="sr-Latn-RS" sz="2400"/>
+              <a:t>“</a:t>
+            </a:r>
+            <a:r>
+              <a:rPr lang="sr-Latn-RS" sz="2400"/>
+              <a:t>Ch</a:t>
+            </a:r>
+            <a:r>
+              <a:rPr lang="sr-Latn-RS" sz="2400"/>
+              <a:t>. 7 – Regularization of Deep Learning</a:t>
+            </a:r>
+            <a:r>
+              <a:rPr lang="sr-Latn-RS" sz="2400"/>
+              <a:t>“ </a:t>
+            </a:r>
+            <a:r>
+              <a:rPr lang="sr-Latn-RS" sz="2400" i="1"/>
+              <a:t>Deep</a:t>
+            </a:r>
+            <a:r>
+              <a:rPr lang="sr-Latn-RS" sz="2400" i="1"/>
+              <a:t> </a:t>
+            </a:r>
+            <a:r>
+              <a:rPr lang="sr-Latn-RS" sz="2400" i="1"/>
+              <a:t>Learning</a:t>
+            </a:r>
+            <a:r>
+              <a:rPr lang="sr-Latn-RS" sz="2400" i="1"/>
+              <a:t>, MIT </a:t>
+            </a:r>
+            <a:r>
+              <a:rPr lang="sr-Latn-RS" sz="2400" i="1"/>
+              <a:t>Press</a:t>
+            </a:r>
+            <a:r>
+              <a:rPr lang="sr-Latn-RS" sz="2400" i="1"/>
+              <a:t>, </a:t>
+            </a:r>
+            <a:r>
+              <a:rPr lang="sr-Latn-RS" sz="2400"/>
+              <a:t>2016, url: </a:t>
+            </a:r>
+            <a:r>
+              <a:rPr lang="sr-Latn-RS" sz="2400" b="0" i="0" u="none" strike="noStrike" cap="none" spc="0">
+                <a:solidFill>
+                  <a:schemeClr val="tx1"/>
+                </a:solidFill>
+                <a:latin typeface="Calibri Light"/>
+                <a:ea typeface="Calibri Light"/>
+                <a:cs typeface="Calibri Light"/>
+              </a:rPr>
+              <a:t>https://www.deeplearningbook.org/contents/regularization.html</a:t>
+            </a:r>
+            <a:r>
+              <a:rPr lang="sr-Latn-RS" sz="2400"/>
+              <a:t> (pristupljeno: 25.06.2026).</a:t>
+            </a:r>
+            <a:endParaRPr lang="sr-Latn-RS" sz="2400" i="1"/>
+          </a:p>
+          <a:p>
             <a:pPr marL="0" indent="0">
               <a:buNone/>
               <a:defRPr/>
             </a:pPr>
             <a:r>
-              <a:rPr lang="sr-Latn-RS" sz="2400"/>
-              <a:t>Obavezan slajd u kome će biti navedeni izvori koji su iskorišćeni za pripremu prezentacije. Npr.</a:t>
-            </a:r>
-            <a:endParaRPr/>
-          </a:p>
-          <a:p>
-            <a:pPr marL="514350" indent="-514350">
-              <a:buFont typeface="+mj-lt"/>
-              <a:buAutoNum type="arabicParenR"/>
-              <a:defRPr/>
-            </a:pPr>
-            <a:r>
-              <a:rPr lang="sr-Latn-RS" sz="2400"/>
-              <a:t>Slajdovi sa predavanja: S. </a:t>
-            </a:r>
-            <a:r>
-              <a:rPr lang="sr-Latn-RS" sz="2400"/>
-              <a:t>Pathak</a:t>
-            </a:r>
-            <a:r>
-              <a:rPr lang="sr-Latn-RS" sz="2400"/>
-              <a:t>, R. Fernandez „</a:t>
-            </a:r>
-            <a:r>
-              <a:rPr lang="en-US" sz="2400"/>
-              <a:t>Module 5: Recurrence (RNN) and Long-Short Term Memory (LSTM)</a:t>
-            </a:r>
-            <a:r>
-              <a:rPr lang="sr-Latn-RS" sz="2400"/>
-              <a:t>“ in </a:t>
-            </a:r>
-            <a:r>
-              <a:rPr lang="sr-Latn-RS" sz="2400" i="1"/>
-              <a:t>Deep</a:t>
-            </a:r>
-            <a:r>
-              <a:rPr lang="sr-Latn-RS" sz="2400" i="1"/>
-              <a:t> </a:t>
-            </a:r>
-            <a:r>
-              <a:rPr lang="sr-Latn-RS" sz="2400" i="1"/>
-              <a:t>Learning</a:t>
-            </a:r>
-            <a:r>
-              <a:rPr lang="sr-Latn-RS" sz="2400" i="1"/>
-              <a:t> </a:t>
-            </a:r>
-            <a:r>
-              <a:rPr lang="sr-Latn-RS" sz="2400" i="1"/>
-              <a:t>Explained</a:t>
-            </a:r>
-            <a:r>
-              <a:rPr lang="sr-Latn-RS" sz="2400" i="1"/>
-              <a:t>  - </a:t>
-            </a:r>
-            <a:r>
-              <a:rPr lang="sr-Latn-RS" sz="2400" u="sng">
-                <a:hlinkClick r:id="rId3" tooltip=""/>
-              </a:rPr>
-              <a:t>https://raw.githubusercontent.com/huynhthaihoa/Microsoft-Deep-Learning-Explained/master/Slides/Module%2005_RNN%20and%20LSTM.pdf</a:t>
-            </a:r>
-            <a:r>
-              <a:rPr lang="sr-Latn-RS" sz="2400"/>
-              <a:t> </a:t>
-            </a:r>
-            <a:r>
-              <a:rPr lang="sr-Latn-RS" sz="2400"/>
-              <a:t>pristupljeno</a:t>
-            </a:r>
-            <a:r>
-              <a:rPr lang="sr-Latn-RS" sz="2400"/>
-              <a:t> 16.11.2022.</a:t>
-            </a:r>
-            <a:endParaRPr/>
-          </a:p>
-          <a:p>
-            <a:pPr marL="514350" indent="-514350">
-              <a:buFont typeface="+mj-lt"/>
-              <a:buAutoNum type="arabicParenR"/>
-              <a:defRPr/>
-            </a:pPr>
-            <a:r>
-              <a:rPr lang="en-US" sz="2400"/>
-              <a:t>I</a:t>
-            </a:r>
-            <a:r>
-              <a:rPr lang="sr-Latn-RS" sz="2400"/>
-              <a:t>.</a:t>
-            </a:r>
-            <a:r>
-              <a:rPr lang="en-US" sz="2400"/>
-              <a:t> Goodfellow</a:t>
-            </a:r>
-            <a:r>
-              <a:rPr lang="sr-Latn-RS" sz="2400"/>
-              <a:t>, </a:t>
-            </a:r>
-            <a:r>
-              <a:rPr lang="en-US" sz="2400"/>
-              <a:t>Y</a:t>
-            </a:r>
-            <a:r>
-              <a:rPr lang="sr-Latn-RS" sz="2400"/>
-              <a:t>.</a:t>
-            </a:r>
-            <a:r>
-              <a:rPr lang="en-US" sz="2400"/>
-              <a:t> Bengio  A</a:t>
-            </a:r>
-            <a:r>
-              <a:rPr lang="sr-Latn-RS" sz="2400"/>
-              <a:t>.</a:t>
-            </a:r>
-            <a:r>
-              <a:rPr lang="en-US" sz="2400"/>
-              <a:t> Courville</a:t>
-            </a:r>
-            <a:r>
-              <a:rPr lang="sr-Latn-RS" sz="2400"/>
-              <a:t>,</a:t>
-            </a:r>
-            <a:r>
-              <a:rPr lang="en-US" sz="2400"/>
-              <a:t> </a:t>
-            </a:r>
-            <a:r>
-              <a:rPr lang="sr-Latn-RS" sz="2400"/>
-              <a:t>“</a:t>
-            </a:r>
-            <a:r>
-              <a:rPr lang="sr-Latn-RS" sz="2400"/>
-              <a:t>Ch</a:t>
-            </a:r>
-            <a:r>
-              <a:rPr lang="sr-Latn-RS" sz="2400"/>
-              <a:t>. 8 -</a:t>
-            </a:r>
-            <a:r>
-              <a:rPr lang="en-US" sz="2400"/>
-              <a:t> </a:t>
-            </a:r>
-            <a:r>
-              <a:rPr lang="sr-Latn-RS" sz="2400"/>
-              <a:t>Convolutional</a:t>
-            </a:r>
-            <a:r>
-              <a:rPr lang="sr-Latn-RS" sz="2400"/>
-              <a:t> </a:t>
-            </a:r>
-            <a:r>
-              <a:rPr lang="sr-Latn-RS" sz="2400"/>
-              <a:t>Networks</a:t>
-            </a:r>
-            <a:r>
-              <a:rPr lang="sr-Latn-RS" sz="2400"/>
-              <a:t>“ </a:t>
-            </a:r>
-            <a:r>
-              <a:rPr lang="sr-Latn-RS" sz="2400" i="1"/>
-              <a:t>Deep</a:t>
-            </a:r>
-            <a:r>
-              <a:rPr lang="sr-Latn-RS" sz="2400" i="1"/>
-              <a:t> </a:t>
-            </a:r>
-            <a:r>
-              <a:rPr lang="sr-Latn-RS" sz="2400" i="1"/>
-              <a:t>Learning</a:t>
-            </a:r>
-            <a:r>
-              <a:rPr lang="sr-Latn-RS" sz="2400" i="1"/>
-              <a:t>, MIT </a:t>
-            </a:r>
-            <a:r>
-              <a:rPr lang="sr-Latn-RS" sz="2400" i="1"/>
-              <a:t>Press</a:t>
-            </a:r>
-            <a:r>
-              <a:rPr lang="sr-Latn-RS" sz="2400" i="1"/>
-              <a:t>, </a:t>
-            </a:r>
-            <a:r>
-              <a:rPr lang="sr-Latn-RS" sz="2400"/>
-              <a:t>2016, url: https://www.deeplearningbook.org/contents/convnets.html  (pristupljeno: 8.11.2022).</a:t>
-            </a:r>
-            <a:endParaRPr lang="sr-Latn-RS" sz="2400" i="1"/>
-          </a:p>
-          <a:p>
-            <a:pPr marL="0" indent="0">
-              <a:buNone/>
-              <a:defRPr/>
-            </a:pPr>
-            <a:r>
               <a:rPr lang="sr-Latn-RS"/>
               <a:t> </a:t>
             </a:r>
@@ -8179,7 +8126,7 @@
       </p:sp>
       <p:sp>
         <p:nvSpPr>
-          <p:cNvPr id="733698181" name=""/>
+          <p:cNvPr id="959196577" name=""/>
           <p:cNvSpPr/>
           <p:nvPr/>
         </p:nvSpPr>
@@ -8248,7 +8195,7 @@
       </p:grpSpPr>
       <p:sp>
         <p:nvSpPr>
-          <p:cNvPr id="730384014" name="Title 3"/>
+          <p:cNvPr id="1498944331" name="Title 3"/>
           <p:cNvSpPr>
             <a:spLocks noGrp="1"/>
           </p:cNvSpPr>
@@ -8311,7 +8258,7 @@
       </p:grpSpPr>
       <p:sp>
         <p:nvSpPr>
-          <p:cNvPr id="1885239947" name="Title 1"/>
+          <p:cNvPr id="1171438696" name="Title 1"/>
           <p:cNvSpPr>
             <a:spLocks noGrp="1"/>
           </p:cNvSpPr>
@@ -8349,7 +8296,7 @@
       </p:sp>
       <p:sp>
         <p:nvSpPr>
-          <p:cNvPr id="956970701" name="Content Placeholder 2"/>
+          <p:cNvPr id="1075864972" name="Content Placeholder 2"/>
           <p:cNvSpPr>
             <a:spLocks noGrp="1"/>
           </p:cNvSpPr>
@@ -8606,7 +8553,7 @@
       </p:grpSpPr>
       <p:sp>
         <p:nvSpPr>
-          <p:cNvPr id="1690324387" name="Title 1"/>
+          <p:cNvPr id="804512563" name="Title 1"/>
           <p:cNvSpPr>
             <a:spLocks noGrp="1"/>
           </p:cNvSpPr>
@@ -8636,7 +8583,7 @@
       </p:sp>
       <p:pic>
         <p:nvPicPr>
-          <p:cNvPr id="1745892757" name=""/>
+          <p:cNvPr id="1687191010" name=""/>
           <p:cNvPicPr>
             <a:picLocks noChangeAspect="1"/>
           </p:cNvPicPr>
@@ -8745,7 +8692,7 @@
       </p:grpSpPr>
       <p:sp>
         <p:nvSpPr>
-          <p:cNvPr id="1293575333" name="Title 1"/>
+          <p:cNvPr id="1575976490" name="Title 1"/>
           <p:cNvSpPr>
             <a:spLocks noGrp="1"/>
           </p:cNvSpPr>
@@ -8775,7 +8722,7 @@
       </p:sp>
       <p:pic>
         <p:nvPicPr>
-          <p:cNvPr id="681284457" name=""/>
+          <p:cNvPr id="1886437915" name=""/>
           <p:cNvPicPr>
             <a:picLocks noChangeAspect="1"/>
           </p:cNvPicPr>
@@ -8911,7 +8858,7 @@
       </p:grpSpPr>
       <p:sp>
         <p:nvSpPr>
-          <p:cNvPr id="1248260589" name="Title 1"/>
+          <p:cNvPr id="703940592" name="Title 1"/>
           <p:cNvSpPr>
             <a:spLocks noGrp="1"/>
           </p:cNvSpPr>
@@ -8949,7 +8896,7 @@
       </p:sp>
       <p:sp>
         <p:nvSpPr>
-          <p:cNvPr id="1015649148" name="Text Placeholder 2"/>
+          <p:cNvPr id="1591397387" name="Text Placeholder 2"/>
           <p:cNvSpPr>
             <a:spLocks noGrp="1"/>
           </p:cNvSpPr>
@@ -9090,7 +9037,7 @@
       </p:grpSpPr>
       <p:sp>
         <p:nvSpPr>
-          <p:cNvPr id="384598747" name="Title 3"/>
+          <p:cNvPr id="917037193" name="Title 3"/>
           <p:cNvSpPr>
             <a:spLocks noGrp="1"/>
           </p:cNvSpPr>
@@ -9216,7 +9163,7 @@
       </p:grpSpPr>
       <p:sp>
         <p:nvSpPr>
-          <p:cNvPr id="610596216" name="Title 1"/>
+          <p:cNvPr id="543477107" name="Title 1"/>
           <p:cNvSpPr>
             <a:spLocks noGrp="1"/>
           </p:cNvSpPr>
@@ -9246,7 +9193,7 @@
       </p:sp>
       <p:sp>
         <p:nvSpPr>
-          <p:cNvPr id="46340662" name="Text Placeholder 2"/>
+          <p:cNvPr id="1497304010" name="Text Placeholder 2"/>
           <p:cNvSpPr>
             <a:spLocks noGrp="1"/>
           </p:cNvSpPr>
@@ -9655,7 +9602,7 @@
       </p:sp>
       <p:pic>
         <p:nvPicPr>
-          <p:cNvPr id="857692826" name=""/>
+          <p:cNvPr id="450517786" name=""/>
           <p:cNvPicPr>
             <a:picLocks noChangeAspect="1"/>
           </p:cNvPicPr>
